--- a/slides/Research-Paper-Answer-Bot.pptx
+++ b/slides/Research-Paper-Answer-Bot.pptx
@@ -4,6 +4,9 @@
   <p:sldMasterIdLst>
     <p:sldMasterId id="2147483648" r:id="rId1"/>
   </p:sldMasterIdLst>
+  <p:notesMasterIdLst>
+    <p:notesMasterId r:id="rId15"/>
+  </p:notesMasterIdLst>
   <p:sldIdLst>
     <p:sldId id="256" r:id="rId2"/>
     <p:sldId id="257" r:id="rId3"/>
@@ -19,9 +22,6 @@
     <p:sldId id="267" r:id="rId13"/>
     <p:sldId id="268" r:id="rId14"/>
   </p:sldIdLst>
-  <p:notesMasterIdLst>
-    <p:notesMasterId r:id="rId15"/>
-  </p:notesMasterIdLst>
   <p:sldSz cx="12192000" cy="6858000"/>
   <p:notesSz cx="6858000" cy="12192000"/>
   <p:defaultTextStyle>
@@ -119,18 +119,18 @@
   <p:extLst>
     <p:ext uri="{521415D9-36F7-43E2-AB2F-B90AF26B5E84}">
       <p14:sectionLst xmlns:p14="http://schemas.microsoft.com/office/powerpoint/2010/main">
-        <p14:section name="Introduction" id="{b0b4c582-4c43-6680-4921-6f845d6236ae}">
+        <p14:section name="Introduction" id="{B0B4C582-4C43-6680-4921-6F845D6236AE}">
           <p14:sldIdLst>
             <p14:sldId id="256"/>
             <p14:sldId id="257"/>
           </p14:sldIdLst>
         </p14:section>
-        <p14:section name="Approach" id="{6c5c6821-1f7f-fc4b-a2a3-6d1e7f2da99d}">
+        <p14:section name="Approach" id="{6C5C6821-1F7F-FC4B-A2A3-6D1E7F2DA99D}">
           <p14:sldIdLst>
             <p14:sldId id="258"/>
           </p14:sldIdLst>
         </p14:section>
-        <p14:section name="Data and retrieval" id="{4f4d08ac-7046-edf5-b813-2c012462d117}">
+        <p14:section name="Data and retrieval" id="{4F4D08AC-7046-EDF5-B813-2C012462D117}">
           <p14:sldIdLst>
             <p14:sldId id="259"/>
             <p14:sldId id="260"/>
@@ -138,7 +138,7 @@
             <p14:sldId id="262"/>
           </p14:sldIdLst>
         </p14:section>
-        <p14:section name="Results" id="{3a81db60-a8b1-76c8-408b-4bcd9027eac8}">
+        <p14:section name="Results" id="{3A81DB60-A8B1-76C8-408B-4BCD9027EAC8}">
           <p14:sldIdLst>
             <p14:sldId id="263"/>
             <p14:sldId id="264"/>
@@ -146,7 +146,7 @@
             <p14:sldId id="266"/>
           </p14:sldIdLst>
         </p14:section>
-        <p14:section name="Wrap-up" id="{097faa67-1859-d96e-a3a3-9f73f91c8ddb}">
+        <p14:section name="Wrap-up" id="{097FAA67-1859-D96E-A3A3-9F73F91C8DDB}">
           <p14:sldIdLst>
             <p14:sldId id="267"/>
             <p14:sldId id="268"/>
@@ -162,9 +162,11 @@
 </file>
 
 <file path=ppt/charts/chart1.xml><?xml version="1.0" encoding="utf-8"?>
-<c:chartSpace xmlns:c="http://schemas.openxmlformats.org/drawingml/2006/chart" xmlns:a="http://schemas.openxmlformats.org/drawingml/2006/main" xmlns:r="http://schemas.openxmlformats.org/officeDocument/2006/relationships">
+<c:chartSpace xmlns:c="http://schemas.openxmlformats.org/drawingml/2006/chart" xmlns:a="http://schemas.openxmlformats.org/drawingml/2006/main" xmlns:r="http://schemas.openxmlformats.org/officeDocument/2006/relationships" xmlns:c16r2="http://schemas.microsoft.com/office/drawing/2015/06/chart">
   <c:date1904 val="0"/>
+  <c:lang val="en-US"/>
   <c:roundedCorners val="1"/>
+  <c:style val="2"/>
   <c:chart>
     <c:title>
       <c:tx>
@@ -192,7 +194,6 @@
           </a:p>
         </c:rich>
       </c:tx>
-      <c:layout/>
       <c:overlay val="0"/>
     </c:title>
     <c:autoTitleDeleted val="0"/>
@@ -223,87 +224,61 @@
             <a:effectLst/>
           </c:spPr>
           <c:invertIfNegative val="0"/>
-          <c:dLbls>
-            <c:numFmt formatCode="#,##0" sourceLinked="0"/>
-            <c:txPr>
-              <a:bodyPr/>
-              <a:lstStyle/>
-              <a:p>
-                <a:pPr>
-                  <a:defRPr b="0" i="0" strike="noStrike" sz="1100" u="none">
-                    <a:solidFill>
-                      <a:srgbClr val="000000"/>
-                    </a:solidFill>
-                    <a:latin typeface="+mn-lt"/>
-                  </a:defRPr>
-                </a:pPr>
-              </a:p>
-            </c:txPr>
-            <c:showLegendKey val="0"/>
-            <c:showVal val="0"/>
-            <c:showCatName val="0"/>
-            <c:showSerName val="0"/>
-            <c:showPercent val="0"/>
-            <c:showBubbleSize val="0"/>
-            <c:showLeaderLines val="0"/>
-          </c:dLbls>
           <c:cat>
-            <c:multiLvlStrRef>
+            <c:strRef>
               <c:f>Sheet1!$A$2:$A$17</c:f>
-              <c:multiLvlStrCache>
+              <c:strCache>
                 <c:ptCount val="16"/>
-                <c:lvl>
-                  <c:pt idx="0">
-                    <c:v>recursive 800/120</c:v>
-                  </c:pt>
-                  <c:pt idx="1">
-                    <c:v>recursive 500/100</c:v>
-                  </c:pt>
-                  <c:pt idx="2">
-                    <c:v>recursive 500/150</c:v>
-                  </c:pt>
-                  <c:pt idx="3">
-                    <c:v>fixed 256/0</c:v>
-                  </c:pt>
-                  <c:pt idx="4">
-                    <c:v>fixed 256/50</c:v>
-                  </c:pt>
-                  <c:pt idx="5">
-                    <c:v>semantic p90, capped</c:v>
-                  </c:pt>
-                  <c:pt idx="6">
-                    <c:v>recursive 1200/200</c:v>
-                  </c:pt>
-                  <c:pt idx="7">
-                    <c:v>recursive 800/200</c:v>
-                  </c:pt>
-                  <c:pt idx="8">
-                    <c:v>fixed 512/0</c:v>
-                  </c:pt>
-                  <c:pt idx="9">
-                    <c:v>semantic p90</c:v>
-                  </c:pt>
-                  <c:pt idx="10">
-                    <c:v>semantic p95</c:v>
-                  </c:pt>
-                  <c:pt idx="11">
-                    <c:v>fixed 512/0, no refs (chosen)</c:v>
-                  </c:pt>
-                  <c:pt idx="12">
-                    <c:v>semantic p95, capped</c:v>
-                  </c:pt>
-                  <c:pt idx="13">
-                    <c:v>recursive 1200/150</c:v>
-                  </c:pt>
-                  <c:pt idx="14">
-                    <c:v>recursive 1200/150, no refs</c:v>
-                  </c:pt>
-                  <c:pt idx="15">
-                    <c:v>fixed 512/50</c:v>
-                  </c:pt>
-                </c:lvl>
-              </c:multiLvlStrCache>
-            </c:multiLvlStrRef>
+                <c:pt idx="0">
+                  <c:v>recursive 800/120</c:v>
+                </c:pt>
+                <c:pt idx="1">
+                  <c:v>recursive 500/100</c:v>
+                </c:pt>
+                <c:pt idx="2">
+                  <c:v>recursive 500/150</c:v>
+                </c:pt>
+                <c:pt idx="3">
+                  <c:v>fixed 256/0</c:v>
+                </c:pt>
+                <c:pt idx="4">
+                  <c:v>fixed 256/50</c:v>
+                </c:pt>
+                <c:pt idx="5">
+                  <c:v>semantic p90, capped</c:v>
+                </c:pt>
+                <c:pt idx="6">
+                  <c:v>recursive 1200/200</c:v>
+                </c:pt>
+                <c:pt idx="7">
+                  <c:v>recursive 800/200</c:v>
+                </c:pt>
+                <c:pt idx="8">
+                  <c:v>fixed 512/0</c:v>
+                </c:pt>
+                <c:pt idx="9">
+                  <c:v>semantic p90</c:v>
+                </c:pt>
+                <c:pt idx="10">
+                  <c:v>semantic p95</c:v>
+                </c:pt>
+                <c:pt idx="11">
+                  <c:v>fixed 512/0, no refs (chosen)</c:v>
+                </c:pt>
+                <c:pt idx="12">
+                  <c:v>semantic p95, capped</c:v>
+                </c:pt>
+                <c:pt idx="13">
+                  <c:v>recursive 1200/150</c:v>
+                </c:pt>
+                <c:pt idx="14">
+                  <c:v>recursive 1200/150, no refs</c:v>
+                </c:pt>
+                <c:pt idx="15">
+                  <c:v>fixed 512/50</c:v>
+                </c:pt>
+              </c:strCache>
+            </c:strRef>
           </c:cat>
           <c:val>
             <c:numRef>
@@ -312,19 +287,19 @@
                 <c:formatCode>General</c:formatCode>
                 <c:ptCount val="16"/>
                 <c:pt idx="0">
-                  <c:v>0.792</c:v>
+                  <c:v>0.79200000000000004</c:v>
                 </c:pt>
                 <c:pt idx="1">
-                  <c:v>0.819</c:v>
+                  <c:v>0.81899999999999995</c:v>
                 </c:pt>
                 <c:pt idx="2">
-                  <c:v>0.819</c:v>
+                  <c:v>0.81899999999999995</c:v>
                 </c:pt>
                 <c:pt idx="3">
-                  <c:v>0.847</c:v>
+                  <c:v>0.84699999999999998</c:v>
                 </c:pt>
                 <c:pt idx="4">
-                  <c:v>0.854</c:v>
+                  <c:v>0.85399999999999998</c:v>
                 </c:pt>
                 <c:pt idx="5">
                   <c:v>0.873</c:v>
@@ -333,35 +308,40 @@
                   <c:v>0.875</c:v>
                 </c:pt>
                 <c:pt idx="7">
-                  <c:v>0.917</c:v>
+                  <c:v>0.91700000000000004</c:v>
                 </c:pt>
                 <c:pt idx="8">
-                  <c:v>0.917</c:v>
+                  <c:v>0.91700000000000004</c:v>
                 </c:pt>
                 <c:pt idx="9">
-                  <c:v>0.917</c:v>
+                  <c:v>0.91700000000000004</c:v>
                 </c:pt>
                 <c:pt idx="10">
-                  <c:v>0.917</c:v>
+                  <c:v>0.91700000000000004</c:v>
                 </c:pt>
                 <c:pt idx="11">
                   <c:v>0</c:v>
                 </c:pt>
                 <c:pt idx="12">
-                  <c:v>0.929</c:v>
+                  <c:v>0.92900000000000005</c:v>
                 </c:pt>
                 <c:pt idx="13">
-                  <c:v>0.944</c:v>
+                  <c:v>0.94399999999999995</c:v>
                 </c:pt>
                 <c:pt idx="14">
-                  <c:v>0.944</c:v>
+                  <c:v>0.94399999999999995</c:v>
                 </c:pt>
                 <c:pt idx="15">
-                  <c:v>0.958</c:v>
+                  <c:v>0.95799999999999996</c:v>
                 </c:pt>
               </c:numCache>
             </c:numRef>
           </c:val>
+          <c:extLst>
+            <c:ext xmlns:c16="http://schemas.microsoft.com/office/drawing/2014/chart" uri="{C3380CC4-5D6E-409C-BE32-E72D297353CC}">
+              <c16:uniqueId val="{00000000-998D-49A5-AE76-598A061AFB4D}"/>
+            </c:ext>
+          </c:extLst>
         </c:ser>
         <c:ser>
           <c:idx val="1"/>
@@ -384,87 +364,61 @@
             <a:effectLst/>
           </c:spPr>
           <c:invertIfNegative val="0"/>
-          <c:dLbls>
-            <c:numFmt formatCode="#,##0" sourceLinked="0"/>
-            <c:txPr>
-              <a:bodyPr/>
-              <a:lstStyle/>
-              <a:p>
-                <a:pPr>
-                  <a:defRPr b="0" i="0" strike="noStrike" sz="1100" u="none">
-                    <a:solidFill>
-                      <a:srgbClr val="000000"/>
-                    </a:solidFill>
-                    <a:latin typeface="+mn-lt"/>
-                  </a:defRPr>
-                </a:pPr>
-              </a:p>
-            </c:txPr>
-            <c:showLegendKey val="0"/>
-            <c:showVal val="0"/>
-            <c:showCatName val="0"/>
-            <c:showSerName val="0"/>
-            <c:showPercent val="0"/>
-            <c:showBubbleSize val="0"/>
-            <c:showLeaderLines val="0"/>
-          </c:dLbls>
           <c:cat>
-            <c:multiLvlStrRef>
+            <c:strRef>
               <c:f>Sheet1!$A$2:$A$17</c:f>
-              <c:multiLvlStrCache>
+              <c:strCache>
                 <c:ptCount val="16"/>
-                <c:lvl>
-                  <c:pt idx="0">
-                    <c:v>recursive 800/120</c:v>
-                  </c:pt>
-                  <c:pt idx="1">
-                    <c:v>recursive 500/100</c:v>
-                  </c:pt>
-                  <c:pt idx="2">
-                    <c:v>recursive 500/150</c:v>
-                  </c:pt>
-                  <c:pt idx="3">
-                    <c:v>fixed 256/0</c:v>
-                  </c:pt>
-                  <c:pt idx="4">
-                    <c:v>fixed 256/50</c:v>
-                  </c:pt>
-                  <c:pt idx="5">
-                    <c:v>semantic p90, capped</c:v>
-                  </c:pt>
-                  <c:pt idx="6">
-                    <c:v>recursive 1200/200</c:v>
-                  </c:pt>
-                  <c:pt idx="7">
-                    <c:v>recursive 800/200</c:v>
-                  </c:pt>
-                  <c:pt idx="8">
-                    <c:v>fixed 512/0</c:v>
-                  </c:pt>
-                  <c:pt idx="9">
-                    <c:v>semantic p90</c:v>
-                  </c:pt>
-                  <c:pt idx="10">
-                    <c:v>semantic p95</c:v>
-                  </c:pt>
-                  <c:pt idx="11">
-                    <c:v>fixed 512/0, no refs (chosen)</c:v>
-                  </c:pt>
-                  <c:pt idx="12">
-                    <c:v>semantic p95, capped</c:v>
-                  </c:pt>
-                  <c:pt idx="13">
-                    <c:v>recursive 1200/150</c:v>
-                  </c:pt>
-                  <c:pt idx="14">
-                    <c:v>recursive 1200/150, no refs</c:v>
-                  </c:pt>
-                  <c:pt idx="15">
-                    <c:v>fixed 512/50</c:v>
-                  </c:pt>
-                </c:lvl>
-              </c:multiLvlStrCache>
-            </c:multiLvlStrRef>
+                <c:pt idx="0">
+                  <c:v>recursive 800/120</c:v>
+                </c:pt>
+                <c:pt idx="1">
+                  <c:v>recursive 500/100</c:v>
+                </c:pt>
+                <c:pt idx="2">
+                  <c:v>recursive 500/150</c:v>
+                </c:pt>
+                <c:pt idx="3">
+                  <c:v>fixed 256/0</c:v>
+                </c:pt>
+                <c:pt idx="4">
+                  <c:v>fixed 256/50</c:v>
+                </c:pt>
+                <c:pt idx="5">
+                  <c:v>semantic p90, capped</c:v>
+                </c:pt>
+                <c:pt idx="6">
+                  <c:v>recursive 1200/200</c:v>
+                </c:pt>
+                <c:pt idx="7">
+                  <c:v>recursive 800/200</c:v>
+                </c:pt>
+                <c:pt idx="8">
+                  <c:v>fixed 512/0</c:v>
+                </c:pt>
+                <c:pt idx="9">
+                  <c:v>semantic p90</c:v>
+                </c:pt>
+                <c:pt idx="10">
+                  <c:v>semantic p95</c:v>
+                </c:pt>
+                <c:pt idx="11">
+                  <c:v>fixed 512/0, no refs (chosen)</c:v>
+                </c:pt>
+                <c:pt idx="12">
+                  <c:v>semantic p95, capped</c:v>
+                </c:pt>
+                <c:pt idx="13">
+                  <c:v>recursive 1200/150</c:v>
+                </c:pt>
+                <c:pt idx="14">
+                  <c:v>recursive 1200/150, no refs</c:v>
+                </c:pt>
+                <c:pt idx="15">
+                  <c:v>fixed 512/50</c:v>
+                </c:pt>
+              </c:strCache>
+            </c:strRef>
           </c:cat>
           <c:val>
             <c:numRef>
@@ -506,7 +460,7 @@
                   <c:v>0</c:v>
                 </c:pt>
                 <c:pt idx="11">
-                  <c:v>0.917</c:v>
+                  <c:v>0.91700000000000004</c:v>
                 </c:pt>
                 <c:pt idx="12">
                   <c:v>0</c:v>
@@ -523,36 +477,24 @@
               </c:numCache>
             </c:numRef>
           </c:val>
+          <c:extLst>
+            <c:ext xmlns:c16="http://schemas.microsoft.com/office/drawing/2014/chart" uri="{C3380CC4-5D6E-409C-BE32-E72D297353CC}">
+              <c16:uniqueId val="{00000001-998D-49A5-AE76-598A061AFB4D}"/>
+            </c:ext>
+          </c:extLst>
         </c:ser>
         <c:dLbls>
-          <c:numFmt formatCode="#,##0" sourceLinked="0"/>
-          <c:txPr>
-            <a:bodyPr/>
-            <a:lstStyle/>
-            <a:p>
-              <a:pPr>
-                <a:defRPr b="0" i="0" strike="noStrike" sz="1100" u="none">
-                  <a:solidFill>
-                    <a:srgbClr val="000000"/>
-                  </a:solidFill>
-                  <a:latin typeface="+mn-lt"/>
-                </a:defRPr>
-              </a:pPr>
-            </a:p>
-          </c:txPr>
           <c:showLegendKey val="0"/>
           <c:showVal val="0"/>
           <c:showCatName val="0"/>
           <c:showSerName val="0"/>
           <c:showPercent val="0"/>
           <c:showBubbleSize val="0"/>
-          <c:showLeaderLines val="0"/>
         </c:dLbls>
         <c:gapWidth val="50"/>
         <c:overlap val="100"/>
         <c:axId val="2094734554"/>
         <c:axId val="2094734552"/>
-        <c:axId val="2094734556"/>
       </c:barChart>
       <c:catAx>
         <c:axId val="2094734554"/>
@@ -593,6 +535,7 @@
         <c:crosses val="autoZero"/>
         <c:auto val="1"/>
         <c:lblAlgn val="ctr"/>
+        <c:lblOffset val="100"/>
         <c:noMultiLvlLbl val="1"/>
       </c:catAx>
       <c:valAx>
@@ -675,6 +618,7 @@
     </c:legend>
     <c:plotVisOnly val="1"/>
     <c:dispBlanksAs val="span"/>
+    <c:showDLblsOverMax val="1"/>
   </c:chart>
   <c:spPr>
     <a:noFill/>
@@ -690,9 +634,11 @@
 </file>
 
 <file path=ppt/charts/chart2.xml><?xml version="1.0" encoding="utf-8"?>
-<c:chartSpace xmlns:c="http://schemas.openxmlformats.org/drawingml/2006/chart" xmlns:a="http://schemas.openxmlformats.org/drawingml/2006/main" xmlns:r="http://schemas.openxmlformats.org/officeDocument/2006/relationships">
+<c:chartSpace xmlns:c="http://schemas.openxmlformats.org/drawingml/2006/chart" xmlns:a="http://schemas.openxmlformats.org/drawingml/2006/main" xmlns:r="http://schemas.openxmlformats.org/officeDocument/2006/relationships" xmlns:c16r2="http://schemas.microsoft.com/office/drawing/2015/06/chart">
   <c:date1904 val="0"/>
+  <c:lang val="en-US"/>
   <c:roundedCorners val="1"/>
+  <c:style val="2"/>
   <c:chart>
     <c:title>
       <c:tx>
@@ -720,7 +666,6 @@
           </a:p>
         </c:rich>
       </c:tx>
-      <c:layout/>
       <c:overlay val="0"/>
     </c:title>
     <c:autoTitleDeleted val="0"/>
@@ -753,18 +698,26 @@
           <c:invertIfNegative val="0"/>
           <c:dLbls>
             <c:numFmt formatCode="0.00" sourceLinked="0"/>
+            <c:spPr>
+              <a:noFill/>
+              <a:ln>
+                <a:noFill/>
+              </a:ln>
+              <a:effectLst/>
+            </c:spPr>
             <c:txPr>
               <a:bodyPr/>
               <a:lstStyle/>
               <a:p>
                 <a:pPr>
-                  <a:defRPr b="0" i="0" strike="noStrike" sz="1100" u="none">
+                  <a:defRPr sz="1100" b="0" i="0" u="none" strike="noStrike">
                     <a:solidFill>
                       <a:srgbClr val="1A1D24"/>
                     </a:solidFill>
                     <a:latin typeface="+mn-lt"/>
                   </a:defRPr>
                 </a:pPr>
+                <a:endParaRPr lang="en-US"/>
               </a:p>
             </c:txPr>
             <c:showLegendKey val="0"/>
@@ -774,28 +727,31 @@
             <c:showPercent val="0"/>
             <c:showBubbleSize val="0"/>
             <c:showLeaderLines val="0"/>
+            <c:extLst>
+              <c:ext xmlns:c15="http://schemas.microsoft.com/office/drawing/2012/chart" uri="{CE6537A1-D6FC-4f65-9D91-7224C49458BB}">
+                <c15:showLeaderLines val="0"/>
+              </c:ext>
+            </c:extLst>
           </c:dLbls>
           <c:cat>
-            <c:multiLvlStrRef>
+            <c:strRef>
               <c:f>Sheet1!$A$2:$A$5</c:f>
-              <c:multiLvlStrCache>
+              <c:strCache>
                 <c:ptCount val="4"/>
-                <c:lvl>
-                  <c:pt idx="0">
-                    <c:v>Dense</c:v>
-                  </c:pt>
-                  <c:pt idx="1">
-                    <c:v>Hybrid (CPU profile)</c:v>
-                  </c:pt>
-                  <c:pt idx="2">
-                    <c:v>Hybrid + rerank (final)</c:v>
-                  </c:pt>
-                  <c:pt idx="3">
-                    <c:v>Gemini, hybrid + rerank</c:v>
-                  </c:pt>
-                </c:lvl>
-              </c:multiLvlStrCache>
-            </c:multiLvlStrRef>
+                <c:pt idx="0">
+                  <c:v>Dense</c:v>
+                </c:pt>
+                <c:pt idx="1">
+                  <c:v>Hybrid (CPU profile)</c:v>
+                </c:pt>
+                <c:pt idx="2">
+                  <c:v>Hybrid + rerank (final)</c:v>
+                </c:pt>
+                <c:pt idx="3">
+                  <c:v>Gemini, hybrid + rerank</c:v>
+                </c:pt>
+              </c:strCache>
+            </c:strRef>
           </c:cat>
           <c:val>
             <c:numRef>
@@ -804,7 +760,7 @@
                 <c:formatCode>General</c:formatCode>
                 <c:ptCount val="4"/>
                 <c:pt idx="0">
-                  <c:v>0.667</c:v>
+                  <c:v>0.66700000000000004</c:v>
                 </c:pt>
                 <c:pt idx="1">
                   <c:v>0.75</c:v>
@@ -813,11 +769,16 @@
                   <c:v>0.75</c:v>
                 </c:pt>
                 <c:pt idx="3">
-                  <c:v>0.833</c:v>
+                  <c:v>0.83299999999999996</c:v>
                 </c:pt>
               </c:numCache>
             </c:numRef>
           </c:val>
+          <c:extLst>
+            <c:ext xmlns:c16="http://schemas.microsoft.com/office/drawing/2014/chart" uri="{C3380CC4-5D6E-409C-BE32-E72D297353CC}">
+              <c16:uniqueId val="{00000000-4D27-4CF6-AB90-65540BFE6A88}"/>
+            </c:ext>
+          </c:extLst>
         </c:ser>
         <c:ser>
           <c:idx val="1"/>
@@ -842,18 +803,26 @@
           <c:invertIfNegative val="0"/>
           <c:dLbls>
             <c:numFmt formatCode="0.00" sourceLinked="0"/>
+            <c:spPr>
+              <a:noFill/>
+              <a:ln>
+                <a:noFill/>
+              </a:ln>
+              <a:effectLst/>
+            </c:spPr>
             <c:txPr>
               <a:bodyPr/>
               <a:lstStyle/>
               <a:p>
                 <a:pPr>
-                  <a:defRPr b="0" i="0" strike="noStrike" sz="1100" u="none">
+                  <a:defRPr sz="1100" b="0" i="0" u="none" strike="noStrike">
                     <a:solidFill>
                       <a:srgbClr val="1A1D24"/>
                     </a:solidFill>
                     <a:latin typeface="+mn-lt"/>
                   </a:defRPr>
                 </a:pPr>
+                <a:endParaRPr lang="en-US"/>
               </a:p>
             </c:txPr>
             <c:showLegendKey val="0"/>
@@ -863,28 +832,31 @@
             <c:showPercent val="0"/>
             <c:showBubbleSize val="0"/>
             <c:showLeaderLines val="0"/>
+            <c:extLst>
+              <c:ext xmlns:c15="http://schemas.microsoft.com/office/drawing/2012/chart" uri="{CE6537A1-D6FC-4f65-9D91-7224C49458BB}">
+                <c15:showLeaderLines val="0"/>
+              </c:ext>
+            </c:extLst>
           </c:dLbls>
           <c:cat>
-            <c:multiLvlStrRef>
+            <c:strRef>
               <c:f>Sheet1!$A$2:$A$5</c:f>
-              <c:multiLvlStrCache>
+              <c:strCache>
                 <c:ptCount val="4"/>
-                <c:lvl>
-                  <c:pt idx="0">
-                    <c:v>Dense</c:v>
-                  </c:pt>
-                  <c:pt idx="1">
-                    <c:v>Hybrid (CPU profile)</c:v>
-                  </c:pt>
-                  <c:pt idx="2">
-                    <c:v>Hybrid + rerank (final)</c:v>
-                  </c:pt>
-                  <c:pt idx="3">
-                    <c:v>Gemini, hybrid + rerank</c:v>
-                  </c:pt>
-                </c:lvl>
-              </c:multiLvlStrCache>
-            </c:multiLvlStrRef>
+                <c:pt idx="0">
+                  <c:v>Dense</c:v>
+                </c:pt>
+                <c:pt idx="1">
+                  <c:v>Hybrid (CPU profile)</c:v>
+                </c:pt>
+                <c:pt idx="2">
+                  <c:v>Hybrid + rerank (final)</c:v>
+                </c:pt>
+                <c:pt idx="3">
+                  <c:v>Gemini, hybrid + rerank</c:v>
+                </c:pt>
+              </c:strCache>
+            </c:strRef>
           </c:cat>
           <c:val>
             <c:numRef>
@@ -893,10 +865,10 @@
                 <c:formatCode>General</c:formatCode>
                 <c:ptCount val="4"/>
                 <c:pt idx="0">
-                  <c:v>0.833</c:v>
+                  <c:v>0.83299999999999996</c:v>
                 </c:pt>
                 <c:pt idx="1">
-                  <c:v>0.833</c:v>
+                  <c:v>0.83299999999999996</c:v>
                 </c:pt>
                 <c:pt idx="2">
                   <c:v>1</c:v>
@@ -907,6 +879,11 @@
               </c:numCache>
             </c:numRef>
           </c:val>
+          <c:extLst>
+            <c:ext xmlns:c16="http://schemas.microsoft.com/office/drawing/2014/chart" uri="{C3380CC4-5D6E-409C-BE32-E72D297353CC}">
+              <c16:uniqueId val="{00000001-4D27-4CF6-AB90-65540BFE6A88}"/>
+            </c:ext>
+          </c:extLst>
         </c:ser>
         <c:ser>
           <c:idx val="2"/>
@@ -931,18 +908,26 @@
           <c:invertIfNegative val="0"/>
           <c:dLbls>
             <c:numFmt formatCode="0.00" sourceLinked="0"/>
+            <c:spPr>
+              <a:noFill/>
+              <a:ln>
+                <a:noFill/>
+              </a:ln>
+              <a:effectLst/>
+            </c:spPr>
             <c:txPr>
               <a:bodyPr/>
               <a:lstStyle/>
               <a:p>
                 <a:pPr>
-                  <a:defRPr b="0" i="0" strike="noStrike" sz="1100" u="none">
+                  <a:defRPr sz="1100" b="0" i="0" u="none" strike="noStrike">
                     <a:solidFill>
                       <a:srgbClr val="1A1D24"/>
                     </a:solidFill>
                     <a:latin typeface="+mn-lt"/>
                   </a:defRPr>
                 </a:pPr>
+                <a:endParaRPr lang="en-US"/>
               </a:p>
             </c:txPr>
             <c:showLegendKey val="0"/>
@@ -952,28 +937,31 @@
             <c:showPercent val="0"/>
             <c:showBubbleSize val="0"/>
             <c:showLeaderLines val="0"/>
+            <c:extLst>
+              <c:ext xmlns:c15="http://schemas.microsoft.com/office/drawing/2012/chart" uri="{CE6537A1-D6FC-4f65-9D91-7224C49458BB}">
+                <c15:showLeaderLines val="0"/>
+              </c:ext>
+            </c:extLst>
           </c:dLbls>
           <c:cat>
-            <c:multiLvlStrRef>
+            <c:strRef>
               <c:f>Sheet1!$A$2:$A$5</c:f>
-              <c:multiLvlStrCache>
+              <c:strCache>
                 <c:ptCount val="4"/>
-                <c:lvl>
-                  <c:pt idx="0">
-                    <c:v>Dense</c:v>
-                  </c:pt>
-                  <c:pt idx="1">
-                    <c:v>Hybrid (CPU profile)</c:v>
-                  </c:pt>
-                  <c:pt idx="2">
-                    <c:v>Hybrid + rerank (final)</c:v>
-                  </c:pt>
-                  <c:pt idx="3">
-                    <c:v>Gemini, hybrid + rerank</c:v>
-                  </c:pt>
-                </c:lvl>
-              </c:multiLvlStrCache>
-            </c:multiLvlStrRef>
+                <c:pt idx="0">
+                  <c:v>Dense</c:v>
+                </c:pt>
+                <c:pt idx="1">
+                  <c:v>Hybrid (CPU profile)</c:v>
+                </c:pt>
+                <c:pt idx="2">
+                  <c:v>Hybrid + rerank (final)</c:v>
+                </c:pt>
+                <c:pt idx="3">
+                  <c:v>Gemini, hybrid + rerank</c:v>
+                </c:pt>
+              </c:strCache>
+            </c:strRef>
           </c:cat>
           <c:val>
             <c:numRef>
@@ -982,50 +970,37 @@
                 <c:formatCode>General</c:formatCode>
                 <c:ptCount val="4"/>
                 <c:pt idx="0">
-                  <c:v>0.736</c:v>
+                  <c:v>0.73599999999999999</c:v>
                 </c:pt>
                 <c:pt idx="1">
-                  <c:v>0.801</c:v>
+                  <c:v>0.80100000000000005</c:v>
                 </c:pt>
                 <c:pt idx="2">
-                  <c:v>0.847</c:v>
+                  <c:v>0.84699999999999998</c:v>
                 </c:pt>
                 <c:pt idx="3">
-                  <c:v>0.889</c:v>
+                  <c:v>0.88900000000000001</c:v>
                 </c:pt>
               </c:numCache>
             </c:numRef>
           </c:val>
+          <c:extLst>
+            <c:ext xmlns:c16="http://schemas.microsoft.com/office/drawing/2014/chart" uri="{C3380CC4-5D6E-409C-BE32-E72D297353CC}">
+              <c16:uniqueId val="{00000002-4D27-4CF6-AB90-65540BFE6A88}"/>
+            </c:ext>
+          </c:extLst>
         </c:ser>
         <c:dLbls>
-          <c:numFmt formatCode="0.00" sourceLinked="0"/>
-          <c:txPr>
-            <a:bodyPr/>
-            <a:lstStyle/>
-            <a:p>
-              <a:pPr>
-                <a:defRPr b="0" i="0" strike="noStrike" sz="1100" u="none">
-                  <a:solidFill>
-                    <a:srgbClr val="1A1D24"/>
-                  </a:solidFill>
-                  <a:latin typeface="+mn-lt"/>
-                </a:defRPr>
-              </a:pPr>
-            </a:p>
-          </c:txPr>
           <c:showLegendKey val="0"/>
           <c:showVal val="1"/>
           <c:showCatName val="0"/>
           <c:showSerName val="0"/>
           <c:showPercent val="0"/>
           <c:showBubbleSize val="0"/>
-          <c:showLeaderLines val="0"/>
         </c:dLbls>
         <c:gapWidth val="150"/>
-        <c:overlap val="0"/>
         <c:axId val="2094734554"/>
         <c:axId val="2094734552"/>
-        <c:axId val="2094734556"/>
       </c:barChart>
       <c:catAx>
         <c:axId val="2094734554"/>
@@ -1066,6 +1041,7 @@
         <c:crosses val="autoZero"/>
         <c:auto val="1"/>
         <c:lblAlgn val="ctr"/>
+        <c:lblOffset val="100"/>
         <c:noMultiLvlLbl val="1"/>
       </c:catAx>
       <c:valAx>
@@ -1148,6 +1124,7 @@
     </c:legend>
     <c:plotVisOnly val="1"/>
     <c:dispBlanksAs val="span"/>
+    <c:showDLblsOverMax val="1"/>
   </c:chart>
   <c:spPr>
     <a:noFill/>
@@ -1184,234 +1161,10 @@
           <a:chExt cx="0" cy="0"/>
         </a:xfrm>
       </p:grpSpPr>
-      <p:sp>
-        <p:nvSpPr>
-          <p:cNvPr id="2" name="Header Placeholder 1"/>
-          <p:cNvSpPr>
-            <a:spLocks noGrp="1"/>
-          </p:cNvSpPr>
-          <p:nvPr>
-            <p:ph type="hdr" sz="quarter"/>
-          </p:nvPr>
-        </p:nvSpPr>
-        <p:spPr>
-          <a:xfrm>
-            <a:off x="0" y="0"/>
-            <a:ext cx="2971800" cy="458788"/>
-          </a:xfrm>
-          <a:prstGeom prst="rect">
-            <a:avLst/>
-          </a:prstGeom>
-        </p:spPr>
-        <p:txBody>
-          <a:bodyPr vert="horz" lIns="91440" tIns="45720" rIns="91440" bIns="45720" rtlCol="0"/>
-          <a:lstStyle>
-            <a:lvl1pPr algn="l">
-              <a:defRPr sz="1200"/>
-            </a:lvl1pPr>
-          </a:lstStyle>
-          <a:p>
-            <a:endParaRPr lang="en-US"/>
-          </a:p>
-        </p:txBody>
-      </p:sp>
-      <p:sp>
-        <p:nvSpPr>
-          <p:cNvPr id="3" name="Date Placeholder 2"/>
-          <p:cNvSpPr>
-            <a:spLocks noGrp="1"/>
-          </p:cNvSpPr>
-          <p:nvPr>
-            <p:ph type="dt" idx="1"/>
-          </p:nvPr>
-        </p:nvSpPr>
-        <p:spPr>
-          <a:xfrm>
-            <a:off x="3884613" y="0"/>
-            <a:ext cx="2971800" cy="458788"/>
-          </a:xfrm>
-          <a:prstGeom prst="rect">
-            <a:avLst/>
-          </a:prstGeom>
-        </p:spPr>
-        <p:txBody>
-          <a:bodyPr vert="horz" lIns="91440" tIns="45720" rIns="91440" bIns="45720" rtlCol="0"/>
-          <a:lstStyle>
-            <a:lvl1pPr algn="r">
-              <a:defRPr sz="1200"/>
-            </a:lvl1pPr>
-          </a:lstStyle>
-          <a:p>
-            <a:fld id="{5282F153-3F37-0F45-9E97-73ACFA13230C}" type="datetimeFigureOut">
-              <a:rPr lang="en-US"/>
-              <a:t>7/23/19</a:t>
-            </a:fld>
-            <a:endParaRPr lang="en-US"/>
-          </a:p>
-        </p:txBody>
-      </p:sp>
-      <p:sp>
-        <p:nvSpPr>
-          <p:cNvPr id="4" name="Slide Image Placeholder 3"/>
-          <p:cNvSpPr>
-            <a:spLocks noGrp="1" noRot="1" noChangeAspect="1"/>
-          </p:cNvSpPr>
-          <p:nvPr>
-            <p:ph type="sldImg" idx="2"/>
-          </p:nvPr>
-        </p:nvSpPr>
-        <p:spPr>
-          <a:xfrm>
-            <a:off x="685800" y="1143000"/>
-            <a:ext cx="5486400" cy="3086100"/>
-          </a:xfrm>
-          <a:prstGeom prst="rect">
-            <a:avLst/>
-          </a:prstGeom>
-          <a:noFill/>
-          <a:ln w="12700">
-            <a:solidFill>
-              <a:prstClr val="black"/>
-            </a:solidFill>
-          </a:ln>
-        </p:spPr>
-        <p:txBody>
-          <a:bodyPr vert="horz" lIns="91440" tIns="45720" rIns="91440" bIns="45720" rtlCol="0" anchor="ctr"/>
-          <a:lstStyle/>
-          <a:p>
-            <a:endParaRPr lang="en-US"/>
-          </a:p>
-        </p:txBody>
-      </p:sp>
-      <p:sp>
-        <p:nvSpPr>
-          <p:cNvPr id="5" name="Notes Placeholder 4"/>
-          <p:cNvSpPr>
-            <a:spLocks noGrp="1"/>
-          </p:cNvSpPr>
-          <p:nvPr>
-            <p:ph type="body" sz="quarter" idx="3"/>
-          </p:nvPr>
-        </p:nvSpPr>
-        <p:spPr>
-          <a:xfrm>
-            <a:off x="685800" y="4400550"/>
-            <a:ext cx="5486400" cy="3600450"/>
-          </a:xfrm>
-          <a:prstGeom prst="rect">
-            <a:avLst/>
-          </a:prstGeom>
-        </p:spPr>
-        <p:txBody>
-          <a:bodyPr vert="horz" lIns="91440" tIns="45720" rIns="91440" bIns="45720" rtlCol="0"/>
-          <a:lstStyle/>
-          <a:p>
-            <a:pPr lvl="0"/>
-            <a:r>
-              <a:rPr lang="en-US"/>
-              <a:t>Click to edit Master text styles</a:t>
-            </a:r>
-          </a:p>
-          <a:p>
-            <a:pPr lvl="1"/>
-            <a:r>
-              <a:rPr lang="en-US"/>
-              <a:t>Second level</a:t>
-            </a:r>
-          </a:p>
-          <a:p>
-            <a:pPr lvl="2"/>
-            <a:r>
-              <a:rPr lang="en-US"/>
-              <a:t>Third level</a:t>
-            </a:r>
-          </a:p>
-          <a:p>
-            <a:pPr lvl="3"/>
-            <a:r>
-              <a:rPr lang="en-US"/>
-              <a:t>Fourth level</a:t>
-            </a:r>
-          </a:p>
-          <a:p>
-            <a:pPr lvl="4"/>
-            <a:r>
-              <a:rPr lang="en-US"/>
-              <a:t>Fifth level</a:t>
-            </a:r>
-          </a:p>
-        </p:txBody>
-      </p:sp>
-      <p:sp>
-        <p:nvSpPr>
-          <p:cNvPr id="6" name="Footer Placeholder 5"/>
-          <p:cNvSpPr>
-            <a:spLocks noGrp="1"/>
-          </p:cNvSpPr>
-          <p:nvPr>
-            <p:ph type="ftr" sz="quarter" idx="4"/>
-          </p:nvPr>
-        </p:nvSpPr>
-        <p:spPr>
-          <a:xfrm>
-            <a:off x="0" y="8685213"/>
-            <a:ext cx="2971800" cy="458787"/>
-          </a:xfrm>
-          <a:prstGeom prst="rect">
-            <a:avLst/>
-          </a:prstGeom>
-        </p:spPr>
-        <p:txBody>
-          <a:bodyPr vert="horz" lIns="91440" tIns="45720" rIns="91440" bIns="45720" rtlCol="0" anchor="b"/>
-          <a:lstStyle>
-            <a:lvl1pPr algn="l">
-              <a:defRPr sz="1200"/>
-            </a:lvl1pPr>
-          </a:lstStyle>
-          <a:p>
-            <a:endParaRPr lang="en-US"/>
-          </a:p>
-        </p:txBody>
-      </p:sp>
-      <p:sp>
-        <p:nvSpPr>
-          <p:cNvPr id="7" name="Slide Number Placeholder 6"/>
-          <p:cNvSpPr>
-            <a:spLocks noGrp="1"/>
-          </p:cNvSpPr>
-          <p:nvPr>
-            <p:ph type="sldNum" sz="quarter" idx="5"/>
-          </p:nvPr>
-        </p:nvSpPr>
-        <p:spPr>
-          <a:xfrm>
-            <a:off x="3884613" y="8685213"/>
-            <a:ext cx="2971800" cy="458787"/>
-          </a:xfrm>
-          <a:prstGeom prst="rect">
-            <a:avLst/>
-          </a:prstGeom>
-        </p:spPr>
-        <p:txBody>
-          <a:bodyPr vert="horz" lIns="91440" tIns="45720" rIns="91440" bIns="45720" rtlCol="0" anchor="b"/>
-          <a:lstStyle>
-            <a:lvl1pPr algn="r">
-              <a:defRPr sz="1200"/>
-            </a:lvl1pPr>
-          </a:lstStyle>
-          <a:p>
-            <a:fld id="{CE5E9CC1-C706-0F49-92D6-E571CC5EEA8F}" type="slidenum">
-              <a:rPr lang="en-US"/>
-              <a:t>‹#›</a:t>
-            </a:fld>
-            <a:endParaRPr lang="en-US"/>
-          </a:p>
-        </p:txBody>
-      </p:sp>
     </p:spTree>
     <p:extLst>
       <p:ext uri="{BB962C8B-B14F-4D97-AF65-F5344CB8AC3E}">
-        <p14:creationId xmlns:p14="http://schemas.microsoft.com/office/powerpoint/2010/main" val="1024086991"/>
+        <p14:creationId xmlns:p14="http://schemas.microsoft.com/office/powerpoint/2010/main" val="3387523056"/>
       </p:ext>
     </p:extLst>
   </p:cSld>
@@ -1559,7 +1312,6 @@
               <a:rPr lang="en-US" dirty="0"/>
               <a:t>Research Paper Answer Bot: a retrieval-augmented question answering system over 11 seminal GenAI papers. Every answer is written only from the papers and shows the three passages it used, by paper title and page. It runs entirely on a laptop: llama3.1 8B through Ollama, bge-m3 embeddings, ChromaDB.</a:t>
             </a:r>
-            <a:endParaRPr lang="en-US" dirty="0"/>
           </a:p>
         </p:txBody>
       </p:sp>
@@ -1647,7 +1399,6 @@
               <a:rPr lang="en-US" dirty="0"/>
               <a:t>This is the answer the notebook's final demo produces for the method-detail question: the claim matches page 4 of the LoRA paper, and the reader highlights that sentence. The live demo follows the script in the README: a factual lookup, this method detail, a cross-paper comparison, a follow-up that needs the conversation, an out-of-scope question that is refused, and optionally the web fallback. Ask the follow-up straight after the comparison. Fallback screenshots for every step are in slides/screenshots.</a:t>
             </a:r>
-            <a:endParaRPr lang="en-US" dirty="0"/>
           </a:p>
         </p:txBody>
       </p:sp>
@@ -1735,7 +1486,6 @@
               <a:rPr lang="en-US" dirty="0"/>
               <a:t>S1: the rewriter turns follow-ups into standalone questions; retrieval only ever sees the rewrite, and both apps show it as 'Searched as'. S2: two front ends over the same package, checked in a real browser in every state. S3: the web fallback is off by default because it also answers out-of-scope questions, which the evaluation counts as refusals; when it is on, web sources are clearly labelled and the question leaves the machine, which the apps say next to the switch.</a:t>
             </a:r>
-            <a:endParaRPr lang="en-US" dirty="0"/>
           </a:p>
         </p:txBody>
       </p:sp>
@@ -1823,7 +1573,6 @@
               <a:rPr lang="en-US" dirty="0"/>
               <a:t>Six problems that changed the design. The Gemini free tier ran out during the retrieval sweeps, which pushed the decision to the local model. A gold-page audit found answers on appendix pages the labels missed, so retrieval was re-scored. Out-of-scope questions were sometimes answered from loosely related passages until the weak-context notice. The judge could not be trusted for hallucinations. The follow-up rewriter was pulled towards the first topic of a conversation until it stopped seeing earlier answers. And everything had to share one 8 GB GPU.</a:t>
             </a:r>
-            <a:endParaRPr lang="en-US" dirty="0"/>
           </a:p>
         </p:txBody>
       </p:sp>
@@ -1911,7 +1660,6 @@
               <a:rPr lang="en-US" dirty="0"/>
               <a:t>To sum up: retrieval quality came from hybrid search with a reranker, and trust came from building citations out of metadata and refusing when the context is weak. The main limits are the size of the evaluation and the 8B model's neighbouring-number errors. Next steps target exactly those.</a:t>
             </a:r>
-            <a:endParaRPr lang="en-US" dirty="0"/>
           </a:p>
         </p:txBody>
       </p:sp>
@@ -1999,7 +1747,6 @@
               <a:rPr lang="en-US" dirty="0"/>
               <a:t>The problem: LLMs answer confidently but cannot point to evidence. The objective is grounded answers with citations a reader can verify, and an explicit refusal when the papers do not answer the question. The corpus: Attention, BERT, GPT-3, InstructGPT, Llama 2, LoRA, QLoRA, DPR, RAG, chain-of-thought and ReAct.</a:t>
             </a:r>
-            <a:endParaRPr lang="en-US" dirty="0"/>
           </a:p>
         </p:txBody>
       </p:sp>
@@ -2087,7 +1834,6 @@
               <a:rPr lang="en-US" dirty="0"/>
               <a:t>Offline, ingestion turns the PDFs into a vector index and a keyword index. For each question, hybrid search merges dense and BM25 results, a cross-encoder reranks 20 candidates to 3, and llama3.1 answers only from those three numbered passages. Sources are built from metadata, so a citation can never point to a page that was not retrieved. Dashed boxes are the optional stretch stages: follow-up rewriting (S1) and the web fallback (S3).</a:t>
             </a:r>
-            <a:endParaRPr lang="en-US" dirty="0"/>
           </a:p>
         </p:txBody>
       </p:sp>
@@ -2175,7 +1921,6 @@
               <a:rPr lang="en-US" dirty="0"/>
               <a:t>The dataset is the 11 papers from arXiv. Pages are loaded one by one so every chunk keeps its page number for citations. PyPDF beat pdfplumber on speed and coverage. Six cleaning rules fix extraction defects, including a shifted font encoding in ReAct's figures. The evaluation set has 29 questions: 12 dev and 12 held-out answerable ones, plus 5 out-of-scope questions that the bot should refuse; held-out questions were never used for tuning.</a:t>
             </a:r>
-            <a:endParaRPr lang="en-US" dirty="0"/>
           </a:p>
         </p:txBody>
       </p:sp>
@@ -2263,7 +2008,6 @@
               <a:rPr lang="en-US" dirty="0"/>
               <a:t>Sixteen chunking settings were scored on the dev questions with dense retrieval. Hit@3 is 1.0 for most of them, so MRR separates them. The chosen setting, 512-token chunks without overlap and without bibliography chunks, ties for the best hit@3 with the smallest index. fixed_512_50 has a higher MRR by one question ranked second instead of first; section 6 showed that reranking puts a gold page first for every dev question, so it was not worth rebuilding every index.</a:t>
             </a:r>
-            <a:endParaRPr lang="en-US" dirty="0"/>
           </a:p>
         </p:txBody>
       </p:sp>
@@ -2351,7 +2095,6 @@
               <a:rPr lang="en-US" dirty="0"/>
               <a:t>One open-source and one commercial embedding model, each in its own Chroma collection. On dense retrieval they are level; with reranking they return the same top passages on dev. On held-out questions Gemini's MRR is slightly higher, 0.889 against 0.847, which is one question ranked second; recall is identical. bge-m3 wins on everything practical: 27 ms per query against about half a second, an index built in 11 seconds instead of 15 minutes, no cost, and no quota. The Gemini free tier was exhausted during the experiments, which made the dependency risk concrete.</a:t>
             </a:r>
-            <a:endParaRPr lang="en-US" dirty="0"/>
           </a:p>
         </p:txBody>
       </p:sp>
@@ -2439,7 +2182,6 @@
               <a:rPr lang="en-US" dirty="0"/>
               <a:t>Strategies were tuned on the dev questions only, then the finalists were scored once on the held-out set. Hybrid search with the cross-encoder reranker puts a gold page in the top 3 for every held-out answerable question, against 0.833 for dense search, in about 0.56 seconds. Without a GPU the reranker is switched off and the bot uses plain hybrid search, which is weaker and documented as reduced quality. The reranker's top score doubles as the weak-context signal used for refusals and for the web fallback.</a:t>
             </a:r>
-            <a:endParaRPr lang="en-US" dirty="0"/>
           </a:p>
         </p:txBody>
       </p:sp>
@@ -2527,7 +2269,6 @@
               <a:rPr lang="en-US" dirty="0"/>
               <a:t>The chain is plain LCEL: retrieve, build a numbered context, prompt, generate, parse. The prompt asks for inline citations and an exact refusal sentence. Two guards do not depend on the model behaving: citation markers that point to no passage are removed while the answer streams, and anything that reads as a refusal is replaced by the exact sentence, with the closest passages still shown. When the top passage scores below the calibrated threshold, a notice in the prompt makes refusing the expected default; that took out-of-scope refusals from 2 of 5 to 5 of 5.</a:t>
             </a:r>
-            <a:endParaRPr lang="en-US" dirty="0"/>
           </a:p>
         </p:txBody>
       </p:sp>
@@ -2615,7 +2356,6 @@
               <a:rPr lang="en-US" dirty="0"/>
               <a:t>Every answer was scored by hand on relevance, accuracy and groundedness, plus a hallucination flag, then checked against an LLM judge. On held-out questions the answers are relevant and grounded; accuracy is lower because of one recurring error: the model picks a neighbouring number from the right passage. The judge is useful for accuracy but misses most hallucinations, because a wrong number that appears somewhere in the passages looks supported. Latency on the RTX 4060: first word after about 2 seconds, full answer in about 5.</a:t>
             </a:r>
-            <a:endParaRPr lang="en-US" dirty="0"/>
           </a:p>
         </p:txBody>
       </p:sp>
@@ -2693,6 +2433,7 @@
         <a:solidFill>
           <a:schemeClr val="bg1"/>
         </a:solidFill>
+        <a:effectLst/>
       </p:bgPr>
     </p:bg>
     <p:spTree>
@@ -2730,7 +2471,7 @@
           <a:bodyPr wrap="square" lIns="0" tIns="0" rIns="0" bIns="0" rtlCol="0" anchor="ctr"/>
           <a:lstStyle/>
           <a:p>
-            <a:pPr indent="0" marL="0">
+            <a:pPr marL="0" indent="0">
               <a:buNone/>
             </a:pPr>
             <a:r>
@@ -2748,9 +2489,11 @@
       <p:sp>
         <p:nvSpPr>
           <p:cNvPr id="3" name="Text 1"/>
-          <p:cNvSpPr/>
+          <p:cNvSpPr>
+            <a:spLocks noGrp="1"/>
+          </p:cNvSpPr>
           <p:nvPr>
-            <p:ph idx="101" type="title" hasCustomPrompt="1"/>
+            <p:ph type="title" idx="101" hasCustomPrompt="1"/>
           </p:nvPr>
         </p:nvSpPr>
         <p:spPr>
@@ -2767,7 +2510,7 @@
         <p:txBody>
           <a:bodyPr wrap="square" rtlCol="0"/>
           <a:lstStyle>
-            <a:lvl1pPr algn="l" indent="0" marL="0">
+            <a:lvl1pPr marL="0" indent="0" algn="l">
               <a:buNone/>
               <a:defRPr lang="en-US" sz="3200" b="1" dirty="0">
                 <a:solidFill>
@@ -2777,7 +2520,7 @@
             </a:lvl1pPr>
           </a:lstStyle>
           <a:p>
-            <a:pPr algn="l" indent="0" marL="0">
+            <a:pPr marL="0" indent="0" algn="l">
               <a:buNone/>
             </a:pPr>
             <a:endParaRPr lang="en-US" sz="3200" dirty="0"/>
@@ -2804,7 +2547,7 @@
           </a:prstGeom>
           <a:extLst>
             <a:ext uri="{C572A759-6A51-4108-AA02-DFA0A04FC94B}">
-              <ma14:wrappingTextBoxFlag xmlns:ma14="http://schemas.microsoft.com/office/mac/drawingml/2011/main" val="0"/>
+              <ma14:wrappingTextBoxFlag xmlns:ma14="http://schemas.microsoft.com/office/mac/drawingml/2011/main" xmlns="" val="0"/>
             </a:ext>
           </a:extLst>
         </p:spPr>
@@ -2822,8 +2565,8 @@
           <a:p>
             <a:pPr algn="r"/>
             <a:fld id="{F7021451-1387-4CA6-816F-3879F97B5CBC}" type="slidenum">
-              <a:rPr b="0" lang="en-US"/>
-              <a:t>1002</a:t>
+              <a:rPr lang="en-US" b="0"/>
+              <a:t>‹#›</a:t>
             </a:fld>
             <a:endParaRPr lang="en-US"/>
           </a:p>
@@ -2845,6 +2588,7 @@
         <a:solidFill>
           <a:schemeClr val="bg2"/>
         </a:solidFill>
+        <a:effectLst/>
       </p:bgPr>
     </p:bg>
     <p:spTree>
@@ -2882,7 +2626,7 @@
           <a:bodyPr wrap="square" lIns="0" tIns="0" rIns="0" bIns="0" rtlCol="0" anchor="ctr"/>
           <a:lstStyle/>
           <a:p>
-            <a:pPr indent="0" marL="0">
+            <a:pPr marL="0" indent="0">
               <a:buNone/>
             </a:pPr>
             <a:r>
@@ -2900,9 +2644,11 @@
       <p:sp>
         <p:nvSpPr>
           <p:cNvPr id="3" name="Text 1"/>
-          <p:cNvSpPr/>
+          <p:cNvSpPr>
+            <a:spLocks noGrp="1"/>
+          </p:cNvSpPr>
           <p:nvPr>
-            <p:ph idx="101" type="title" hasCustomPrompt="1"/>
+            <p:ph type="title" idx="101" hasCustomPrompt="1"/>
           </p:nvPr>
         </p:nvSpPr>
         <p:spPr>
@@ -2919,7 +2665,7 @@
         <p:txBody>
           <a:bodyPr wrap="square" rtlCol="0"/>
           <a:lstStyle>
-            <a:lvl1pPr algn="l" indent="0" marL="0">
+            <a:lvl1pPr marL="0" indent="0" algn="l">
               <a:buNone/>
               <a:defRPr lang="en-US" sz="3200" b="1" dirty="0">
                 <a:solidFill>
@@ -2929,7 +2675,7 @@
             </a:lvl1pPr>
           </a:lstStyle>
           <a:p>
-            <a:pPr algn="l" indent="0" marL="0">
+            <a:pPr marL="0" indent="0" algn="l">
               <a:buNone/>
             </a:pPr>
             <a:endParaRPr lang="en-US" sz="3200" dirty="0"/>
@@ -2956,7 +2702,7 @@
           </a:prstGeom>
           <a:extLst>
             <a:ext uri="{C572A759-6A51-4108-AA02-DFA0A04FC94B}">
-              <ma14:wrappingTextBoxFlag xmlns:ma14="http://schemas.microsoft.com/office/mac/drawingml/2011/main" val="0"/>
+              <ma14:wrappingTextBoxFlag xmlns:ma14="http://schemas.microsoft.com/office/mac/drawingml/2011/main" xmlns="" val="0"/>
             </a:ext>
           </a:extLst>
         </p:spPr>
@@ -2974,8 +2720,8 @@
           <a:p>
             <a:pPr algn="r"/>
             <a:fld id="{F7021451-1387-4CA6-816F-3879F97B5CBC}" type="slidenum">
-              <a:rPr b="0" lang="en-US"/>
-              <a:t>1003</a:t>
+              <a:rPr lang="en-US" b="0"/>
+              <a:t>‹#›</a:t>
             </a:fld>
             <a:endParaRPr lang="en-US"/>
           </a:p>
@@ -2997,6 +2743,7 @@
         <a:solidFill>
           <a:schemeClr val="tx1"/>
         </a:solidFill>
+        <a:effectLst/>
       </p:bgPr>
     </p:bg>
     <p:spTree>
@@ -3016,9 +2763,11 @@
       <p:sp>
         <p:nvSpPr>
           <p:cNvPr id="2" name="Text 0"/>
-          <p:cNvSpPr/>
+          <p:cNvSpPr>
+            <a:spLocks noGrp="1"/>
+          </p:cNvSpPr>
           <p:nvPr>
-            <p:ph idx="100" type="title" hasCustomPrompt="1"/>
+            <p:ph type="title" idx="100" hasCustomPrompt="1"/>
           </p:nvPr>
         </p:nvSpPr>
         <p:spPr>
@@ -3035,7 +2784,7 @@
         <p:txBody>
           <a:bodyPr wrap="square" rtlCol="0"/>
           <a:lstStyle>
-            <a:lvl1pPr algn="l" indent="0" marL="0">
+            <a:lvl1pPr marL="0" indent="0" algn="l">
               <a:buNone/>
               <a:defRPr lang="en-US" sz="4800" b="1" dirty="0">
                 <a:solidFill>
@@ -3045,7 +2794,7 @@
             </a:lvl1pPr>
           </a:lstStyle>
           <a:p>
-            <a:pPr algn="l" indent="0" marL="0">
+            <a:pPr marL="0" indent="0" algn="l">
               <a:buNone/>
             </a:pPr>
             <a:endParaRPr lang="en-US" sz="4800" dirty="0"/>
@@ -3055,9 +2804,11 @@
       <p:sp>
         <p:nvSpPr>
           <p:cNvPr id="3" name="Text 0"/>
-          <p:cNvSpPr/>
+          <p:cNvSpPr>
+            <a:spLocks noGrp="1"/>
+          </p:cNvSpPr>
           <p:nvPr>
-            <p:ph idx="101" type="body" hasCustomPrompt="1"/>
+            <p:ph type="body" idx="101" hasCustomPrompt="1"/>
           </p:nvPr>
         </p:nvSpPr>
         <p:spPr>
@@ -3074,7 +2825,7 @@
         <p:txBody>
           <a:bodyPr wrap="square" rtlCol="0"/>
           <a:lstStyle>
-            <a:lvl1pPr indent="0" marL="0">
+            <a:lvl1pPr marL="0" indent="0">
               <a:buNone/>
               <a:defRPr lang="en-US" sz="2000" dirty="0">
                 <a:solidFill>
@@ -3084,7 +2835,7 @@
             </a:lvl1pPr>
           </a:lstStyle>
           <a:p>
-            <a:pPr indent="0" marL="0">
+            <a:pPr marL="0" indent="0">
               <a:buNone/>
             </a:pPr>
             <a:endParaRPr lang="en-US" sz="2000" dirty="0"/>
@@ -3102,6 +2853,11 @@
 <file path=ppt/slideMasters/slideMaster1.xml><?xml version="1.0" encoding="utf-8"?>
 <p:sldMaster xmlns:a="http://schemas.openxmlformats.org/drawingml/2006/main" xmlns:r="http://schemas.openxmlformats.org/officeDocument/2006/relationships" xmlns:p="http://schemas.openxmlformats.org/presentationml/2006/main">
   <p:cSld>
+    <p:bg>
+      <p:bgRef idx="1001">
+        <a:schemeClr val="bg1"/>
+      </p:bgRef>
+    </p:bg>
     <p:spTree>
       <p:nvGrpSpPr>
         <p:cNvPr id="1" name=""/>
@@ -3136,7 +2892,7 @@
           </a:prstGeom>
           <a:extLst>
             <a:ext uri="{C572A759-6A51-4108-AA02-DFA0A04FC94B}">
-              <ma14:wrappingTextBoxFlag xmlns:ma14="http://schemas.microsoft.com/office/mac/drawingml/2011/main" val="0"/>
+              <ma14:wrappingTextBoxFlag xmlns:ma14="http://schemas.microsoft.com/office/mac/drawingml/2011/main" xmlns="" val="0"/>
             </a:ext>
           </a:extLst>
         </p:spPr>
@@ -3154,8 +2910,8 @@
           <a:p>
             <a:pPr algn="r"/>
             <a:fld id="{F7021451-1387-4CA6-816F-3879F97B5CBC}" type="slidenum">
-              <a:rPr b="0" lang="en-US"/>
-              <a:t>null</a:t>
+              <a:rPr lang="en-US" b="0"/>
+              <a:t>‹#›</a:t>
             </a:fld>
             <a:endParaRPr lang="en-US"/>
           </a:p>
@@ -3444,9 +3200,11 @@
       <p:sp>
         <p:nvSpPr>
           <p:cNvPr id="2" name="Text 0"/>
-          <p:cNvSpPr/>
+          <p:cNvSpPr>
+            <a:spLocks noGrp="1"/>
+          </p:cNvSpPr>
           <p:nvPr>
-            <p:ph idx="100" type="title" hasCustomPrompt="1"/>
+            <p:ph type="title" idx="100" hasCustomPrompt="1"/>
           </p:nvPr>
         </p:nvSpPr>
         <p:spPr>
@@ -3464,7 +3222,7 @@
           <a:bodyPr wrap="square" lIns="0" tIns="0" rIns="0" bIns="0" rtlCol="0" anchor="b"/>
           <a:lstStyle/>
           <a:p>
-            <a:pPr algn="l" indent="0" marL="0">
+            <a:pPr marL="0" indent="0" algn="l">
               <a:buNone/>
             </a:pPr>
             <a:r>
@@ -3478,7 +3236,7 @@
             <a:endParaRPr lang="en-US" sz="4800" dirty="0"/>
           </a:p>
           <a:p>
-            <a:pPr algn="l" indent="0" marL="0">
+            <a:pPr marL="0" indent="0" algn="l">
               <a:buNone/>
             </a:pPr>
             <a:r>
@@ -3496,9 +3254,11 @@
       <p:sp>
         <p:nvSpPr>
           <p:cNvPr id="3" name="Text 0"/>
-          <p:cNvSpPr/>
+          <p:cNvSpPr>
+            <a:spLocks noGrp="1"/>
+          </p:cNvSpPr>
           <p:nvPr>
-            <p:ph idx="101" type="body" hasCustomPrompt="1"/>
+            <p:ph type="body" idx="101" hasCustomPrompt="1"/>
           </p:nvPr>
         </p:nvSpPr>
         <p:spPr>
@@ -3516,7 +3276,7 @@
           <a:bodyPr wrap="square" lIns="0" tIns="0" rIns="0" bIns="0" rtlCol="0" anchor="t"/>
           <a:lstStyle/>
           <a:p>
-            <a:pPr indent="0" marL="0">
+            <a:pPr marL="0" indent="0">
               <a:buNone/>
             </a:pPr>
             <a:r>
@@ -3552,16 +3312,24 @@
           <a:bodyPr wrap="square" lIns="0" tIns="0" rIns="0" bIns="0" rtlCol="0" anchor="t"/>
           <a:lstStyle/>
           <a:p>
-            <a:pPr indent="0" marL="0">
-              <a:buNone/>
-            </a:pPr>
+            <a:pPr marL="0" indent="0">
+              <a:buNone/>
+            </a:pPr>
+            <a:r>
+              <a:rPr lang="en-US" sz="1600">
+                <a:solidFill>
+                  <a:schemeClr val="bg2"/>
+                </a:solidFill>
+              </a:rPr>
+              <a:t>GenAI </a:t>
+            </a:r>
             <a:r>
               <a:rPr lang="en-US" sz="1600" dirty="0">
                 <a:solidFill>
                   <a:schemeClr val="bg2"/>
                 </a:solidFill>
               </a:rPr>
-              <a:t>[Your name]  ·  GenAI Pinnacle Plus capstone  ·  October 2026</a:t>
+              <a:t>Pinnacle Plus capstone</a:t>
             </a:r>
             <a:endParaRPr lang="en-US" sz="1600" dirty="0"/>
           </a:p>
@@ -3640,7 +3408,7 @@
           <a:bodyPr wrap="square" lIns="0" tIns="0" rIns="0" bIns="0" rtlCol="0" anchor="ctr"/>
           <a:lstStyle/>
           <a:p>
-            <a:pPr algn="ctr" indent="0" marL="0">
+            <a:pPr marL="0" indent="0" algn="ctr">
               <a:buNone/>
             </a:pPr>
             <a:r>
@@ -3676,7 +3444,7 @@
           <a:bodyPr wrap="square" lIns="0" tIns="0" rIns="0" bIns="0" rtlCol="0" anchor="t"/>
           <a:lstStyle/>
           <a:p>
-            <a:pPr indent="0" marL="0">
+            <a:pPr marL="0" indent="0">
               <a:buNone/>
             </a:pPr>
             <a:r>
@@ -3712,7 +3480,7 @@
           <a:bodyPr wrap="square" lIns="0" tIns="0" rIns="0" bIns="0" rtlCol="0" anchor="t"/>
           <a:lstStyle/>
           <a:p>
-            <a:pPr indent="0" marL="0">
+            <a:pPr marL="0" indent="0">
               <a:buNone/>
             </a:pPr>
             <a:r>
@@ -3800,7 +3568,7 @@
           <a:bodyPr wrap="square" lIns="0" tIns="0" rIns="0" bIns="0" rtlCol="0" anchor="ctr"/>
           <a:lstStyle/>
           <a:p>
-            <a:pPr algn="ctr" indent="0" marL="0">
+            <a:pPr marL="0" indent="0" algn="ctr">
               <a:buNone/>
             </a:pPr>
             <a:r>
@@ -3836,7 +3604,7 @@
           <a:bodyPr wrap="square" lIns="0" tIns="0" rIns="0" bIns="0" rtlCol="0" anchor="t"/>
           <a:lstStyle/>
           <a:p>
-            <a:pPr indent="0" marL="0">
+            <a:pPr marL="0" indent="0">
               <a:buNone/>
             </a:pPr>
             <a:r>
@@ -3872,7 +3640,7 @@
           <a:bodyPr wrap="square" lIns="0" tIns="0" rIns="0" bIns="0" rtlCol="0" anchor="t"/>
           <a:lstStyle/>
           <a:p>
-            <a:pPr indent="0" marL="0">
+            <a:pPr marL="0" indent="0">
               <a:buNone/>
             </a:pPr>
             <a:r>
@@ -3960,7 +3728,7 @@
           <a:bodyPr wrap="square" lIns="0" tIns="0" rIns="0" bIns="0" rtlCol="0" anchor="ctr"/>
           <a:lstStyle/>
           <a:p>
-            <a:pPr algn="ctr" indent="0" marL="0">
+            <a:pPr marL="0" indent="0" algn="ctr">
               <a:buNone/>
             </a:pPr>
             <a:r>
@@ -3996,7 +3764,7 @@
           <a:bodyPr wrap="square" lIns="0" tIns="0" rIns="0" bIns="0" rtlCol="0" anchor="t"/>
           <a:lstStyle/>
           <a:p>
-            <a:pPr indent="0" marL="0">
+            <a:pPr marL="0" indent="0">
               <a:buNone/>
             </a:pPr>
             <a:r>
@@ -4032,7 +3800,7 @@
           <a:bodyPr wrap="square" lIns="0" tIns="0" rIns="0" bIns="0" rtlCol="0" anchor="t"/>
           <a:lstStyle/>
           <a:p>
-            <a:pPr indent="0" marL="0">
+            <a:pPr marL="0" indent="0">
               <a:buNone/>
             </a:pPr>
             <a:r>
@@ -4075,9 +3843,11 @@
       <p:sp>
         <p:nvSpPr>
           <p:cNvPr id="2" name="Text 1"/>
-          <p:cNvSpPr/>
+          <p:cNvSpPr>
+            <a:spLocks noGrp="1"/>
+          </p:cNvSpPr>
           <p:nvPr>
-            <p:ph idx="101" type="title" hasCustomPrompt="1"/>
+            <p:ph type="title" idx="101" hasCustomPrompt="1"/>
           </p:nvPr>
         </p:nvSpPr>
         <p:spPr>
@@ -4095,7 +3865,7 @@
           <a:bodyPr wrap="square" lIns="0" tIns="0" rIns="0" bIns="0" rtlCol="0" anchor="ctr"/>
           <a:lstStyle/>
           <a:p>
-            <a:pPr algn="l" indent="0" marL="0">
+            <a:pPr marL="0" indent="0" algn="l">
               <a:buNone/>
             </a:pPr>
             <a:r>
@@ -4112,14 +3882,14 @@
       </p:sp>
       <p:pic>
         <p:nvPicPr>
-          <p:cNvPr id="3" name="app-screenshot" descr="The web app answering how LoRA reduces trainable parameters, with three source cards and the reader showing the cited page with the sentence highlighted">    </p:cNvPr>
+          <p:cNvPr id="3" name="app-screenshot" descr="The web app answering how LoRA reduces trainable parameters, with three source cards and the reader showing the cited page with the sentence highlighted"/>
           <p:cNvPicPr>
             <a:picLocks noChangeAspect="1"/>
           </p:cNvPicPr>
           <p:nvPr/>
         </p:nvPicPr>
         <p:blipFill>
-          <a:blip r:embed="rId1"/>
+          <a:blip r:embed="rId3"/>
           <a:stretch>
             <a:fillRect/>
           </a:stretch>
@@ -4155,7 +3925,7 @@
           <a:bodyPr wrap="square" lIns="0" tIns="0" rIns="0" bIns="0" rtlCol="0" anchor="t"/>
           <a:lstStyle/>
           <a:p>
-            <a:pPr indent="0" marL="0">
+            <a:pPr marL="0" indent="0">
               <a:buNone/>
             </a:pPr>
             <a:r>
@@ -4218,7 +3988,7 @@
           <a:bodyPr wrap="square" lIns="0" tIns="0" rIns="0" bIns="0" rtlCol="0" anchor="t"/>
           <a:lstStyle/>
           <a:p>
-            <a:pPr indent="0" marL="0">
+            <a:pPr marL="0" indent="0">
               <a:buNone/>
             </a:pPr>
             <a:r>
@@ -4254,7 +4024,7 @@
           <a:bodyPr wrap="square" lIns="0" tIns="0" rIns="0" bIns="0" rtlCol="0" anchor="t"/>
           <a:lstStyle/>
           <a:p>
-            <a:pPr indent="0" marL="0">
+            <a:pPr marL="0" indent="0">
               <a:buNone/>
             </a:pPr>
             <a:r>
@@ -4315,7 +4085,7 @@
           <a:bodyPr wrap="square" lIns="0" tIns="0" rIns="0" bIns="0" rtlCol="0" anchor="ctr"/>
           <a:lstStyle/>
           <a:p>
-            <a:pPr algn="ctr" indent="0" marL="0">
+            <a:pPr marL="0" indent="0" algn="ctr">
               <a:buNone/>
             </a:pPr>
             <a:r>
@@ -4351,7 +4121,7 @@
           <a:bodyPr wrap="square" lIns="0" tIns="0" rIns="0" bIns="0" rtlCol="0" anchor="t"/>
           <a:lstStyle/>
           <a:p>
-            <a:pPr indent="0" marL="0">
+            <a:pPr marL="0" indent="0">
               <a:buNone/>
             </a:pPr>
             <a:r>
@@ -4412,7 +4182,7 @@
           <a:bodyPr wrap="square" lIns="0" tIns="0" rIns="0" bIns="0" rtlCol="0" anchor="ctr"/>
           <a:lstStyle/>
           <a:p>
-            <a:pPr algn="ctr" indent="0" marL="0">
+            <a:pPr marL="0" indent="0" algn="ctr">
               <a:buNone/>
             </a:pPr>
             <a:r>
@@ -4448,7 +4218,7 @@
           <a:bodyPr wrap="square" lIns="0" tIns="0" rIns="0" bIns="0" rtlCol="0" anchor="t"/>
           <a:lstStyle/>
           <a:p>
-            <a:pPr indent="0" marL="0">
+            <a:pPr marL="0" indent="0">
               <a:buNone/>
             </a:pPr>
             <a:r>
@@ -4509,7 +4279,7 @@
           <a:bodyPr wrap="square" lIns="0" tIns="0" rIns="0" bIns="0" rtlCol="0" anchor="ctr"/>
           <a:lstStyle/>
           <a:p>
-            <a:pPr algn="ctr" indent="0" marL="0">
+            <a:pPr marL="0" indent="0" algn="ctr">
               <a:buNone/>
             </a:pPr>
             <a:r>
@@ -4545,7 +4315,7 @@
           <a:bodyPr wrap="square" lIns="0" tIns="0" rIns="0" bIns="0" rtlCol="0" anchor="t"/>
           <a:lstStyle/>
           <a:p>
-            <a:pPr indent="0" marL="0">
+            <a:pPr marL="0" indent="0">
               <a:buNone/>
             </a:pPr>
             <a:r>
@@ -4581,7 +4351,7 @@
           <a:bodyPr wrap="square" lIns="0" tIns="0" rIns="0" bIns="0" rtlCol="0" anchor="t"/>
           <a:lstStyle/>
           <a:p>
-            <a:pPr indent="0" marL="0">
+            <a:pPr marL="0" indent="0">
               <a:buNone/>
             </a:pPr>
             <a:r>
@@ -4616,7 +4386,7 @@
           </a:prstGeom>
           <a:extLst>
             <a:ext uri="{C572A759-6A51-4108-AA02-DFA0A04FC94B}">
-              <ma14:wrappingTextBoxFlag xmlns:ma14="http://schemas.microsoft.com/office/mac/drawingml/2011/main" val="0"/>
+              <ma14:wrappingTextBoxFlag xmlns:ma14="http://schemas.microsoft.com/office/mac/drawingml/2011/main" xmlns="" val="0"/>
             </a:ext>
           </a:extLst>
         </p:spPr>
@@ -4634,7 +4404,7 @@
           <a:p>
             <a:pPr algn="r"/>
             <a:fld id="{F7021451-1387-4CA6-816F-3879F97B5CBC}" type="slidenum">
-              <a:rPr b="0" lang="en-US"/>
+              <a:rPr lang="en-US" b="0"/>
               <a:t>10</a:t>
             </a:fld>
             <a:endParaRPr lang="en-US"/>
@@ -4669,9 +4439,11 @@
       <p:sp>
         <p:nvSpPr>
           <p:cNvPr id="2" name="Text 1"/>
-          <p:cNvSpPr/>
+          <p:cNvSpPr>
+            <a:spLocks noGrp="1"/>
+          </p:cNvSpPr>
           <p:nvPr>
-            <p:ph idx="101" type="title" hasCustomPrompt="1"/>
+            <p:ph type="title" idx="101" hasCustomPrompt="1"/>
           </p:nvPr>
         </p:nvSpPr>
         <p:spPr>
@@ -4689,7 +4461,7 @@
           <a:bodyPr wrap="square" lIns="0" tIns="0" rIns="0" bIns="0" rtlCol="0" anchor="ctr"/>
           <a:lstStyle/>
           <a:p>
-            <a:pPr algn="l" indent="0" marL="0">
+            <a:pPr marL="0" indent="0" algn="l">
               <a:buNone/>
             </a:pPr>
             <a:r>
@@ -4752,7 +4524,7 @@
           <a:bodyPr wrap="square" lIns="0" tIns="0" rIns="0" bIns="0" rtlCol="0" anchor="t"/>
           <a:lstStyle/>
           <a:p>
-            <a:pPr indent="0" marL="0">
+            <a:pPr marL="0" indent="0">
               <a:buNone/>
             </a:pPr>
             <a:r>
@@ -4791,7 +4563,7 @@
           <a:bodyPr wrap="square" lIns="0" tIns="0" rIns="0" bIns="0" rtlCol="0" anchor="t"/>
           <a:lstStyle/>
           <a:p>
-            <a:pPr indent="0" marL="0">
+            <a:pPr marL="0" indent="0">
               <a:buNone/>
             </a:pPr>
             <a:r>
@@ -4827,7 +4599,7 @@
           <a:bodyPr wrap="square" lIns="0" tIns="0" rIns="0" bIns="0" rtlCol="0" anchor="t"/>
           <a:lstStyle/>
           <a:p>
-            <a:pPr indent="0" marL="0">
+            <a:pPr marL="0" indent="0">
               <a:buNone/>
             </a:pPr>
             <a:r>
@@ -4863,7 +4635,7 @@
           <a:bodyPr wrap="square" lIns="0" tIns="0" rIns="0" bIns="0" rtlCol="0" anchor="t"/>
           <a:lstStyle/>
           <a:p>
-            <a:pPr indent="0" marL="0">
+            <a:pPr marL="0" indent="0">
               <a:buNone/>
             </a:pPr>
             <a:r>
@@ -4926,7 +4698,7 @@
           <a:bodyPr wrap="square" lIns="0" tIns="0" rIns="0" bIns="0" rtlCol="0" anchor="t"/>
           <a:lstStyle/>
           <a:p>
-            <a:pPr indent="0" marL="0">
+            <a:pPr marL="0" indent="0">
               <a:buNone/>
             </a:pPr>
             <a:r>
@@ -4965,7 +4737,7 @@
           <a:bodyPr wrap="square" lIns="0" tIns="0" rIns="0" bIns="0" rtlCol="0" anchor="t"/>
           <a:lstStyle/>
           <a:p>
-            <a:pPr indent="0" marL="0">
+            <a:pPr marL="0" indent="0">
               <a:buNone/>
             </a:pPr>
             <a:r>
@@ -5001,7 +4773,7 @@
           <a:bodyPr wrap="square" lIns="0" tIns="0" rIns="0" bIns="0" rtlCol="0" anchor="t"/>
           <a:lstStyle/>
           <a:p>
-            <a:pPr indent="0" marL="0">
+            <a:pPr marL="0" indent="0">
               <a:buNone/>
             </a:pPr>
             <a:r>
@@ -5037,7 +4809,7 @@
           <a:bodyPr wrap="square" lIns="0" tIns="0" rIns="0" bIns="0" rtlCol="0" anchor="t"/>
           <a:lstStyle/>
           <a:p>
-            <a:pPr indent="0" marL="0">
+            <a:pPr marL="0" indent="0">
               <a:buNone/>
             </a:pPr>
             <a:r>
@@ -5100,7 +4872,7 @@
           <a:bodyPr wrap="square" lIns="0" tIns="0" rIns="0" bIns="0" rtlCol="0" anchor="t"/>
           <a:lstStyle/>
           <a:p>
-            <a:pPr indent="0" marL="0">
+            <a:pPr marL="0" indent="0">
               <a:buNone/>
             </a:pPr>
             <a:r>
@@ -5139,7 +4911,7 @@
           <a:bodyPr wrap="square" lIns="0" tIns="0" rIns="0" bIns="0" rtlCol="0" anchor="t"/>
           <a:lstStyle/>
           <a:p>
-            <a:pPr indent="0" marL="0">
+            <a:pPr marL="0" indent="0">
               <a:buNone/>
             </a:pPr>
             <a:r>
@@ -5175,7 +4947,7 @@
           <a:bodyPr wrap="square" lIns="0" tIns="0" rIns="0" bIns="0" rtlCol="0" anchor="t"/>
           <a:lstStyle/>
           <a:p>
-            <a:pPr indent="0" marL="0">
+            <a:pPr marL="0" indent="0">
               <a:buNone/>
             </a:pPr>
             <a:r>
@@ -5211,7 +4983,7 @@
           <a:bodyPr wrap="square" lIns="0" tIns="0" rIns="0" bIns="0" rtlCol="0" anchor="t"/>
           <a:lstStyle/>
           <a:p>
-            <a:pPr indent="0" marL="0">
+            <a:pPr marL="0" indent="0">
               <a:buNone/>
             </a:pPr>
             <a:r>
@@ -5246,7 +5018,7 @@
           </a:prstGeom>
           <a:extLst>
             <a:ext uri="{C572A759-6A51-4108-AA02-DFA0A04FC94B}">
-              <ma14:wrappingTextBoxFlag xmlns:ma14="http://schemas.microsoft.com/office/mac/drawingml/2011/main" val="0"/>
+              <ma14:wrappingTextBoxFlag xmlns:ma14="http://schemas.microsoft.com/office/mac/drawingml/2011/main" xmlns="" val="0"/>
             </a:ext>
           </a:extLst>
         </p:spPr>
@@ -5264,7 +5036,7 @@
           <a:p>
             <a:pPr algn="r"/>
             <a:fld id="{F7021451-1387-4CA6-816F-3879F97B5CBC}" type="slidenum">
-              <a:rPr b="0" lang="en-US"/>
+              <a:rPr lang="en-US" b="0"/>
               <a:t>11</a:t>
             </a:fld>
             <a:endParaRPr lang="en-US"/>
@@ -5299,9 +5071,11 @@
       <p:sp>
         <p:nvSpPr>
           <p:cNvPr id="2" name="Text 1"/>
-          <p:cNvSpPr/>
+          <p:cNvSpPr>
+            <a:spLocks noGrp="1"/>
+          </p:cNvSpPr>
           <p:nvPr>
-            <p:ph idx="101" type="title" hasCustomPrompt="1"/>
+            <p:ph type="title" idx="101" hasCustomPrompt="1"/>
           </p:nvPr>
         </p:nvSpPr>
         <p:spPr>
@@ -5319,7 +5093,7 @@
           <a:bodyPr wrap="square" lIns="0" tIns="0" rIns="0" bIns="0" rtlCol="0" anchor="ctr"/>
           <a:lstStyle/>
           <a:p>
-            <a:pPr algn="l" indent="0" marL="0">
+            <a:pPr marL="0" indent="0" algn="l">
               <a:buNone/>
             </a:pPr>
             <a:r>
@@ -5407,7 +5181,7 @@
           <a:bodyPr wrap="square" lIns="0" tIns="0" rIns="0" bIns="0" rtlCol="0" anchor="ctr"/>
           <a:lstStyle/>
           <a:p>
-            <a:pPr algn="ctr" indent="0" marL="0">
+            <a:pPr marL="0" indent="0" algn="ctr">
               <a:buNone/>
             </a:pPr>
             <a:r>
@@ -5443,7 +5217,7 @@
           <a:bodyPr wrap="square" lIns="0" tIns="0" rIns="0" bIns="0" rtlCol="0" anchor="t"/>
           <a:lstStyle/>
           <a:p>
-            <a:pPr indent="0" marL="0">
+            <a:pPr marL="0" indent="0">
               <a:buNone/>
             </a:pPr>
             <a:r>
@@ -5479,7 +5253,7 @@
           <a:bodyPr wrap="square" lIns="0" tIns="0" rIns="0" bIns="0" rtlCol="0" anchor="t"/>
           <a:lstStyle/>
           <a:p>
-            <a:pPr indent="0" marL="0">
+            <a:pPr marL="0" indent="0">
               <a:buNone/>
             </a:pPr>
             <a:r>
@@ -5567,7 +5341,7 @@
           <a:bodyPr wrap="square" lIns="0" tIns="0" rIns="0" bIns="0" rtlCol="0" anchor="ctr"/>
           <a:lstStyle/>
           <a:p>
-            <a:pPr algn="ctr" indent="0" marL="0">
+            <a:pPr marL="0" indent="0" algn="ctr">
               <a:buNone/>
             </a:pPr>
             <a:r>
@@ -5603,7 +5377,7 @@
           <a:bodyPr wrap="square" lIns="0" tIns="0" rIns="0" bIns="0" rtlCol="0" anchor="t"/>
           <a:lstStyle/>
           <a:p>
-            <a:pPr indent="0" marL="0">
+            <a:pPr marL="0" indent="0">
               <a:buNone/>
             </a:pPr>
             <a:r>
@@ -5639,7 +5413,7 @@
           <a:bodyPr wrap="square" lIns="0" tIns="0" rIns="0" bIns="0" rtlCol="0" anchor="t"/>
           <a:lstStyle/>
           <a:p>
-            <a:pPr indent="0" marL="0">
+            <a:pPr marL="0" indent="0">
               <a:buNone/>
             </a:pPr>
             <a:r>
@@ -5727,7 +5501,7 @@
           <a:bodyPr wrap="square" lIns="0" tIns="0" rIns="0" bIns="0" rtlCol="0" anchor="ctr"/>
           <a:lstStyle/>
           <a:p>
-            <a:pPr algn="ctr" indent="0" marL="0">
+            <a:pPr marL="0" indent="0" algn="ctr">
               <a:buNone/>
             </a:pPr>
             <a:r>
@@ -5763,7 +5537,7 @@
           <a:bodyPr wrap="square" lIns="0" tIns="0" rIns="0" bIns="0" rtlCol="0" anchor="t"/>
           <a:lstStyle/>
           <a:p>
-            <a:pPr indent="0" marL="0">
+            <a:pPr marL="0" indent="0">
               <a:buNone/>
             </a:pPr>
             <a:r>
@@ -5799,7 +5573,7 @@
           <a:bodyPr wrap="square" lIns="0" tIns="0" rIns="0" bIns="0" rtlCol="0" anchor="t"/>
           <a:lstStyle/>
           <a:p>
-            <a:pPr indent="0" marL="0">
+            <a:pPr marL="0" indent="0">
               <a:buNone/>
             </a:pPr>
             <a:r>
@@ -5887,7 +5661,7 @@
           <a:bodyPr wrap="square" lIns="0" tIns="0" rIns="0" bIns="0" rtlCol="0" anchor="ctr"/>
           <a:lstStyle/>
           <a:p>
-            <a:pPr algn="ctr" indent="0" marL="0">
+            <a:pPr marL="0" indent="0" algn="ctr">
               <a:buNone/>
             </a:pPr>
             <a:r>
@@ -5923,7 +5697,7 @@
           <a:bodyPr wrap="square" lIns="0" tIns="0" rIns="0" bIns="0" rtlCol="0" anchor="t"/>
           <a:lstStyle/>
           <a:p>
-            <a:pPr indent="0" marL="0">
+            <a:pPr marL="0" indent="0">
               <a:buNone/>
             </a:pPr>
             <a:r>
@@ -5959,7 +5733,7 @@
           <a:bodyPr wrap="square" lIns="0" tIns="0" rIns="0" bIns="0" rtlCol="0" anchor="t"/>
           <a:lstStyle/>
           <a:p>
-            <a:pPr indent="0" marL="0">
+            <a:pPr marL="0" indent="0">
               <a:buNone/>
             </a:pPr>
             <a:r>
@@ -6047,7 +5821,7 @@
           <a:bodyPr wrap="square" lIns="0" tIns="0" rIns="0" bIns="0" rtlCol="0" anchor="ctr"/>
           <a:lstStyle/>
           <a:p>
-            <a:pPr algn="ctr" indent="0" marL="0">
+            <a:pPr marL="0" indent="0" algn="ctr">
               <a:buNone/>
             </a:pPr>
             <a:r>
@@ -6083,7 +5857,7 @@
           <a:bodyPr wrap="square" lIns="0" tIns="0" rIns="0" bIns="0" rtlCol="0" anchor="t"/>
           <a:lstStyle/>
           <a:p>
-            <a:pPr indent="0" marL="0">
+            <a:pPr marL="0" indent="0">
               <a:buNone/>
             </a:pPr>
             <a:r>
@@ -6119,7 +5893,7 @@
           <a:bodyPr wrap="square" lIns="0" tIns="0" rIns="0" bIns="0" rtlCol="0" anchor="t"/>
           <a:lstStyle/>
           <a:p>
-            <a:pPr indent="0" marL="0">
+            <a:pPr marL="0" indent="0">
               <a:buNone/>
             </a:pPr>
             <a:r>
@@ -6207,7 +5981,7 @@
           <a:bodyPr wrap="square" lIns="0" tIns="0" rIns="0" bIns="0" rtlCol="0" anchor="ctr"/>
           <a:lstStyle/>
           <a:p>
-            <a:pPr algn="ctr" indent="0" marL="0">
+            <a:pPr marL="0" indent="0" algn="ctr">
               <a:buNone/>
             </a:pPr>
             <a:r>
@@ -6243,7 +6017,7 @@
           <a:bodyPr wrap="square" lIns="0" tIns="0" rIns="0" bIns="0" rtlCol="0" anchor="t"/>
           <a:lstStyle/>
           <a:p>
-            <a:pPr indent="0" marL="0">
+            <a:pPr marL="0" indent="0">
               <a:buNone/>
             </a:pPr>
             <a:r>
@@ -6279,7 +6053,7 @@
           <a:bodyPr wrap="square" lIns="0" tIns="0" rIns="0" bIns="0" rtlCol="0" anchor="t"/>
           <a:lstStyle/>
           <a:p>
-            <a:pPr indent="0" marL="0">
+            <a:pPr marL="0" indent="0">
               <a:buNone/>
             </a:pPr>
             <a:r>
@@ -6296,7 +6070,7 @@
       </p:sp>
       <p:sp>
         <p:nvSpPr>
-          <p:cNvPr id="25" name="Slide Number Placeholder 0"/>
+          <p:cNvPr id="33" name="Slide Number Placeholder 0"/>
           <p:cNvSpPr>
             <a:spLocks noGrp="1"/>
           </p:cNvSpPr>
@@ -6314,7 +6088,7 @@
           </a:prstGeom>
           <a:extLst>
             <a:ext uri="{C572A759-6A51-4108-AA02-DFA0A04FC94B}">
-              <ma14:wrappingTextBoxFlag xmlns:ma14="http://schemas.microsoft.com/office/mac/drawingml/2011/main" val="0"/>
+              <ma14:wrappingTextBoxFlag xmlns:ma14="http://schemas.microsoft.com/office/mac/drawingml/2011/main" xmlns="" val="0"/>
             </a:ext>
           </a:extLst>
         </p:spPr>
@@ -6332,7 +6106,7 @@
           <a:p>
             <a:pPr algn="r"/>
             <a:fld id="{F7021451-1387-4CA6-816F-3879F97B5CBC}" type="slidenum">
-              <a:rPr b="0" lang="en-US"/>
+              <a:rPr lang="en-US" b="0"/>
               <a:t>12</a:t>
             </a:fld>
             <a:endParaRPr lang="en-US"/>
@@ -6367,9 +6141,11 @@
       <p:sp>
         <p:nvSpPr>
           <p:cNvPr id="2" name="Text 0"/>
-          <p:cNvSpPr/>
+          <p:cNvSpPr>
+            <a:spLocks noGrp="1"/>
+          </p:cNvSpPr>
           <p:nvPr>
-            <p:ph idx="100" type="title" hasCustomPrompt="1"/>
+            <p:ph type="title" idx="100" hasCustomPrompt="1"/>
           </p:nvPr>
         </p:nvSpPr>
         <p:spPr>
@@ -6387,7 +6163,7 @@
           <a:bodyPr wrap="square" lIns="0" tIns="0" rIns="0" bIns="0" rtlCol="0" anchor="b"/>
           <a:lstStyle/>
           <a:p>
-            <a:pPr algn="l" indent="0" marL="0">
+            <a:pPr marL="0" indent="0" algn="l">
               <a:buNone/>
             </a:pPr>
             <a:r>
@@ -6405,9 +6181,11 @@
       <p:sp>
         <p:nvSpPr>
           <p:cNvPr id="3" name="Text 0"/>
-          <p:cNvSpPr/>
+          <p:cNvSpPr>
+            <a:spLocks noGrp="1"/>
+          </p:cNvSpPr>
           <p:nvPr>
-            <p:ph idx="101" type="body" hasCustomPrompt="1"/>
+            <p:ph type="body" idx="101" hasCustomPrompt="1"/>
           </p:nvPr>
         </p:nvSpPr>
         <p:spPr>
@@ -6425,7 +6203,7 @@
           <a:bodyPr wrap="square" lIns="0" tIns="0" rIns="0" bIns="0" rtlCol="0" anchor="t"/>
           <a:lstStyle/>
           <a:p>
-            <a:pPr indent="0" marL="0">
+            <a:pPr marL="0" indent="0">
               <a:buNone/>
             </a:pPr>
             <a:r>
@@ -6461,7 +6239,7 @@
           <a:bodyPr wrap="square" lIns="0" tIns="0" rIns="0" bIns="0" rtlCol="0" anchor="t"/>
           <a:lstStyle/>
           <a:p>
-            <a:pPr indent="0" marL="0">
+            <a:pPr marL="0" indent="0">
               <a:buNone/>
             </a:pPr>
             <a:r>
@@ -6525,7 +6303,7 @@
           <a:bodyPr wrap="square" lIns="0" tIns="0" rIns="0" bIns="0" rtlCol="0" anchor="ctr"/>
           <a:lstStyle/>
           <a:p>
-            <a:pPr algn="ctr" indent="0" marL="0">
+            <a:pPr marL="0" indent="0" algn="ctr">
               <a:buNone/>
             </a:pPr>
             <a:r>
@@ -6561,7 +6339,7 @@
           <a:bodyPr wrap="square" lIns="0" tIns="0" rIns="0" bIns="0" rtlCol="0" anchor="t"/>
           <a:lstStyle/>
           <a:p>
-            <a:pPr indent="0" marL="0">
+            <a:pPr marL="0" indent="0">
               <a:buNone/>
             </a:pPr>
             <a:r>
@@ -6622,7 +6400,7 @@
           <a:bodyPr wrap="square" lIns="0" tIns="0" rIns="0" bIns="0" rtlCol="0" anchor="ctr"/>
           <a:lstStyle/>
           <a:p>
-            <a:pPr algn="ctr" indent="0" marL="0">
+            <a:pPr marL="0" indent="0" algn="ctr">
               <a:buNone/>
             </a:pPr>
             <a:r>
@@ -6658,7 +6436,7 @@
           <a:bodyPr wrap="square" lIns="0" tIns="0" rIns="0" bIns="0" rtlCol="0" anchor="t"/>
           <a:lstStyle/>
           <a:p>
-            <a:pPr indent="0" marL="0">
+            <a:pPr marL="0" indent="0">
               <a:buNone/>
             </a:pPr>
             <a:r>
@@ -6719,7 +6497,7 @@
           <a:bodyPr wrap="square" lIns="0" tIns="0" rIns="0" bIns="0" rtlCol="0" anchor="ctr"/>
           <a:lstStyle/>
           <a:p>
-            <a:pPr algn="ctr" indent="0" marL="0">
+            <a:pPr marL="0" indent="0" algn="ctr">
               <a:buNone/>
             </a:pPr>
             <a:r>
@@ -6755,7 +6533,7 @@
           <a:bodyPr wrap="square" lIns="0" tIns="0" rIns="0" bIns="0" rtlCol="0" anchor="t"/>
           <a:lstStyle/>
           <a:p>
-            <a:pPr indent="0" marL="0">
+            <a:pPr marL="0" indent="0">
               <a:buNone/>
             </a:pPr>
             <a:r>
@@ -6816,7 +6594,7 @@
           <a:bodyPr wrap="square" lIns="0" tIns="0" rIns="0" bIns="0" rtlCol="0" anchor="ctr"/>
           <a:lstStyle/>
           <a:p>
-            <a:pPr algn="ctr" indent="0" marL="0">
+            <a:pPr marL="0" indent="0" algn="ctr">
               <a:buNone/>
             </a:pPr>
             <a:r>
@@ -6852,7 +6630,7 @@
           <a:bodyPr wrap="square" lIns="0" tIns="0" rIns="0" bIns="0" rtlCol="0" anchor="t"/>
           <a:lstStyle/>
           <a:p>
-            <a:pPr indent="0" marL="0">
+            <a:pPr marL="0" indent="0">
               <a:buNone/>
             </a:pPr>
             <a:r>
@@ -6913,7 +6691,7 @@
           <a:bodyPr wrap="square" lIns="0" tIns="0" rIns="0" bIns="0" rtlCol="0" anchor="ctr"/>
           <a:lstStyle/>
           <a:p>
-            <a:pPr algn="ctr" indent="0" marL="0">
+            <a:pPr marL="0" indent="0" algn="ctr">
               <a:buNone/>
             </a:pPr>
             <a:r>
@@ -6949,7 +6727,7 @@
           <a:bodyPr wrap="square" lIns="0" tIns="0" rIns="0" bIns="0" rtlCol="0" anchor="t"/>
           <a:lstStyle/>
           <a:p>
-            <a:pPr indent="0" marL="0">
+            <a:pPr marL="0" indent="0">
               <a:buNone/>
             </a:pPr>
             <a:r>
@@ -6985,7 +6763,7 @@
           <a:bodyPr wrap="square" lIns="0" tIns="0" rIns="0" bIns="0" rtlCol="0" anchor="t"/>
           <a:lstStyle/>
           <a:p>
-            <a:pPr indent="0" marL="0">
+            <a:pPr marL="0" indent="0">
               <a:buNone/>
             </a:pPr>
             <a:r>
@@ -7028,9 +6806,11 @@
       <p:sp>
         <p:nvSpPr>
           <p:cNvPr id="2" name="Text 1"/>
-          <p:cNvSpPr/>
+          <p:cNvSpPr>
+            <a:spLocks noGrp="1"/>
+          </p:cNvSpPr>
           <p:nvPr>
-            <p:ph idx="101" type="title" hasCustomPrompt="1"/>
+            <p:ph type="title" idx="101" hasCustomPrompt="1"/>
           </p:nvPr>
         </p:nvSpPr>
         <p:spPr>
@@ -7048,7 +6828,7 @@
           <a:bodyPr wrap="square" lIns="0" tIns="0" rIns="0" bIns="0" rtlCol="0" anchor="ctr"/>
           <a:lstStyle/>
           <a:p>
-            <a:pPr algn="l" indent="0" marL="0">
+            <a:pPr marL="0" indent="0" algn="l">
               <a:buNone/>
             </a:pPr>
             <a:r>
@@ -7109,7 +6889,7 @@
           <a:bodyPr wrap="square" lIns="0" tIns="0" rIns="0" bIns="0" rtlCol="0" anchor="ctr"/>
           <a:lstStyle/>
           <a:p>
-            <a:pPr algn="ctr" indent="0" marL="0">
+            <a:pPr marL="0" indent="0" algn="ctr">
               <a:buNone/>
             </a:pPr>
             <a:r>
@@ -7145,7 +6925,7 @@
           <a:bodyPr wrap="square" lIns="0" tIns="0" rIns="0" bIns="0" rtlCol="0" anchor="t"/>
           <a:lstStyle/>
           <a:p>
-            <a:pPr indent="0" marL="0">
+            <a:pPr marL="0" indent="0">
               <a:buNone/>
             </a:pPr>
             <a:r>
@@ -7181,7 +6961,7 @@
           <a:bodyPr wrap="square" lIns="0" tIns="0" rIns="0" bIns="0" rtlCol="0" anchor="t"/>
           <a:lstStyle/>
           <a:p>
-            <a:pPr indent="0" marL="0">
+            <a:pPr marL="0" indent="0">
               <a:buNone/>
             </a:pPr>
             <a:r>
@@ -7242,7 +7022,7 @@
           <a:bodyPr wrap="square" lIns="0" tIns="0" rIns="0" bIns="0" rtlCol="0" anchor="ctr"/>
           <a:lstStyle/>
           <a:p>
-            <a:pPr algn="ctr" indent="0" marL="0">
+            <a:pPr marL="0" indent="0" algn="ctr">
               <a:buNone/>
             </a:pPr>
             <a:r>
@@ -7278,7 +7058,7 @@
           <a:bodyPr wrap="square" lIns="0" tIns="0" rIns="0" bIns="0" rtlCol="0" anchor="t"/>
           <a:lstStyle/>
           <a:p>
-            <a:pPr indent="0" marL="0">
+            <a:pPr marL="0" indent="0">
               <a:buNone/>
             </a:pPr>
             <a:r>
@@ -7314,7 +7094,7 @@
           <a:bodyPr wrap="square" lIns="0" tIns="0" rIns="0" bIns="0" rtlCol="0" anchor="t"/>
           <a:lstStyle/>
           <a:p>
-            <a:pPr indent="0" marL="0">
+            <a:pPr marL="0" indent="0">
               <a:buNone/>
             </a:pPr>
             <a:r>
@@ -7375,7 +7155,7 @@
           <a:bodyPr wrap="square" lIns="0" tIns="0" rIns="0" bIns="0" rtlCol="0" anchor="ctr"/>
           <a:lstStyle/>
           <a:p>
-            <a:pPr algn="ctr" indent="0" marL="0">
+            <a:pPr marL="0" indent="0" algn="ctr">
               <a:buNone/>
             </a:pPr>
             <a:r>
@@ -7411,7 +7191,7 @@
           <a:bodyPr wrap="square" lIns="0" tIns="0" rIns="0" bIns="0" rtlCol="0" anchor="t"/>
           <a:lstStyle/>
           <a:p>
-            <a:pPr indent="0" marL="0">
+            <a:pPr marL="0" indent="0">
               <a:buNone/>
             </a:pPr>
             <a:r>
@@ -7447,7 +7227,7 @@
           <a:bodyPr wrap="square" lIns="0" tIns="0" rIns="0" bIns="0" rtlCol="0" anchor="t"/>
           <a:lstStyle/>
           <a:p>
-            <a:pPr indent="0" marL="0">
+            <a:pPr marL="0" indent="0">
               <a:buNone/>
             </a:pPr>
             <a:r>
@@ -7510,7 +7290,7 @@
           <a:bodyPr wrap="square" lIns="0" tIns="0" rIns="0" bIns="0" rtlCol="0" anchor="t"/>
           <a:lstStyle/>
           <a:p>
-            <a:pPr indent="0" marL="0">
+            <a:pPr marL="0" indent="0">
               <a:buNone/>
             </a:pPr>
             <a:r>
@@ -7549,7 +7329,7 @@
           <a:bodyPr wrap="square" lIns="0" tIns="0" rIns="0" bIns="0" rtlCol="0" anchor="t"/>
           <a:lstStyle/>
           <a:p>
-            <a:pPr indent="0" marL="0">
+            <a:pPr marL="0" indent="0">
               <a:buNone/>
             </a:pPr>
             <a:r>
@@ -7585,7 +7365,7 @@
           <a:bodyPr wrap="square" lIns="0" tIns="0" rIns="0" bIns="0" rtlCol="0" anchor="t"/>
           <a:lstStyle/>
           <a:p>
-            <a:pPr indent="0" marL="0">
+            <a:pPr marL="0" indent="0">
               <a:buNone/>
             </a:pPr>
             <a:r>
@@ -7624,7 +7404,7 @@
           <a:bodyPr wrap="square" lIns="0" tIns="0" rIns="0" bIns="0" rtlCol="0" anchor="t"/>
           <a:lstStyle/>
           <a:p>
-            <a:pPr indent="0" marL="0">
+            <a:pPr marL="0" indent="0">
               <a:buNone/>
             </a:pPr>
             <a:r>
@@ -7660,7 +7440,7 @@
           <a:bodyPr wrap="square" lIns="0" tIns="0" rIns="0" bIns="0" rtlCol="0" anchor="t"/>
           <a:lstStyle/>
           <a:p>
-            <a:pPr indent="0" marL="0">
+            <a:pPr marL="0" indent="0">
               <a:buNone/>
             </a:pPr>
             <a:r>
@@ -7699,7 +7479,7 @@
           <a:bodyPr wrap="square" lIns="0" tIns="0" rIns="0" bIns="0" rtlCol="0" anchor="t"/>
           <a:lstStyle/>
           <a:p>
-            <a:pPr indent="0" marL="0">
+            <a:pPr marL="0" indent="0">
               <a:buNone/>
             </a:pPr>
             <a:r>
@@ -7734,7 +7514,7 @@
           </a:prstGeom>
           <a:extLst>
             <a:ext uri="{C572A759-6A51-4108-AA02-DFA0A04FC94B}">
-              <ma14:wrappingTextBoxFlag xmlns:ma14="http://schemas.microsoft.com/office/mac/drawingml/2011/main" val="0"/>
+              <ma14:wrappingTextBoxFlag xmlns:ma14="http://schemas.microsoft.com/office/mac/drawingml/2011/main" xmlns="" val="0"/>
             </a:ext>
           </a:extLst>
         </p:spPr>
@@ -7752,7 +7532,7 @@
           <a:p>
             <a:pPr algn="r"/>
             <a:fld id="{F7021451-1387-4CA6-816F-3879F97B5CBC}" type="slidenum">
-              <a:rPr b="0" lang="en-US"/>
+              <a:rPr lang="en-US" b="0"/>
               <a:t>2</a:t>
             </a:fld>
             <a:endParaRPr lang="en-US"/>
@@ -7787,9 +7567,11 @@
       <p:sp>
         <p:nvSpPr>
           <p:cNvPr id="2" name="Text 1"/>
-          <p:cNvSpPr/>
+          <p:cNvSpPr>
+            <a:spLocks noGrp="1"/>
+          </p:cNvSpPr>
           <p:nvPr>
-            <p:ph idx="101" type="title" hasCustomPrompt="1"/>
+            <p:ph type="title" idx="101" hasCustomPrompt="1"/>
           </p:nvPr>
         </p:nvSpPr>
         <p:spPr>
@@ -7807,7 +7589,7 @@
           <a:bodyPr wrap="square" lIns="0" tIns="0" rIns="0" bIns="0" rtlCol="0" anchor="ctr"/>
           <a:lstStyle/>
           <a:p>
-            <a:pPr algn="l" indent="0" marL="0">
+            <a:pPr marL="0" indent="0" algn="l">
               <a:buNone/>
             </a:pPr>
             <a:r>
@@ -7824,14 +7606,14 @@
       </p:sp>
       <p:pic>
         <p:nvPicPr>
-          <p:cNvPr id="3" name="architecture-diagram" descr="Architecture: offline ingestion into ChromaDB and BM25; each question is rewritten (S1), searched with hybrid retrieval, reranked to 3, checked for weak context with an optional web fallback (S3), answered by llama3.1 and returned with 3 sources; used by the notebook, the Streamlit app and the FastAPI service with its Next.js app.">    </p:cNvPr>
+          <p:cNvPr id="3" name="architecture-diagram" descr="Architecture: offline ingestion into ChromaDB and BM25; each question is rewritten (S1), searched with hybrid retrieval, reranked to 3, checked for weak context with an optional web fallback (S3), answered by llama3.1 and returned with 3 sources; used by the notebook, the Streamlit app and the FastAPI service with its Next.js app."/>
           <p:cNvPicPr>
             <a:picLocks noChangeAspect="1"/>
           </p:cNvPicPr>
           <p:nvPr/>
         </p:nvPicPr>
         <p:blipFill>
-          <a:blip r:embed="rId1"/>
+          <a:blip r:embed="rId3"/>
           <a:stretch>
             <a:fillRect/>
           </a:stretch>
@@ -7892,7 +7674,7 @@
           <a:bodyPr wrap="square" lIns="0" tIns="0" rIns="0" bIns="0" rtlCol="0" anchor="ctr"/>
           <a:lstStyle/>
           <a:p>
-            <a:pPr algn="ctr" indent="0" marL="0">
+            <a:pPr marL="0" indent="0" algn="ctr">
               <a:buNone/>
             </a:pPr>
             <a:r>
@@ -7928,7 +7710,7 @@
           <a:bodyPr wrap="square" lIns="0" tIns="0" rIns="0" bIns="0" rtlCol="0" anchor="t"/>
           <a:lstStyle/>
           <a:p>
-            <a:pPr indent="0" marL="0">
+            <a:pPr marL="0" indent="0">
               <a:buNone/>
             </a:pPr>
             <a:r>
@@ -7964,7 +7746,7 @@
           <a:bodyPr wrap="square" lIns="0" tIns="0" rIns="0" bIns="0" rtlCol="0" anchor="t"/>
           <a:lstStyle/>
           <a:p>
-            <a:pPr indent="0" marL="0">
+            <a:pPr marL="0" indent="0">
               <a:buNone/>
             </a:pPr>
             <a:r>
@@ -8025,7 +7807,7 @@
           <a:bodyPr wrap="square" lIns="0" tIns="0" rIns="0" bIns="0" rtlCol="0" anchor="ctr"/>
           <a:lstStyle/>
           <a:p>
-            <a:pPr algn="ctr" indent="0" marL="0">
+            <a:pPr marL="0" indent="0" algn="ctr">
               <a:buNone/>
             </a:pPr>
             <a:r>
@@ -8061,7 +7843,7 @@
           <a:bodyPr wrap="square" lIns="0" tIns="0" rIns="0" bIns="0" rtlCol="0" anchor="t"/>
           <a:lstStyle/>
           <a:p>
-            <a:pPr indent="0" marL="0">
+            <a:pPr marL="0" indent="0">
               <a:buNone/>
             </a:pPr>
             <a:r>
@@ -8097,7 +7879,7 @@
           <a:bodyPr wrap="square" lIns="0" tIns="0" rIns="0" bIns="0" rtlCol="0" anchor="t"/>
           <a:lstStyle/>
           <a:p>
-            <a:pPr indent="0" marL="0">
+            <a:pPr marL="0" indent="0">
               <a:buNone/>
             </a:pPr>
             <a:r>
@@ -8158,7 +7940,7 @@
           <a:bodyPr wrap="square" lIns="0" tIns="0" rIns="0" bIns="0" rtlCol="0" anchor="ctr"/>
           <a:lstStyle/>
           <a:p>
-            <a:pPr algn="ctr" indent="0" marL="0">
+            <a:pPr marL="0" indent="0" algn="ctr">
               <a:buNone/>
             </a:pPr>
             <a:r>
@@ -8194,7 +7976,7 @@
           <a:bodyPr wrap="square" lIns="0" tIns="0" rIns="0" bIns="0" rtlCol="0" anchor="t"/>
           <a:lstStyle/>
           <a:p>
-            <a:pPr indent="0" marL="0">
+            <a:pPr marL="0" indent="0">
               <a:buNone/>
             </a:pPr>
             <a:r>
@@ -8230,7 +8012,7 @@
           <a:bodyPr wrap="square" lIns="0" tIns="0" rIns="0" bIns="0" rtlCol="0" anchor="t"/>
           <a:lstStyle/>
           <a:p>
-            <a:pPr indent="0" marL="0">
+            <a:pPr marL="0" indent="0">
               <a:buNone/>
             </a:pPr>
             <a:r>
@@ -8291,7 +8073,7 @@
           <a:bodyPr wrap="square" lIns="0" tIns="0" rIns="0" bIns="0" rtlCol="0" anchor="ctr"/>
           <a:lstStyle/>
           <a:p>
-            <a:pPr algn="ctr" indent="0" marL="0">
+            <a:pPr marL="0" indent="0" algn="ctr">
               <a:buNone/>
             </a:pPr>
             <a:r>
@@ -8327,7 +8109,7 @@
           <a:bodyPr wrap="square" lIns="0" tIns="0" rIns="0" bIns="0" rtlCol="0" anchor="t"/>
           <a:lstStyle/>
           <a:p>
-            <a:pPr indent="0" marL="0">
+            <a:pPr marL="0" indent="0">
               <a:buNone/>
             </a:pPr>
             <a:r>
@@ -8363,7 +8145,7 @@
           <a:bodyPr wrap="square" lIns="0" tIns="0" rIns="0" bIns="0" rtlCol="0" anchor="t"/>
           <a:lstStyle/>
           <a:p>
-            <a:pPr indent="0" marL="0">
+            <a:pPr marL="0" indent="0">
               <a:buNone/>
             </a:pPr>
             <a:r>
@@ -8398,7 +8180,7 @@
           </a:prstGeom>
           <a:extLst>
             <a:ext uri="{C572A759-6A51-4108-AA02-DFA0A04FC94B}">
-              <ma14:wrappingTextBoxFlag xmlns:ma14="http://schemas.microsoft.com/office/mac/drawingml/2011/main" val="0"/>
+              <ma14:wrappingTextBoxFlag xmlns:ma14="http://schemas.microsoft.com/office/mac/drawingml/2011/main" xmlns="" val="0"/>
             </a:ext>
           </a:extLst>
         </p:spPr>
@@ -8416,7 +8198,7 @@
           <a:p>
             <a:pPr algn="r"/>
             <a:fld id="{F7021451-1387-4CA6-816F-3879F97B5CBC}" type="slidenum">
-              <a:rPr b="0" lang="en-US"/>
+              <a:rPr lang="en-US" b="0"/>
               <a:t>3</a:t>
             </a:fld>
             <a:endParaRPr lang="en-US"/>
@@ -8451,9 +8233,11 @@
       <p:sp>
         <p:nvSpPr>
           <p:cNvPr id="2" name="Text 1"/>
-          <p:cNvSpPr/>
+          <p:cNvSpPr>
+            <a:spLocks noGrp="1"/>
+          </p:cNvSpPr>
           <p:nvPr>
-            <p:ph idx="101" type="title" hasCustomPrompt="1"/>
+            <p:ph type="title" idx="101" hasCustomPrompt="1"/>
           </p:nvPr>
         </p:nvSpPr>
         <p:spPr>
@@ -8471,7 +8255,7 @@
           <a:bodyPr wrap="square" lIns="0" tIns="0" rIns="0" bIns="0" rtlCol="0" anchor="ctr"/>
           <a:lstStyle/>
           <a:p>
-            <a:pPr algn="l" indent="0" marL="0">
+            <a:pPr marL="0" indent="0" algn="l">
               <a:buNone/>
             </a:pPr>
             <a:r>
@@ -8509,10 +8293,34 @@
             <a:tbl>
               <a:tblPr/>
               <a:tblGrid>
-                <a:gridCol w="3383280"/>
-                <a:gridCol w="731520"/>
-                <a:gridCol w="822960"/>
-                <a:gridCol w="914400"/>
+                <a:gridCol w="3383280">
+                  <a:extLst>
+                    <a:ext uri="{9D8B030D-6E8A-4147-A177-3AD203B41FA5}">
+                      <a16:colId xmlns:a16="http://schemas.microsoft.com/office/drawing/2014/main" val="20000"/>
+                    </a:ext>
+                  </a:extLst>
+                </a:gridCol>
+                <a:gridCol w="731520">
+                  <a:extLst>
+                    <a:ext uri="{9D8B030D-6E8A-4147-A177-3AD203B41FA5}">
+                      <a16:colId xmlns:a16="http://schemas.microsoft.com/office/drawing/2014/main" val="20001"/>
+                    </a:ext>
+                  </a:extLst>
+                </a:gridCol>
+                <a:gridCol w="822960">
+                  <a:extLst>
+                    <a:ext uri="{9D8B030D-6E8A-4147-A177-3AD203B41FA5}">
+                      <a16:colId xmlns:a16="http://schemas.microsoft.com/office/drawing/2014/main" val="20002"/>
+                    </a:ext>
+                  </a:extLst>
+                </a:gridCol>
+                <a:gridCol w="914400">
+                  <a:extLst>
+                    <a:ext uri="{9D8B030D-6E8A-4147-A177-3AD203B41FA5}">
+                      <a16:colId xmlns:a16="http://schemas.microsoft.com/office/drawing/2014/main" val="20003"/>
+                    </a:ext>
+                  </a:extLst>
+                </a:gridCol>
               </a:tblGrid>
               <a:tr h="329184">
                 <a:tc>
@@ -8520,7 +8328,7 @@
                     <a:bodyPr/>
                     <a:lstStyle/>
                     <a:p>
-                      <a:pPr algn="l" indent="0" marL="0">
+                      <a:pPr marL="0" indent="0" algn="l">
                         <a:buNone/>
                       </a:pPr>
                       <a:r>
@@ -8541,7 +8349,7 @@
                       </a:endParaRPr>
                     </a:p>
                   </a:txBody>
-                  <a:tcPr marL="91440" marR="91440" marT="27432" marB="27432">
+                  <a:tcPr marT="27432" marB="27432">
                     <a:lnL w="6350" cap="flat" cmpd="sng" algn="ctr">
                       <a:solidFill>
                         <a:srgbClr val="C9CEDA"/>
@@ -8588,7 +8396,7 @@
                     <a:bodyPr/>
                     <a:lstStyle/>
                     <a:p>
-                      <a:pPr algn="r" indent="0" marL="0">
+                      <a:pPr marL="0" indent="0" algn="r">
                         <a:buNone/>
                       </a:pPr>
                       <a:r>
@@ -8609,7 +8417,7 @@
                       </a:endParaRPr>
                     </a:p>
                   </a:txBody>
-                  <a:tcPr marL="91440" marR="91440" marT="27432" marB="27432">
+                  <a:tcPr marT="27432" marB="27432">
                     <a:lnL w="6350" cap="flat" cmpd="sng" algn="ctr">
                       <a:solidFill>
                         <a:srgbClr val="C9CEDA"/>
@@ -8656,7 +8464,7 @@
                     <a:bodyPr/>
                     <a:lstStyle/>
                     <a:p>
-                      <a:pPr algn="r" indent="0" marL="0">
+                      <a:pPr marL="0" indent="0" algn="r">
                         <a:buNone/>
                       </a:pPr>
                       <a:r>
@@ -8677,7 +8485,7 @@
                       </a:endParaRPr>
                     </a:p>
                   </a:txBody>
-                  <a:tcPr marL="91440" marR="91440" marT="27432" marB="27432">
+                  <a:tcPr marT="27432" marB="27432">
                     <a:lnL w="6350" cap="flat" cmpd="sng" algn="ctr">
                       <a:solidFill>
                         <a:srgbClr val="C9CEDA"/>
@@ -8724,7 +8532,7 @@
                     <a:bodyPr/>
                     <a:lstStyle/>
                     <a:p>
-                      <a:pPr algn="r" indent="0" marL="0">
+                      <a:pPr marL="0" indent="0" algn="r">
                         <a:buNone/>
                       </a:pPr>
                       <a:r>
@@ -8745,7 +8553,7 @@
                       </a:endParaRPr>
                     </a:p>
                   </a:txBody>
-                  <a:tcPr marL="91440" marR="91440" marT="27432" marB="27432">
+                  <a:tcPr marT="27432" marB="27432">
                     <a:lnL w="6350" cap="flat" cmpd="sng" algn="ctr">
                       <a:solidFill>
                         <a:srgbClr val="C9CEDA"/>
@@ -8787,6 +8595,11 @@
                     </a:solidFill>
                   </a:tcPr>
                 </a:tc>
+                <a:extLst>
+                  <a:ext uri="{0D108BD9-81ED-4DB2-BD59-A6C34878D82A}">
+                    <a16:rowId xmlns:a16="http://schemas.microsoft.com/office/drawing/2014/main" val="10000"/>
+                  </a:ext>
+                </a:extLst>
               </a:tr>
               <a:tr h="329184">
                 <a:tc>
@@ -8794,7 +8607,7 @@
                     <a:bodyPr/>
                     <a:lstStyle/>
                     <a:p>
-                      <a:pPr algn="l" indent="0" marL="0">
+                      <a:pPr marL="0" indent="0" algn="l">
                         <a:buNone/>
                       </a:pPr>
                       <a:r>
@@ -8815,7 +8628,7 @@
                       </a:endParaRPr>
                     </a:p>
                   </a:txBody>
-                  <a:tcPr marL="91440" marR="91440" marT="27432" marB="27432">
+                  <a:tcPr marT="27432" marB="27432">
                     <a:lnL w="6350" cap="flat" cmpd="sng" algn="ctr">
                       <a:solidFill>
                         <a:srgbClr val="C9CEDA"/>
@@ -8862,7 +8675,7 @@
                     <a:bodyPr/>
                     <a:lstStyle/>
                     <a:p>
-                      <a:pPr algn="r" indent="0" marL="0">
+                      <a:pPr marL="0" indent="0" algn="r">
                         <a:buNone/>
                       </a:pPr>
                       <a:r>
@@ -8883,7 +8696,7 @@
                       </a:endParaRPr>
                     </a:p>
                   </a:txBody>
-                  <a:tcPr marL="91440" marR="91440" marT="27432" marB="27432">
+                  <a:tcPr marT="27432" marB="27432">
                     <a:lnL w="6350" cap="flat" cmpd="sng" algn="ctr">
                       <a:solidFill>
                         <a:srgbClr val="C9CEDA"/>
@@ -8930,7 +8743,7 @@
                     <a:bodyPr/>
                     <a:lstStyle/>
                     <a:p>
-                      <a:pPr algn="r" indent="0" marL="0">
+                      <a:pPr marL="0" indent="0" algn="r">
                         <a:buNone/>
                       </a:pPr>
                       <a:r>
@@ -8951,7 +8764,7 @@
                       </a:endParaRPr>
                     </a:p>
                   </a:txBody>
-                  <a:tcPr marL="91440" marR="91440" marT="27432" marB="27432">
+                  <a:tcPr marT="27432" marB="27432">
                     <a:lnL w="6350" cap="flat" cmpd="sng" algn="ctr">
                       <a:solidFill>
                         <a:srgbClr val="C9CEDA"/>
@@ -8998,7 +8811,7 @@
                     <a:bodyPr/>
                     <a:lstStyle/>
                     <a:p>
-                      <a:pPr algn="r" indent="0" marL="0">
+                      <a:pPr marL="0" indent="0" algn="r">
                         <a:buNone/>
                       </a:pPr>
                       <a:r>
@@ -9019,7 +8832,7 @@
                       </a:endParaRPr>
                     </a:p>
                   </a:txBody>
-                  <a:tcPr marL="91440" marR="91440" marT="27432" marB="27432">
+                  <a:tcPr marT="27432" marB="27432">
                     <a:lnL w="6350" cap="flat" cmpd="sng" algn="ctr">
                       <a:solidFill>
                         <a:srgbClr val="C9CEDA"/>
@@ -9061,6 +8874,11 @@
                     </a:solidFill>
                   </a:tcPr>
                 </a:tc>
+                <a:extLst>
+                  <a:ext uri="{0D108BD9-81ED-4DB2-BD59-A6C34878D82A}">
+                    <a16:rowId xmlns:a16="http://schemas.microsoft.com/office/drawing/2014/main" val="10001"/>
+                  </a:ext>
+                </a:extLst>
               </a:tr>
               <a:tr h="329184">
                 <a:tc>
@@ -9068,7 +8886,7 @@
                     <a:bodyPr/>
                     <a:lstStyle/>
                     <a:p>
-                      <a:pPr algn="l" indent="0" marL="0">
+                      <a:pPr marL="0" indent="0" algn="l">
                         <a:buNone/>
                       </a:pPr>
                       <a:r>
@@ -9089,7 +8907,7 @@
                       </a:endParaRPr>
                     </a:p>
                   </a:txBody>
-                  <a:tcPr marL="91440" marR="91440" marT="27432" marB="27432">
+                  <a:tcPr marT="27432" marB="27432">
                     <a:lnL w="6350" cap="flat" cmpd="sng" algn="ctr">
                       <a:solidFill>
                         <a:srgbClr val="C9CEDA"/>
@@ -9136,7 +8954,7 @@
                     <a:bodyPr/>
                     <a:lstStyle/>
                     <a:p>
-                      <a:pPr algn="r" indent="0" marL="0">
+                      <a:pPr marL="0" indent="0" algn="r">
                         <a:buNone/>
                       </a:pPr>
                       <a:r>
@@ -9157,7 +8975,7 @@
                       </a:endParaRPr>
                     </a:p>
                   </a:txBody>
-                  <a:tcPr marL="91440" marR="91440" marT="27432" marB="27432">
+                  <a:tcPr marT="27432" marB="27432">
                     <a:lnL w="6350" cap="flat" cmpd="sng" algn="ctr">
                       <a:solidFill>
                         <a:srgbClr val="C9CEDA"/>
@@ -9204,7 +9022,7 @@
                     <a:bodyPr/>
                     <a:lstStyle/>
                     <a:p>
-                      <a:pPr algn="r" indent="0" marL="0">
+                      <a:pPr marL="0" indent="0" algn="r">
                         <a:buNone/>
                       </a:pPr>
                       <a:r>
@@ -9225,7 +9043,7 @@
                       </a:endParaRPr>
                     </a:p>
                   </a:txBody>
-                  <a:tcPr marL="91440" marR="91440" marT="27432" marB="27432">
+                  <a:tcPr marT="27432" marB="27432">
                     <a:lnL w="6350" cap="flat" cmpd="sng" algn="ctr">
                       <a:solidFill>
                         <a:srgbClr val="C9CEDA"/>
@@ -9272,7 +9090,7 @@
                     <a:bodyPr/>
                     <a:lstStyle/>
                     <a:p>
-                      <a:pPr algn="r" indent="0" marL="0">
+                      <a:pPr marL="0" indent="0" algn="r">
                         <a:buNone/>
                       </a:pPr>
                       <a:r>
@@ -9293,7 +9111,7 @@
                       </a:endParaRPr>
                     </a:p>
                   </a:txBody>
-                  <a:tcPr marL="91440" marR="91440" marT="27432" marB="27432">
+                  <a:tcPr marT="27432" marB="27432">
                     <a:lnL w="6350" cap="flat" cmpd="sng" algn="ctr">
                       <a:solidFill>
                         <a:srgbClr val="C9CEDA"/>
@@ -9335,6 +9153,11 @@
                     </a:solidFill>
                   </a:tcPr>
                 </a:tc>
+                <a:extLst>
+                  <a:ext uri="{0D108BD9-81ED-4DB2-BD59-A6C34878D82A}">
+                    <a16:rowId xmlns:a16="http://schemas.microsoft.com/office/drawing/2014/main" val="10002"/>
+                  </a:ext>
+                </a:extLst>
               </a:tr>
               <a:tr h="329184">
                 <a:tc>
@@ -9342,7 +9165,7 @@
                     <a:bodyPr/>
                     <a:lstStyle/>
                     <a:p>
-                      <a:pPr algn="l" indent="0" marL="0">
+                      <a:pPr marL="0" indent="0" algn="l">
                         <a:buNone/>
                       </a:pPr>
                       <a:r>
@@ -9363,7 +9186,7 @@
                       </a:endParaRPr>
                     </a:p>
                   </a:txBody>
-                  <a:tcPr marL="91440" marR="91440" marT="27432" marB="27432">
+                  <a:tcPr marT="27432" marB="27432">
                     <a:lnL w="6350" cap="flat" cmpd="sng" algn="ctr">
                       <a:solidFill>
                         <a:srgbClr val="C9CEDA"/>
@@ -9410,7 +9233,7 @@
                     <a:bodyPr/>
                     <a:lstStyle/>
                     <a:p>
-                      <a:pPr algn="r" indent="0" marL="0">
+                      <a:pPr marL="0" indent="0" algn="r">
                         <a:buNone/>
                       </a:pPr>
                       <a:r>
@@ -9431,7 +9254,7 @@
                       </a:endParaRPr>
                     </a:p>
                   </a:txBody>
-                  <a:tcPr marL="91440" marR="91440" marT="27432" marB="27432">
+                  <a:tcPr marT="27432" marB="27432">
                     <a:lnL w="6350" cap="flat" cmpd="sng" algn="ctr">
                       <a:solidFill>
                         <a:srgbClr val="C9CEDA"/>
@@ -9478,7 +9301,7 @@
                     <a:bodyPr/>
                     <a:lstStyle/>
                     <a:p>
-                      <a:pPr algn="r" indent="0" marL="0">
+                      <a:pPr marL="0" indent="0" algn="r">
                         <a:buNone/>
                       </a:pPr>
                       <a:r>
@@ -9499,7 +9322,7 @@
                       </a:endParaRPr>
                     </a:p>
                   </a:txBody>
-                  <a:tcPr marL="91440" marR="91440" marT="27432" marB="27432">
+                  <a:tcPr marT="27432" marB="27432">
                     <a:lnL w="6350" cap="flat" cmpd="sng" algn="ctr">
                       <a:solidFill>
                         <a:srgbClr val="C9CEDA"/>
@@ -9546,7 +9369,7 @@
                     <a:bodyPr/>
                     <a:lstStyle/>
                     <a:p>
-                      <a:pPr algn="r" indent="0" marL="0">
+                      <a:pPr marL="0" indent="0" algn="r">
                         <a:buNone/>
                       </a:pPr>
                       <a:r>
@@ -9567,7 +9390,7 @@
                       </a:endParaRPr>
                     </a:p>
                   </a:txBody>
-                  <a:tcPr marL="91440" marR="91440" marT="27432" marB="27432">
+                  <a:tcPr marT="27432" marB="27432">
                     <a:lnL w="6350" cap="flat" cmpd="sng" algn="ctr">
                       <a:solidFill>
                         <a:srgbClr val="C9CEDA"/>
@@ -9609,6 +9432,11 @@
                     </a:solidFill>
                   </a:tcPr>
                 </a:tc>
+                <a:extLst>
+                  <a:ext uri="{0D108BD9-81ED-4DB2-BD59-A6C34878D82A}">
+                    <a16:rowId xmlns:a16="http://schemas.microsoft.com/office/drawing/2014/main" val="10003"/>
+                  </a:ext>
+                </a:extLst>
               </a:tr>
               <a:tr h="329184">
                 <a:tc>
@@ -9616,7 +9444,7 @@
                     <a:bodyPr/>
                     <a:lstStyle/>
                     <a:p>
-                      <a:pPr algn="l" indent="0" marL="0">
+                      <a:pPr marL="0" indent="0" algn="l">
                         <a:buNone/>
                       </a:pPr>
                       <a:r>
@@ -9637,7 +9465,7 @@
                       </a:endParaRPr>
                     </a:p>
                   </a:txBody>
-                  <a:tcPr marL="91440" marR="91440" marT="27432" marB="27432">
+                  <a:tcPr marT="27432" marB="27432">
                     <a:lnL w="6350" cap="flat" cmpd="sng" algn="ctr">
                       <a:solidFill>
                         <a:srgbClr val="C9CEDA"/>
@@ -9684,7 +9512,7 @@
                     <a:bodyPr/>
                     <a:lstStyle/>
                     <a:p>
-                      <a:pPr algn="r" indent="0" marL="0">
+                      <a:pPr marL="0" indent="0" algn="r">
                         <a:buNone/>
                       </a:pPr>
                       <a:r>
@@ -9705,7 +9533,7 @@
                       </a:endParaRPr>
                     </a:p>
                   </a:txBody>
-                  <a:tcPr marL="91440" marR="91440" marT="27432" marB="27432">
+                  <a:tcPr marT="27432" marB="27432">
                     <a:lnL w="6350" cap="flat" cmpd="sng" algn="ctr">
                       <a:solidFill>
                         <a:srgbClr val="C9CEDA"/>
@@ -9752,7 +9580,7 @@
                     <a:bodyPr/>
                     <a:lstStyle/>
                     <a:p>
-                      <a:pPr algn="r" indent="0" marL="0">
+                      <a:pPr marL="0" indent="0" algn="r">
                         <a:buNone/>
                       </a:pPr>
                       <a:r>
@@ -9773,7 +9601,7 @@
                       </a:endParaRPr>
                     </a:p>
                   </a:txBody>
-                  <a:tcPr marL="91440" marR="91440" marT="27432" marB="27432">
+                  <a:tcPr marT="27432" marB="27432">
                     <a:lnL w="6350" cap="flat" cmpd="sng" algn="ctr">
                       <a:solidFill>
                         <a:srgbClr val="C9CEDA"/>
@@ -9820,7 +9648,7 @@
                     <a:bodyPr/>
                     <a:lstStyle/>
                     <a:p>
-                      <a:pPr algn="r" indent="0" marL="0">
+                      <a:pPr marL="0" indent="0" algn="r">
                         <a:buNone/>
                       </a:pPr>
                       <a:r>
@@ -9841,7 +9669,7 @@
                       </a:endParaRPr>
                     </a:p>
                   </a:txBody>
-                  <a:tcPr marL="91440" marR="91440" marT="27432" marB="27432">
+                  <a:tcPr marT="27432" marB="27432">
                     <a:lnL w="6350" cap="flat" cmpd="sng" algn="ctr">
                       <a:solidFill>
                         <a:srgbClr val="C9CEDA"/>
@@ -9883,6 +9711,11 @@
                     </a:solidFill>
                   </a:tcPr>
                 </a:tc>
+                <a:extLst>
+                  <a:ext uri="{0D108BD9-81ED-4DB2-BD59-A6C34878D82A}">
+                    <a16:rowId xmlns:a16="http://schemas.microsoft.com/office/drawing/2014/main" val="10004"/>
+                  </a:ext>
+                </a:extLst>
               </a:tr>
               <a:tr h="329184">
                 <a:tc>
@@ -9890,7 +9723,7 @@
                     <a:bodyPr/>
                     <a:lstStyle/>
                     <a:p>
-                      <a:pPr algn="l" indent="0" marL="0">
+                      <a:pPr marL="0" indent="0" algn="l">
                         <a:buNone/>
                       </a:pPr>
                       <a:r>
@@ -9911,7 +9744,7 @@
                       </a:endParaRPr>
                     </a:p>
                   </a:txBody>
-                  <a:tcPr marL="91440" marR="91440" marT="27432" marB="27432">
+                  <a:tcPr marT="27432" marB="27432">
                     <a:lnL w="6350" cap="flat" cmpd="sng" algn="ctr">
                       <a:solidFill>
                         <a:srgbClr val="C9CEDA"/>
@@ -9958,7 +9791,7 @@
                     <a:bodyPr/>
                     <a:lstStyle/>
                     <a:p>
-                      <a:pPr algn="r" indent="0" marL="0">
+                      <a:pPr marL="0" indent="0" algn="r">
                         <a:buNone/>
                       </a:pPr>
                       <a:r>
@@ -9979,7 +9812,7 @@
                       </a:endParaRPr>
                     </a:p>
                   </a:txBody>
-                  <a:tcPr marL="91440" marR="91440" marT="27432" marB="27432">
+                  <a:tcPr marT="27432" marB="27432">
                     <a:lnL w="6350" cap="flat" cmpd="sng" algn="ctr">
                       <a:solidFill>
                         <a:srgbClr val="C9CEDA"/>
@@ -10026,7 +9859,7 @@
                     <a:bodyPr/>
                     <a:lstStyle/>
                     <a:p>
-                      <a:pPr algn="r" indent="0" marL="0">
+                      <a:pPr marL="0" indent="0" algn="r">
                         <a:buNone/>
                       </a:pPr>
                       <a:r>
@@ -10047,7 +9880,7 @@
                       </a:endParaRPr>
                     </a:p>
                   </a:txBody>
-                  <a:tcPr marL="91440" marR="91440" marT="27432" marB="27432">
+                  <a:tcPr marT="27432" marB="27432">
                     <a:lnL w="6350" cap="flat" cmpd="sng" algn="ctr">
                       <a:solidFill>
                         <a:srgbClr val="C9CEDA"/>
@@ -10094,7 +9927,7 @@
                     <a:bodyPr/>
                     <a:lstStyle/>
                     <a:p>
-                      <a:pPr algn="r" indent="0" marL="0">
+                      <a:pPr marL="0" indent="0" algn="r">
                         <a:buNone/>
                       </a:pPr>
                       <a:r>
@@ -10115,7 +9948,7 @@
                       </a:endParaRPr>
                     </a:p>
                   </a:txBody>
-                  <a:tcPr marL="91440" marR="91440" marT="27432" marB="27432">
+                  <a:tcPr marT="27432" marB="27432">
                     <a:lnL w="6350" cap="flat" cmpd="sng" algn="ctr">
                       <a:solidFill>
                         <a:srgbClr val="C9CEDA"/>
@@ -10157,6 +9990,11 @@
                     </a:solidFill>
                   </a:tcPr>
                 </a:tc>
+                <a:extLst>
+                  <a:ext uri="{0D108BD9-81ED-4DB2-BD59-A6C34878D82A}">
+                    <a16:rowId xmlns:a16="http://schemas.microsoft.com/office/drawing/2014/main" val="10005"/>
+                  </a:ext>
+                </a:extLst>
               </a:tr>
               <a:tr h="329184">
                 <a:tc>
@@ -10164,7 +10002,7 @@
                     <a:bodyPr/>
                     <a:lstStyle/>
                     <a:p>
-                      <a:pPr algn="l" indent="0" marL="0">
+                      <a:pPr marL="0" indent="0" algn="l">
                         <a:buNone/>
                       </a:pPr>
                       <a:r>
@@ -10185,7 +10023,7 @@
                       </a:endParaRPr>
                     </a:p>
                   </a:txBody>
-                  <a:tcPr marL="91440" marR="91440" marT="27432" marB="27432">
+                  <a:tcPr marT="27432" marB="27432">
                     <a:lnL w="6350" cap="flat" cmpd="sng" algn="ctr">
                       <a:solidFill>
                         <a:srgbClr val="C9CEDA"/>
@@ -10232,7 +10070,7 @@
                     <a:bodyPr/>
                     <a:lstStyle/>
                     <a:p>
-                      <a:pPr algn="r" indent="0" marL="0">
+                      <a:pPr marL="0" indent="0" algn="r">
                         <a:buNone/>
                       </a:pPr>
                       <a:r>
@@ -10253,7 +10091,7 @@
                       </a:endParaRPr>
                     </a:p>
                   </a:txBody>
-                  <a:tcPr marL="91440" marR="91440" marT="27432" marB="27432">
+                  <a:tcPr marT="27432" marB="27432">
                     <a:lnL w="6350" cap="flat" cmpd="sng" algn="ctr">
                       <a:solidFill>
                         <a:srgbClr val="C9CEDA"/>
@@ -10300,7 +10138,7 @@
                     <a:bodyPr/>
                     <a:lstStyle/>
                     <a:p>
-                      <a:pPr algn="r" indent="0" marL="0">
+                      <a:pPr marL="0" indent="0" algn="r">
                         <a:buNone/>
                       </a:pPr>
                       <a:r>
@@ -10321,7 +10159,7 @@
                       </a:endParaRPr>
                     </a:p>
                   </a:txBody>
-                  <a:tcPr marL="91440" marR="91440" marT="27432" marB="27432">
+                  <a:tcPr marT="27432" marB="27432">
                     <a:lnL w="6350" cap="flat" cmpd="sng" algn="ctr">
                       <a:solidFill>
                         <a:srgbClr val="C9CEDA"/>
@@ -10368,7 +10206,7 @@
                     <a:bodyPr/>
                     <a:lstStyle/>
                     <a:p>
-                      <a:pPr algn="r" indent="0" marL="0">
+                      <a:pPr marL="0" indent="0" algn="r">
                         <a:buNone/>
                       </a:pPr>
                       <a:r>
@@ -10389,7 +10227,7 @@
                       </a:endParaRPr>
                     </a:p>
                   </a:txBody>
-                  <a:tcPr marL="91440" marR="91440" marT="27432" marB="27432">
+                  <a:tcPr marT="27432" marB="27432">
                     <a:lnL w="6350" cap="flat" cmpd="sng" algn="ctr">
                       <a:solidFill>
                         <a:srgbClr val="C9CEDA"/>
@@ -10431,6 +10269,11 @@
                     </a:solidFill>
                   </a:tcPr>
                 </a:tc>
+                <a:extLst>
+                  <a:ext uri="{0D108BD9-81ED-4DB2-BD59-A6C34878D82A}">
+                    <a16:rowId xmlns:a16="http://schemas.microsoft.com/office/drawing/2014/main" val="10006"/>
+                  </a:ext>
+                </a:extLst>
               </a:tr>
               <a:tr h="329184">
                 <a:tc>
@@ -10438,7 +10281,7 @@
                     <a:bodyPr/>
                     <a:lstStyle/>
                     <a:p>
-                      <a:pPr algn="l" indent="0" marL="0">
+                      <a:pPr marL="0" indent="0" algn="l">
                         <a:buNone/>
                       </a:pPr>
                       <a:r>
@@ -10459,7 +10302,7 @@
                       </a:endParaRPr>
                     </a:p>
                   </a:txBody>
-                  <a:tcPr marL="91440" marR="91440" marT="27432" marB="27432">
+                  <a:tcPr marT="27432" marB="27432">
                     <a:lnL w="6350" cap="flat" cmpd="sng" algn="ctr">
                       <a:solidFill>
                         <a:srgbClr val="C9CEDA"/>
@@ -10506,7 +10349,7 @@
                     <a:bodyPr/>
                     <a:lstStyle/>
                     <a:p>
-                      <a:pPr algn="r" indent="0" marL="0">
+                      <a:pPr marL="0" indent="0" algn="r">
                         <a:buNone/>
                       </a:pPr>
                       <a:r>
@@ -10527,7 +10370,7 @@
                       </a:endParaRPr>
                     </a:p>
                   </a:txBody>
-                  <a:tcPr marL="91440" marR="91440" marT="27432" marB="27432">
+                  <a:tcPr marT="27432" marB="27432">
                     <a:lnL w="6350" cap="flat" cmpd="sng" algn="ctr">
                       <a:solidFill>
                         <a:srgbClr val="C9CEDA"/>
@@ -10574,7 +10417,7 @@
                     <a:bodyPr/>
                     <a:lstStyle/>
                     <a:p>
-                      <a:pPr algn="r" indent="0" marL="0">
+                      <a:pPr marL="0" indent="0" algn="r">
                         <a:buNone/>
                       </a:pPr>
                       <a:r>
@@ -10595,7 +10438,7 @@
                       </a:endParaRPr>
                     </a:p>
                   </a:txBody>
-                  <a:tcPr marL="91440" marR="91440" marT="27432" marB="27432">
+                  <a:tcPr marT="27432" marB="27432">
                     <a:lnL w="6350" cap="flat" cmpd="sng" algn="ctr">
                       <a:solidFill>
                         <a:srgbClr val="C9CEDA"/>
@@ -10642,7 +10485,7 @@
                     <a:bodyPr/>
                     <a:lstStyle/>
                     <a:p>
-                      <a:pPr algn="r" indent="0" marL="0">
+                      <a:pPr marL="0" indent="0" algn="r">
                         <a:buNone/>
                       </a:pPr>
                       <a:r>
@@ -10663,7 +10506,7 @@
                       </a:endParaRPr>
                     </a:p>
                   </a:txBody>
-                  <a:tcPr marL="91440" marR="91440" marT="27432" marB="27432">
+                  <a:tcPr marT="27432" marB="27432">
                     <a:lnL w="6350" cap="flat" cmpd="sng" algn="ctr">
                       <a:solidFill>
                         <a:srgbClr val="C9CEDA"/>
@@ -10705,6 +10548,11 @@
                     </a:solidFill>
                   </a:tcPr>
                 </a:tc>
+                <a:extLst>
+                  <a:ext uri="{0D108BD9-81ED-4DB2-BD59-A6C34878D82A}">
+                    <a16:rowId xmlns:a16="http://schemas.microsoft.com/office/drawing/2014/main" val="10007"/>
+                  </a:ext>
+                </a:extLst>
               </a:tr>
               <a:tr h="329184">
                 <a:tc>
@@ -10712,7 +10560,7 @@
                     <a:bodyPr/>
                     <a:lstStyle/>
                     <a:p>
-                      <a:pPr algn="l" indent="0" marL="0">
+                      <a:pPr marL="0" indent="0" algn="l">
                         <a:buNone/>
                       </a:pPr>
                       <a:r>
@@ -10733,7 +10581,7 @@
                       </a:endParaRPr>
                     </a:p>
                   </a:txBody>
-                  <a:tcPr marL="91440" marR="91440" marT="27432" marB="27432">
+                  <a:tcPr marT="27432" marB="27432">
                     <a:lnL w="6350" cap="flat" cmpd="sng" algn="ctr">
                       <a:solidFill>
                         <a:srgbClr val="C9CEDA"/>
@@ -10780,7 +10628,7 @@
                     <a:bodyPr/>
                     <a:lstStyle/>
                     <a:p>
-                      <a:pPr algn="r" indent="0" marL="0">
+                      <a:pPr marL="0" indent="0" algn="r">
                         <a:buNone/>
                       </a:pPr>
                       <a:r>
@@ -10801,7 +10649,7 @@
                       </a:endParaRPr>
                     </a:p>
                   </a:txBody>
-                  <a:tcPr marL="91440" marR="91440" marT="27432" marB="27432">
+                  <a:tcPr marT="27432" marB="27432">
                     <a:lnL w="6350" cap="flat" cmpd="sng" algn="ctr">
                       <a:solidFill>
                         <a:srgbClr val="C9CEDA"/>
@@ -10848,7 +10696,7 @@
                     <a:bodyPr/>
                     <a:lstStyle/>
                     <a:p>
-                      <a:pPr algn="r" indent="0" marL="0">
+                      <a:pPr marL="0" indent="0" algn="r">
                         <a:buNone/>
                       </a:pPr>
                       <a:r>
@@ -10869,7 +10717,7 @@
                       </a:endParaRPr>
                     </a:p>
                   </a:txBody>
-                  <a:tcPr marL="91440" marR="91440" marT="27432" marB="27432">
+                  <a:tcPr marT="27432" marB="27432">
                     <a:lnL w="6350" cap="flat" cmpd="sng" algn="ctr">
                       <a:solidFill>
                         <a:srgbClr val="C9CEDA"/>
@@ -10916,7 +10764,7 @@
                     <a:bodyPr/>
                     <a:lstStyle/>
                     <a:p>
-                      <a:pPr algn="r" indent="0" marL="0">
+                      <a:pPr marL="0" indent="0" algn="r">
                         <a:buNone/>
                       </a:pPr>
                       <a:r>
@@ -10937,7 +10785,7 @@
                       </a:endParaRPr>
                     </a:p>
                   </a:txBody>
-                  <a:tcPr marL="91440" marR="91440" marT="27432" marB="27432">
+                  <a:tcPr marT="27432" marB="27432">
                     <a:lnL w="6350" cap="flat" cmpd="sng" algn="ctr">
                       <a:solidFill>
                         <a:srgbClr val="C9CEDA"/>
@@ -10979,6 +10827,11 @@
                     </a:solidFill>
                   </a:tcPr>
                 </a:tc>
+                <a:extLst>
+                  <a:ext uri="{0D108BD9-81ED-4DB2-BD59-A6C34878D82A}">
+                    <a16:rowId xmlns:a16="http://schemas.microsoft.com/office/drawing/2014/main" val="10008"/>
+                  </a:ext>
+                </a:extLst>
               </a:tr>
               <a:tr h="329184">
                 <a:tc>
@@ -10986,7 +10839,7 @@
                     <a:bodyPr/>
                     <a:lstStyle/>
                     <a:p>
-                      <a:pPr algn="l" indent="0" marL="0">
+                      <a:pPr marL="0" indent="0" algn="l">
                         <a:buNone/>
                       </a:pPr>
                       <a:r>
@@ -11007,7 +10860,7 @@
                       </a:endParaRPr>
                     </a:p>
                   </a:txBody>
-                  <a:tcPr marL="91440" marR="91440" marT="27432" marB="27432">
+                  <a:tcPr marT="27432" marB="27432">
                     <a:lnL w="6350" cap="flat" cmpd="sng" algn="ctr">
                       <a:solidFill>
                         <a:srgbClr val="C9CEDA"/>
@@ -11054,7 +10907,7 @@
                     <a:bodyPr/>
                     <a:lstStyle/>
                     <a:p>
-                      <a:pPr algn="r" indent="0" marL="0">
+                      <a:pPr marL="0" indent="0" algn="r">
                         <a:buNone/>
                       </a:pPr>
                       <a:r>
@@ -11075,7 +10928,7 @@
                       </a:endParaRPr>
                     </a:p>
                   </a:txBody>
-                  <a:tcPr marL="91440" marR="91440" marT="27432" marB="27432">
+                  <a:tcPr marT="27432" marB="27432">
                     <a:lnL w="6350" cap="flat" cmpd="sng" algn="ctr">
                       <a:solidFill>
                         <a:srgbClr val="C9CEDA"/>
@@ -11122,7 +10975,7 @@
                     <a:bodyPr/>
                     <a:lstStyle/>
                     <a:p>
-                      <a:pPr algn="r" indent="0" marL="0">
+                      <a:pPr marL="0" indent="0" algn="r">
                         <a:buNone/>
                       </a:pPr>
                       <a:r>
@@ -11143,7 +10996,7 @@
                       </a:endParaRPr>
                     </a:p>
                   </a:txBody>
-                  <a:tcPr marL="91440" marR="91440" marT="27432" marB="27432">
+                  <a:tcPr marT="27432" marB="27432">
                     <a:lnL w="6350" cap="flat" cmpd="sng" algn="ctr">
                       <a:solidFill>
                         <a:srgbClr val="C9CEDA"/>
@@ -11190,7 +11043,7 @@
                     <a:bodyPr/>
                     <a:lstStyle/>
                     <a:p>
-                      <a:pPr algn="r" indent="0" marL="0">
+                      <a:pPr marL="0" indent="0" algn="r">
                         <a:buNone/>
                       </a:pPr>
                       <a:r>
@@ -11211,7 +11064,7 @@
                       </a:endParaRPr>
                     </a:p>
                   </a:txBody>
-                  <a:tcPr marL="91440" marR="91440" marT="27432" marB="27432">
+                  <a:tcPr marT="27432" marB="27432">
                     <a:lnL w="6350" cap="flat" cmpd="sng" algn="ctr">
                       <a:solidFill>
                         <a:srgbClr val="C9CEDA"/>
@@ -11253,6 +11106,11 @@
                     </a:solidFill>
                   </a:tcPr>
                 </a:tc>
+                <a:extLst>
+                  <a:ext uri="{0D108BD9-81ED-4DB2-BD59-A6C34878D82A}">
+                    <a16:rowId xmlns:a16="http://schemas.microsoft.com/office/drawing/2014/main" val="10009"/>
+                  </a:ext>
+                </a:extLst>
               </a:tr>
               <a:tr h="329184">
                 <a:tc>
@@ -11260,7 +11118,7 @@
                     <a:bodyPr/>
                     <a:lstStyle/>
                     <a:p>
-                      <a:pPr algn="l" indent="0" marL="0">
+                      <a:pPr marL="0" indent="0" algn="l">
                         <a:buNone/>
                       </a:pPr>
                       <a:r>
@@ -11281,7 +11139,7 @@
                       </a:endParaRPr>
                     </a:p>
                   </a:txBody>
-                  <a:tcPr marL="91440" marR="91440" marT="27432" marB="27432">
+                  <a:tcPr marT="27432" marB="27432">
                     <a:lnL w="6350" cap="flat" cmpd="sng" algn="ctr">
                       <a:solidFill>
                         <a:srgbClr val="C9CEDA"/>
@@ -11328,7 +11186,7 @@
                     <a:bodyPr/>
                     <a:lstStyle/>
                     <a:p>
-                      <a:pPr algn="r" indent="0" marL="0">
+                      <a:pPr marL="0" indent="0" algn="r">
                         <a:buNone/>
                       </a:pPr>
                       <a:r>
@@ -11349,7 +11207,7 @@
                       </a:endParaRPr>
                     </a:p>
                   </a:txBody>
-                  <a:tcPr marL="91440" marR="91440" marT="27432" marB="27432">
+                  <a:tcPr marT="27432" marB="27432">
                     <a:lnL w="6350" cap="flat" cmpd="sng" algn="ctr">
                       <a:solidFill>
                         <a:srgbClr val="C9CEDA"/>
@@ -11396,7 +11254,7 @@
                     <a:bodyPr/>
                     <a:lstStyle/>
                     <a:p>
-                      <a:pPr algn="r" indent="0" marL="0">
+                      <a:pPr marL="0" indent="0" algn="r">
                         <a:buNone/>
                       </a:pPr>
                       <a:r>
@@ -11417,7 +11275,7 @@
                       </a:endParaRPr>
                     </a:p>
                   </a:txBody>
-                  <a:tcPr marL="91440" marR="91440" marT="27432" marB="27432">
+                  <a:tcPr marT="27432" marB="27432">
                     <a:lnL w="6350" cap="flat" cmpd="sng" algn="ctr">
                       <a:solidFill>
                         <a:srgbClr val="C9CEDA"/>
@@ -11464,7 +11322,7 @@
                     <a:bodyPr/>
                     <a:lstStyle/>
                     <a:p>
-                      <a:pPr algn="r" indent="0" marL="0">
+                      <a:pPr marL="0" indent="0" algn="r">
                         <a:buNone/>
                       </a:pPr>
                       <a:r>
@@ -11485,7 +11343,7 @@
                       </a:endParaRPr>
                     </a:p>
                   </a:txBody>
-                  <a:tcPr marL="91440" marR="91440" marT="27432" marB="27432">
+                  <a:tcPr marT="27432" marB="27432">
                     <a:lnL w="6350" cap="flat" cmpd="sng" algn="ctr">
                       <a:solidFill>
                         <a:srgbClr val="C9CEDA"/>
@@ -11527,6 +11385,11 @@
                     </a:solidFill>
                   </a:tcPr>
                 </a:tc>
+                <a:extLst>
+                  <a:ext uri="{0D108BD9-81ED-4DB2-BD59-A6C34878D82A}">
+                    <a16:rowId xmlns:a16="http://schemas.microsoft.com/office/drawing/2014/main" val="10010"/>
+                  </a:ext>
+                </a:extLst>
               </a:tr>
               <a:tr h="329184">
                 <a:tc>
@@ -11534,7 +11397,7 @@
                     <a:bodyPr/>
                     <a:lstStyle/>
                     <a:p>
-                      <a:pPr algn="l" indent="0" marL="0">
+                      <a:pPr marL="0" indent="0" algn="l">
                         <a:buNone/>
                       </a:pPr>
                       <a:r>
@@ -11555,7 +11418,7 @@
                       </a:endParaRPr>
                     </a:p>
                   </a:txBody>
-                  <a:tcPr marL="91440" marR="91440" marT="27432" marB="27432">
+                  <a:tcPr marT="27432" marB="27432">
                     <a:lnL w="6350" cap="flat" cmpd="sng" algn="ctr">
                       <a:solidFill>
                         <a:srgbClr val="C9CEDA"/>
@@ -11602,7 +11465,7 @@
                     <a:bodyPr/>
                     <a:lstStyle/>
                     <a:p>
-                      <a:pPr algn="r" indent="0" marL="0">
+                      <a:pPr marL="0" indent="0" algn="r">
                         <a:buNone/>
                       </a:pPr>
                       <a:r>
@@ -11623,7 +11486,7 @@
                       </a:endParaRPr>
                     </a:p>
                   </a:txBody>
-                  <a:tcPr marL="91440" marR="91440" marT="27432" marB="27432">
+                  <a:tcPr marT="27432" marB="27432">
                     <a:lnL w="6350" cap="flat" cmpd="sng" algn="ctr">
                       <a:solidFill>
                         <a:srgbClr val="C9CEDA"/>
@@ -11670,7 +11533,7 @@
                     <a:bodyPr/>
                     <a:lstStyle/>
                     <a:p>
-                      <a:pPr algn="r" indent="0" marL="0">
+                      <a:pPr marL="0" indent="0" algn="r">
                         <a:buNone/>
                       </a:pPr>
                       <a:r>
@@ -11691,7 +11554,7 @@
                       </a:endParaRPr>
                     </a:p>
                   </a:txBody>
-                  <a:tcPr marL="91440" marR="91440" marT="27432" marB="27432">
+                  <a:tcPr marT="27432" marB="27432">
                     <a:lnL w="6350" cap="flat" cmpd="sng" algn="ctr">
                       <a:solidFill>
                         <a:srgbClr val="C9CEDA"/>
@@ -11738,7 +11601,7 @@
                     <a:bodyPr/>
                     <a:lstStyle/>
                     <a:p>
-                      <a:pPr algn="r" indent="0" marL="0">
+                      <a:pPr marL="0" indent="0" algn="r">
                         <a:buNone/>
                       </a:pPr>
                       <a:r>
@@ -11759,7 +11622,7 @@
                       </a:endParaRPr>
                     </a:p>
                   </a:txBody>
-                  <a:tcPr marL="91440" marR="91440" marT="27432" marB="27432">
+                  <a:tcPr marT="27432" marB="27432">
                     <a:lnL w="6350" cap="flat" cmpd="sng" algn="ctr">
                       <a:solidFill>
                         <a:srgbClr val="C9CEDA"/>
@@ -11801,6 +11664,11 @@
                     </a:solidFill>
                   </a:tcPr>
                 </a:tc>
+                <a:extLst>
+                  <a:ext uri="{0D108BD9-81ED-4DB2-BD59-A6C34878D82A}">
+                    <a16:rowId xmlns:a16="http://schemas.microsoft.com/office/drawing/2014/main" val="10011"/>
+                  </a:ext>
+                </a:extLst>
               </a:tr>
             </a:tbl>
           </a:graphicData>
@@ -11833,7 +11701,7 @@
       </p:sp>
       <p:sp>
         <p:nvSpPr>
-          <p:cNvPr id="5" name="Text 2"/>
+          <p:cNvPr id="3" name="Text 2"/>
           <p:cNvSpPr txBox="1"/>
           <p:nvPr/>
         </p:nvSpPr>
@@ -11852,7 +11720,7 @@
           <a:bodyPr wrap="square" lIns="0" tIns="0" rIns="0" bIns="0" rtlCol="0" anchor="ctr"/>
           <a:lstStyle/>
           <a:p>
-            <a:pPr algn="ctr" indent="0" marL="0">
+            <a:pPr marL="0" indent="0" algn="ctr">
               <a:buNone/>
             </a:pPr>
             <a:r>
@@ -11888,7 +11756,7 @@
           <a:bodyPr wrap="square" lIns="0" tIns="0" rIns="0" bIns="0" rtlCol="0" anchor="t"/>
           <a:lstStyle/>
           <a:p>
-            <a:pPr indent="0" marL="0">
+            <a:pPr marL="0" indent="0">
               <a:buNone/>
             </a:pPr>
             <a:r>
@@ -11924,7 +11792,7 @@
           <a:bodyPr wrap="square" lIns="0" tIns="0" rIns="0" bIns="0" rtlCol="0" anchor="t"/>
           <a:lstStyle/>
           <a:p>
-            <a:pPr indent="0" marL="0">
+            <a:pPr marL="0" indent="0">
               <a:buNone/>
             </a:pPr>
             <a:r>
@@ -11985,7 +11853,7 @@
           <a:bodyPr wrap="square" lIns="0" tIns="0" rIns="0" bIns="0" rtlCol="0" anchor="ctr"/>
           <a:lstStyle/>
           <a:p>
-            <a:pPr algn="ctr" indent="0" marL="0">
+            <a:pPr marL="0" indent="0" algn="ctr">
               <a:buNone/>
             </a:pPr>
             <a:r>
@@ -12021,7 +11889,7 @@
           <a:bodyPr wrap="square" lIns="0" tIns="0" rIns="0" bIns="0" rtlCol="0" anchor="t"/>
           <a:lstStyle/>
           <a:p>
-            <a:pPr indent="0" marL="0">
+            <a:pPr marL="0" indent="0">
               <a:buNone/>
             </a:pPr>
             <a:r>
@@ -12057,7 +11925,7 @@
           <a:bodyPr wrap="square" lIns="0" tIns="0" rIns="0" bIns="0" rtlCol="0" anchor="t"/>
           <a:lstStyle/>
           <a:p>
-            <a:pPr indent="0" marL="0">
+            <a:pPr marL="0" indent="0">
               <a:buNone/>
             </a:pPr>
             <a:r>
@@ -12118,7 +11986,7 @@
           <a:bodyPr wrap="square" lIns="0" tIns="0" rIns="0" bIns="0" rtlCol="0" anchor="ctr"/>
           <a:lstStyle/>
           <a:p>
-            <a:pPr algn="ctr" indent="0" marL="0">
+            <a:pPr marL="0" indent="0" algn="ctr">
               <a:buNone/>
             </a:pPr>
             <a:r>
@@ -12154,7 +12022,7 @@
           <a:bodyPr wrap="square" lIns="0" tIns="0" rIns="0" bIns="0" rtlCol="0" anchor="t"/>
           <a:lstStyle/>
           <a:p>
-            <a:pPr indent="0" marL="0">
+            <a:pPr marL="0" indent="0">
               <a:buNone/>
             </a:pPr>
             <a:r>
@@ -12190,7 +12058,7 @@
           <a:bodyPr wrap="square" lIns="0" tIns="0" rIns="0" bIns="0" rtlCol="0" anchor="t"/>
           <a:lstStyle/>
           <a:p>
-            <a:pPr indent="0" marL="0">
+            <a:pPr marL="0" indent="0">
               <a:buNone/>
             </a:pPr>
             <a:r>
@@ -12251,7 +12119,7 @@
           <a:bodyPr wrap="square" lIns="0" tIns="0" rIns="0" bIns="0" rtlCol="0" anchor="ctr"/>
           <a:lstStyle/>
           <a:p>
-            <a:pPr algn="ctr" indent="0" marL="0">
+            <a:pPr marL="0" indent="0" algn="ctr">
               <a:buNone/>
             </a:pPr>
             <a:r>
@@ -12287,7 +12155,7 @@
           <a:bodyPr wrap="square" lIns="0" tIns="0" rIns="0" bIns="0" rtlCol="0" anchor="t"/>
           <a:lstStyle/>
           <a:p>
-            <a:pPr indent="0" marL="0">
+            <a:pPr marL="0" indent="0">
               <a:buNone/>
             </a:pPr>
             <a:r>
@@ -12323,7 +12191,7 @@
           <a:bodyPr wrap="square" lIns="0" tIns="0" rIns="0" bIns="0" rtlCol="0" anchor="t"/>
           <a:lstStyle/>
           <a:p>
-            <a:pPr indent="0" marL="0">
+            <a:pPr marL="0" indent="0">
               <a:buNone/>
             </a:pPr>
             <a:r>
@@ -12358,7 +12226,7 @@
           </a:prstGeom>
           <a:extLst>
             <a:ext uri="{C572A759-6A51-4108-AA02-DFA0A04FC94B}">
-              <ma14:wrappingTextBoxFlag xmlns:ma14="http://schemas.microsoft.com/office/mac/drawingml/2011/main" val="0"/>
+              <ma14:wrappingTextBoxFlag xmlns:ma14="http://schemas.microsoft.com/office/mac/drawingml/2011/main" xmlns="" val="0"/>
             </a:ext>
           </a:extLst>
         </p:spPr>
@@ -12376,7 +12244,7 @@
           <a:p>
             <a:pPr algn="r"/>
             <a:fld id="{F7021451-1387-4CA6-816F-3879F97B5CBC}" type="slidenum">
-              <a:rPr b="0" lang="en-US"/>
+              <a:rPr lang="en-US" b="0"/>
               <a:t>4</a:t>
             </a:fld>
             <a:endParaRPr lang="en-US"/>
@@ -12411,9 +12279,11 @@
       <p:sp>
         <p:nvSpPr>
           <p:cNvPr id="2" name="Text 1"/>
-          <p:cNvSpPr/>
+          <p:cNvSpPr>
+            <a:spLocks noGrp="1"/>
+          </p:cNvSpPr>
           <p:nvPr>
-            <p:ph idx="101" type="title" hasCustomPrompt="1"/>
+            <p:ph type="title" idx="101" hasCustomPrompt="1"/>
           </p:nvPr>
         </p:nvSpPr>
         <p:spPr>
@@ -12431,7 +12301,7 @@
           <a:bodyPr wrap="square" lIns="0" tIns="0" rIns="0" bIns="0" rtlCol="0" anchor="ctr"/>
           <a:lstStyle/>
           <a:p>
-            <a:pPr algn="l" indent="0" marL="0">
+            <a:pPr marL="0" indent="0" algn="l">
               <a:buNone/>
             </a:pPr>
             <a:r>
@@ -12448,7 +12318,7 @@
       </p:sp>
       <p:graphicFrame>
         <p:nvGraphicFramePr>
-          <p:cNvPr id="3" name="chunking-chart" descr=""/>
+          <p:cNvPr id="3" name="chunking-chart"/>
           <p:cNvGraphicFramePr/>
           <p:nvPr/>
         </p:nvGraphicFramePr>
@@ -12456,9 +12326,9 @@
           <a:off x="548640" y="1234440"/>
           <a:ext cx="6766560" cy="5029200"/>
         </p:xfrm>
-        <a:graphic xmlns:a="http://schemas.openxmlformats.org/drawingml/2006/main">
+        <a:graphic>
           <a:graphicData uri="http://schemas.openxmlformats.org/drawingml/2006/chart">
-            <c:chart xmlns:c="http://schemas.openxmlformats.org/drawingml/2006/chart" r:id="rId1"/>
+            <c:chart xmlns:c="http://schemas.openxmlformats.org/drawingml/2006/chart" xmlns:r="http://schemas.openxmlformats.org/officeDocument/2006/relationships" r:id="rId3"/>
           </a:graphicData>
         </a:graphic>
       </p:graphicFrame>
@@ -12510,7 +12380,7 @@
           <a:bodyPr wrap="square" lIns="0" tIns="0" rIns="0" bIns="0" rtlCol="0" anchor="t"/>
           <a:lstStyle/>
           <a:p>
-            <a:pPr indent="0" marL="0">
+            <a:pPr marL="0" indent="0">
               <a:buNone/>
             </a:pPr>
             <a:r>
@@ -12549,7 +12419,7 @@
           <a:bodyPr wrap="square" lIns="0" tIns="0" rIns="0" bIns="0" rtlCol="0" anchor="t"/>
           <a:lstStyle/>
           <a:p>
-            <a:pPr indent="0" marL="0">
+            <a:pPr marL="0" indent="0">
               <a:buNone/>
             </a:pPr>
             <a:r>
@@ -12585,7 +12455,7 @@
           <a:bodyPr wrap="square" lIns="0" tIns="0" rIns="0" bIns="0" rtlCol="0" anchor="t"/>
           <a:lstStyle/>
           <a:p>
-            <a:pPr indent="0" marL="0">
+            <a:pPr marL="0" indent="0">
               <a:spcAft>
                 <a:spcPts val="400"/>
               </a:spcAft>
@@ -12602,7 +12472,7 @@
             <a:endParaRPr lang="en-US" sz="1400" dirty="0"/>
           </a:p>
           <a:p>
-            <a:pPr indent="0" marL="0">
+            <a:pPr marL="0" indent="0">
               <a:spcAft>
                 <a:spcPts val="400"/>
               </a:spcAft>
@@ -12619,7 +12489,7 @@
             <a:endParaRPr lang="en-US" sz="1400" dirty="0"/>
           </a:p>
           <a:p>
-            <a:pPr indent="0" marL="0">
+            <a:pPr marL="0" indent="0">
               <a:spcAft>
                 <a:spcPts val="400"/>
               </a:spcAft>
@@ -12636,7 +12506,7 @@
             <a:endParaRPr lang="en-US" sz="1400" dirty="0"/>
           </a:p>
           <a:p>
-            <a:pPr indent="0" marL="0">
+            <a:pPr marL="0" indent="0">
               <a:spcAft>
                 <a:spcPts val="400"/>
               </a:spcAft>
@@ -12650,12 +12520,6 @@
               </a:rPr>
               <a:t>Why not the top MRR? </a:t>
             </a:r>
-            <a:pPr indent="0" marL="0">
-              <a:spcAft>
-                <a:spcPts val="400"/>
-              </a:spcAft>
-              <a:buNone/>
-            </a:pPr>
             <a:r>
               <a:rPr lang="en-US" sz="1400" dirty="0">
                 <a:solidFill>
@@ -12688,7 +12552,7 @@
           </a:prstGeom>
           <a:extLst>
             <a:ext uri="{C572A759-6A51-4108-AA02-DFA0A04FC94B}">
-              <ma14:wrappingTextBoxFlag xmlns:ma14="http://schemas.microsoft.com/office/mac/drawingml/2011/main" val="0"/>
+              <ma14:wrappingTextBoxFlag xmlns:ma14="http://schemas.microsoft.com/office/mac/drawingml/2011/main" xmlns="" val="0"/>
             </a:ext>
           </a:extLst>
         </p:spPr>
@@ -12706,7 +12570,7 @@
           <a:p>
             <a:pPr algn="r"/>
             <a:fld id="{F7021451-1387-4CA6-816F-3879F97B5CBC}" type="slidenum">
-              <a:rPr b="0" lang="en-US"/>
+              <a:rPr lang="en-US" b="0"/>
               <a:t>5</a:t>
             </a:fld>
             <a:endParaRPr lang="en-US"/>
@@ -12741,9 +12605,11 @@
       <p:sp>
         <p:nvSpPr>
           <p:cNvPr id="2" name="Text 1"/>
-          <p:cNvSpPr/>
+          <p:cNvSpPr>
+            <a:spLocks noGrp="1"/>
+          </p:cNvSpPr>
           <p:nvPr>
-            <p:ph idx="101" type="title" hasCustomPrompt="1"/>
+            <p:ph type="title" idx="101" hasCustomPrompt="1"/>
           </p:nvPr>
         </p:nvSpPr>
         <p:spPr>
@@ -12761,7 +12627,7 @@
           <a:bodyPr wrap="square" lIns="0" tIns="0" rIns="0" bIns="0" rtlCol="0" anchor="ctr"/>
           <a:lstStyle/>
           <a:p>
-            <a:pPr algn="l" indent="0" marL="0">
+            <a:pPr marL="0" indent="0" algn="l">
               <a:buNone/>
             </a:pPr>
             <a:r>
@@ -12799,10 +12665,34 @@
             <a:tbl>
               <a:tblPr/>
               <a:tblGrid>
-                <a:gridCol w="3566160"/>
-                <a:gridCol w="2331720"/>
-                <a:gridCol w="2606040"/>
-                <a:gridCol w="2587752"/>
+                <a:gridCol w="3566160">
+                  <a:extLst>
+                    <a:ext uri="{9D8B030D-6E8A-4147-A177-3AD203B41FA5}">
+                      <a16:colId xmlns:a16="http://schemas.microsoft.com/office/drawing/2014/main" val="20000"/>
+                    </a:ext>
+                  </a:extLst>
+                </a:gridCol>
+                <a:gridCol w="2331720">
+                  <a:extLst>
+                    <a:ext uri="{9D8B030D-6E8A-4147-A177-3AD203B41FA5}">
+                      <a16:colId xmlns:a16="http://schemas.microsoft.com/office/drawing/2014/main" val="20001"/>
+                    </a:ext>
+                  </a:extLst>
+                </a:gridCol>
+                <a:gridCol w="2606040">
+                  <a:extLst>
+                    <a:ext uri="{9D8B030D-6E8A-4147-A177-3AD203B41FA5}">
+                      <a16:colId xmlns:a16="http://schemas.microsoft.com/office/drawing/2014/main" val="20002"/>
+                    </a:ext>
+                  </a:extLst>
+                </a:gridCol>
+                <a:gridCol w="2587752">
+                  <a:extLst>
+                    <a:ext uri="{9D8B030D-6E8A-4147-A177-3AD203B41FA5}">
+                      <a16:colId xmlns:a16="http://schemas.microsoft.com/office/drawing/2014/main" val="20003"/>
+                    </a:ext>
+                  </a:extLst>
+                </a:gridCol>
               </a:tblGrid>
               <a:tr h="475488">
                 <a:tc>
@@ -12810,7 +12700,7 @@
                     <a:bodyPr/>
                     <a:lstStyle/>
                     <a:p>
-                      <a:pPr algn="l" indent="0" marL="0">
+                      <a:pPr marL="0" indent="0" algn="l">
                         <a:buNone/>
                       </a:pPr>
                       <a:r>
@@ -12831,7 +12721,7 @@
                       </a:endParaRPr>
                     </a:p>
                   </a:txBody>
-                  <a:tcPr marL="109728" marR="109728" marT="45720" marB="45720">
+                  <a:tcPr marL="109728" marR="109728">
                     <a:lnL w="6350" cap="flat" cmpd="sng" algn="ctr">
                       <a:solidFill>
                         <a:srgbClr val="C9CEDA"/>
@@ -12878,7 +12768,7 @@
                     <a:bodyPr/>
                     <a:lstStyle/>
                     <a:p>
-                      <a:pPr algn="ctr" indent="0" marL="0">
+                      <a:pPr marL="0" indent="0" algn="ctr">
                         <a:buNone/>
                       </a:pPr>
                       <a:r>
@@ -12899,7 +12789,7 @@
                       </a:endParaRPr>
                     </a:p>
                   </a:txBody>
-                  <a:tcPr marL="109728" marR="109728" marT="45720" marB="45720">
+                  <a:tcPr marL="109728" marR="109728">
                     <a:lnL w="6350" cap="flat" cmpd="sng" algn="ctr">
                       <a:solidFill>
                         <a:srgbClr val="C9CEDA"/>
@@ -12946,7 +12836,7 @@
                     <a:bodyPr/>
                     <a:lstStyle/>
                     <a:p>
-                      <a:pPr algn="ctr" indent="0" marL="0">
+                      <a:pPr marL="0" indent="0" algn="ctr">
                         <a:buNone/>
                       </a:pPr>
                       <a:r>
@@ -12967,7 +12857,7 @@
                       </a:endParaRPr>
                     </a:p>
                   </a:txBody>
-                  <a:tcPr marL="109728" marR="109728" marT="45720" marB="45720">
+                  <a:tcPr marL="109728" marR="109728">
                     <a:lnL w="6350" cap="flat" cmpd="sng" algn="ctr">
                       <a:solidFill>
                         <a:srgbClr val="C9CEDA"/>
@@ -13014,7 +12904,7 @@
                     <a:bodyPr/>
                     <a:lstStyle/>
                     <a:p>
-                      <a:pPr algn="l" indent="0" marL="0">
+                      <a:pPr marL="0" indent="0" algn="l">
                         <a:buNone/>
                       </a:pPr>
                       <a:r>
@@ -13035,7 +12925,7 @@
                       </a:endParaRPr>
                     </a:p>
                   </a:txBody>
-                  <a:tcPr marL="109728" marR="109728" marT="45720" marB="45720">
+                  <a:tcPr marL="109728" marR="109728">
                     <a:lnL w="6350" cap="flat" cmpd="sng" algn="ctr">
                       <a:solidFill>
                         <a:srgbClr val="C9CEDA"/>
@@ -13077,6 +12967,11 @@
                     </a:solidFill>
                   </a:tcPr>
                 </a:tc>
+                <a:extLst>
+                  <a:ext uri="{0D108BD9-81ED-4DB2-BD59-A6C34878D82A}">
+                    <a16:rowId xmlns:a16="http://schemas.microsoft.com/office/drawing/2014/main" val="10000"/>
+                  </a:ext>
+                </a:extLst>
               </a:tr>
               <a:tr h="475488">
                 <a:tc>
@@ -13084,7 +12979,7 @@
                     <a:bodyPr/>
                     <a:lstStyle/>
                     <a:p>
-                      <a:pPr indent="0" marL="0">
+                      <a:pPr marL="0" indent="0">
                         <a:buNone/>
                       </a:pPr>
                       <a:r>
@@ -13105,7 +13000,7 @@
                       </a:endParaRPr>
                     </a:p>
                   </a:txBody>
-                  <a:tcPr marL="109728" marR="109728" marT="45720" marB="45720">
+                  <a:tcPr marL="109728" marR="109728">
                     <a:lnL w="6350" cap="flat" cmpd="sng" algn="ctr">
                       <a:solidFill>
                         <a:srgbClr val="C9CEDA"/>
@@ -13149,7 +13044,7 @@
                     <a:bodyPr/>
                     <a:lstStyle/>
                     <a:p>
-                      <a:pPr algn="ctr" indent="0" marL="0">
+                      <a:pPr marL="0" indent="0" algn="ctr">
                         <a:buNone/>
                       </a:pPr>
                       <a:r>
@@ -13170,7 +13065,7 @@
                       </a:endParaRPr>
                     </a:p>
                   </a:txBody>
-                  <a:tcPr marL="109728" marR="109728" marT="45720" marB="45720">
+                  <a:tcPr marL="109728" marR="109728">
                     <a:lnL w="6350" cap="flat" cmpd="sng" algn="ctr">
                       <a:solidFill>
                         <a:srgbClr val="C9CEDA"/>
@@ -13214,7 +13109,7 @@
                     <a:bodyPr/>
                     <a:lstStyle/>
                     <a:p>
-                      <a:pPr algn="ctr" indent="0" marL="0">
+                      <a:pPr marL="0" indent="0" algn="ctr">
                         <a:buNone/>
                       </a:pPr>
                       <a:r>
@@ -13235,7 +13130,7 @@
                       </a:endParaRPr>
                     </a:p>
                   </a:txBody>
-                  <a:tcPr marL="109728" marR="109728" marT="45720" marB="45720">
+                  <a:tcPr marL="109728" marR="109728">
                     <a:lnL w="6350" cap="flat" cmpd="sng" algn="ctr">
                       <a:solidFill>
                         <a:srgbClr val="C9CEDA"/>
@@ -13279,7 +13174,7 @@
                     <a:bodyPr/>
                     <a:lstStyle/>
                     <a:p>
-                      <a:pPr indent="0" marL="0">
+                      <a:pPr marL="0" indent="0">
                         <a:buNone/>
                       </a:pPr>
                       <a:r>
@@ -13300,7 +13195,7 @@
                       </a:endParaRPr>
                     </a:p>
                   </a:txBody>
-                  <a:tcPr marL="109728" marR="109728" marT="45720" marB="45720">
+                  <a:tcPr marL="109728" marR="109728">
                     <a:lnL w="6350" cap="flat" cmpd="sng" algn="ctr">
                       <a:solidFill>
                         <a:srgbClr val="C9CEDA"/>
@@ -13339,6 +13234,11 @@
                     </a:lnB>
                   </a:tcPr>
                 </a:tc>
+                <a:extLst>
+                  <a:ext uri="{0D108BD9-81ED-4DB2-BD59-A6C34878D82A}">
+                    <a16:rowId xmlns:a16="http://schemas.microsoft.com/office/drawing/2014/main" val="10001"/>
+                  </a:ext>
+                </a:extLst>
               </a:tr>
               <a:tr h="475488">
                 <a:tc>
@@ -13346,7 +13246,7 @@
                     <a:bodyPr/>
                     <a:lstStyle/>
                     <a:p>
-                      <a:pPr indent="0" marL="0">
+                      <a:pPr marL="0" indent="0">
                         <a:buNone/>
                       </a:pPr>
                       <a:r>
@@ -13367,7 +13267,7 @@
                       </a:endParaRPr>
                     </a:p>
                   </a:txBody>
-                  <a:tcPr marL="109728" marR="109728" marT="45720" marB="45720">
+                  <a:tcPr marL="109728" marR="109728">
                     <a:lnL w="6350" cap="flat" cmpd="sng" algn="ctr">
                       <a:solidFill>
                         <a:srgbClr val="C9CEDA"/>
@@ -13411,7 +13311,7 @@
                     <a:bodyPr/>
                     <a:lstStyle/>
                     <a:p>
-                      <a:pPr algn="ctr" indent="0" marL="0">
+                      <a:pPr marL="0" indent="0" algn="ctr">
                         <a:buNone/>
                       </a:pPr>
                       <a:r>
@@ -13432,7 +13332,7 @@
                       </a:endParaRPr>
                     </a:p>
                   </a:txBody>
-                  <a:tcPr marL="109728" marR="109728" marT="45720" marB="45720">
+                  <a:tcPr marL="109728" marR="109728">
                     <a:lnL w="6350" cap="flat" cmpd="sng" algn="ctr">
                       <a:solidFill>
                         <a:srgbClr val="C9CEDA"/>
@@ -13476,7 +13376,7 @@
                     <a:bodyPr/>
                     <a:lstStyle/>
                     <a:p>
-                      <a:pPr algn="ctr" indent="0" marL="0">
+                      <a:pPr marL="0" indent="0" algn="ctr">
                         <a:buNone/>
                       </a:pPr>
                       <a:r>
@@ -13497,7 +13397,7 @@
                       </a:endParaRPr>
                     </a:p>
                   </a:txBody>
-                  <a:tcPr marL="109728" marR="109728" marT="45720" marB="45720">
+                  <a:tcPr marL="109728" marR="109728">
                     <a:lnL w="6350" cap="flat" cmpd="sng" algn="ctr">
                       <a:solidFill>
                         <a:srgbClr val="C9CEDA"/>
@@ -13541,7 +13441,7 @@
                     <a:bodyPr/>
                     <a:lstStyle/>
                     <a:p>
-                      <a:pPr indent="0" marL="0">
+                      <a:pPr marL="0" indent="0">
                         <a:buNone/>
                       </a:pPr>
                       <a:r>
@@ -13562,7 +13462,7 @@
                       </a:endParaRPr>
                     </a:p>
                   </a:txBody>
-                  <a:tcPr marL="109728" marR="109728" marT="45720" marB="45720">
+                  <a:tcPr marL="109728" marR="109728">
                     <a:lnL w="6350" cap="flat" cmpd="sng" algn="ctr">
                       <a:solidFill>
                         <a:srgbClr val="C9CEDA"/>
@@ -13601,6 +13501,11 @@
                     </a:lnB>
                   </a:tcPr>
                 </a:tc>
+                <a:extLst>
+                  <a:ext uri="{0D108BD9-81ED-4DB2-BD59-A6C34878D82A}">
+                    <a16:rowId xmlns:a16="http://schemas.microsoft.com/office/drawing/2014/main" val="10002"/>
+                  </a:ext>
+                </a:extLst>
               </a:tr>
               <a:tr h="475488">
                 <a:tc>
@@ -13608,7 +13513,7 @@
                     <a:bodyPr/>
                     <a:lstStyle/>
                     <a:p>
-                      <a:pPr indent="0" marL="0">
+                      <a:pPr marL="0" indent="0">
                         <a:buNone/>
                       </a:pPr>
                       <a:r>
@@ -13629,7 +13534,7 @@
                       </a:endParaRPr>
                     </a:p>
                   </a:txBody>
-                  <a:tcPr marL="109728" marR="109728" marT="45720" marB="45720">
+                  <a:tcPr marL="109728" marR="109728">
                     <a:lnL w="6350" cap="flat" cmpd="sng" algn="ctr">
                       <a:solidFill>
                         <a:srgbClr val="C9CEDA"/>
@@ -13673,7 +13578,7 @@
                     <a:bodyPr/>
                     <a:lstStyle/>
                     <a:p>
-                      <a:pPr algn="ctr" indent="0" marL="0">
+                      <a:pPr marL="0" indent="0" algn="ctr">
                         <a:buNone/>
                       </a:pPr>
                       <a:r>
@@ -13694,7 +13599,7 @@
                       </a:endParaRPr>
                     </a:p>
                   </a:txBody>
-                  <a:tcPr marL="109728" marR="109728" marT="45720" marB="45720">
+                  <a:tcPr marL="109728" marR="109728">
                     <a:lnL w="6350" cap="flat" cmpd="sng" algn="ctr">
                       <a:solidFill>
                         <a:srgbClr val="C9CEDA"/>
@@ -13738,7 +13643,7 @@
                     <a:bodyPr/>
                     <a:lstStyle/>
                     <a:p>
-                      <a:pPr algn="ctr" indent="0" marL="0">
+                      <a:pPr marL="0" indent="0" algn="ctr">
                         <a:buNone/>
                       </a:pPr>
                       <a:r>
@@ -13759,7 +13664,7 @@
                       </a:endParaRPr>
                     </a:p>
                   </a:txBody>
-                  <a:tcPr marL="109728" marR="109728" marT="45720" marB="45720">
+                  <a:tcPr marL="109728" marR="109728">
                     <a:lnL w="6350" cap="flat" cmpd="sng" algn="ctr">
                       <a:solidFill>
                         <a:srgbClr val="C9CEDA"/>
@@ -13803,7 +13708,7 @@
                     <a:bodyPr/>
                     <a:lstStyle/>
                     <a:p>
-                      <a:pPr indent="0" marL="0">
+                      <a:pPr marL="0" indent="0">
                         <a:buNone/>
                       </a:pPr>
                       <a:r>
@@ -13824,7 +13729,7 @@
                       </a:endParaRPr>
                     </a:p>
                   </a:txBody>
-                  <a:tcPr marL="109728" marR="109728" marT="45720" marB="45720">
+                  <a:tcPr marL="109728" marR="109728">
                     <a:lnL w="6350" cap="flat" cmpd="sng" algn="ctr">
                       <a:solidFill>
                         <a:srgbClr val="C9CEDA"/>
@@ -13863,6 +13768,11 @@
                     </a:lnB>
                   </a:tcPr>
                 </a:tc>
+                <a:extLst>
+                  <a:ext uri="{0D108BD9-81ED-4DB2-BD59-A6C34878D82A}">
+                    <a16:rowId xmlns:a16="http://schemas.microsoft.com/office/drawing/2014/main" val="10003"/>
+                  </a:ext>
+                </a:extLst>
               </a:tr>
               <a:tr h="475488">
                 <a:tc>
@@ -13870,7 +13780,7 @@
                     <a:bodyPr/>
                     <a:lstStyle/>
                     <a:p>
-                      <a:pPr indent="0" marL="0">
+                      <a:pPr marL="0" indent="0">
                         <a:buNone/>
                       </a:pPr>
                       <a:r>
@@ -13891,7 +13801,7 @@
                       </a:endParaRPr>
                     </a:p>
                   </a:txBody>
-                  <a:tcPr marL="109728" marR="109728" marT="45720" marB="45720">
+                  <a:tcPr marL="109728" marR="109728">
                     <a:lnL w="6350" cap="flat" cmpd="sng" algn="ctr">
                       <a:solidFill>
                         <a:srgbClr val="C9CEDA"/>
@@ -13935,7 +13845,7 @@
                     <a:bodyPr/>
                     <a:lstStyle/>
                     <a:p>
-                      <a:pPr algn="ctr" indent="0" marL="0">
+                      <a:pPr marL="0" indent="0" algn="ctr">
                         <a:buNone/>
                       </a:pPr>
                       <a:r>
@@ -13956,7 +13866,7 @@
                       </a:endParaRPr>
                     </a:p>
                   </a:txBody>
-                  <a:tcPr marL="109728" marR="109728" marT="45720" marB="45720">
+                  <a:tcPr marL="109728" marR="109728">
                     <a:lnL w="6350" cap="flat" cmpd="sng" algn="ctr">
                       <a:solidFill>
                         <a:srgbClr val="C9CEDA"/>
@@ -14000,7 +13910,7 @@
                     <a:bodyPr/>
                     <a:lstStyle/>
                     <a:p>
-                      <a:pPr algn="ctr" indent="0" marL="0">
+                      <a:pPr marL="0" indent="0" algn="ctr">
                         <a:buNone/>
                       </a:pPr>
                       <a:r>
@@ -14021,7 +13931,7 @@
                       </a:endParaRPr>
                     </a:p>
                   </a:txBody>
-                  <a:tcPr marL="109728" marR="109728" marT="45720" marB="45720">
+                  <a:tcPr marL="109728" marR="109728">
                     <a:lnL w="6350" cap="flat" cmpd="sng" algn="ctr">
                       <a:solidFill>
                         <a:srgbClr val="C9CEDA"/>
@@ -14065,7 +13975,7 @@
                     <a:bodyPr/>
                     <a:lstStyle/>
                     <a:p>
-                      <a:pPr indent="0" marL="0">
+                      <a:pPr marL="0" indent="0">
                         <a:buNone/>
                       </a:pPr>
                       <a:r>
@@ -14086,7 +13996,7 @@
                       </a:endParaRPr>
                     </a:p>
                   </a:txBody>
-                  <a:tcPr marL="109728" marR="109728" marT="45720" marB="45720">
+                  <a:tcPr marL="109728" marR="109728">
                     <a:lnL w="6350" cap="flat" cmpd="sng" algn="ctr">
                       <a:solidFill>
                         <a:srgbClr val="C9CEDA"/>
@@ -14125,6 +14035,11 @@
                     </a:lnB>
                   </a:tcPr>
                 </a:tc>
+                <a:extLst>
+                  <a:ext uri="{0D108BD9-81ED-4DB2-BD59-A6C34878D82A}">
+                    <a16:rowId xmlns:a16="http://schemas.microsoft.com/office/drawing/2014/main" val="10004"/>
+                  </a:ext>
+                </a:extLst>
               </a:tr>
               <a:tr h="475488">
                 <a:tc>
@@ -14132,7 +14047,7 @@
                     <a:bodyPr/>
                     <a:lstStyle/>
                     <a:p>
-                      <a:pPr indent="0" marL="0">
+                      <a:pPr marL="0" indent="0">
                         <a:buNone/>
                       </a:pPr>
                       <a:r>
@@ -14153,7 +14068,7 @@
                       </a:endParaRPr>
                     </a:p>
                   </a:txBody>
-                  <a:tcPr marL="109728" marR="109728" marT="45720" marB="45720">
+                  <a:tcPr marL="109728" marR="109728">
                     <a:lnL w="6350" cap="flat" cmpd="sng" algn="ctr">
                       <a:solidFill>
                         <a:srgbClr val="C9CEDA"/>
@@ -14197,7 +14112,7 @@
                     <a:bodyPr/>
                     <a:lstStyle/>
                     <a:p>
-                      <a:pPr algn="ctr" indent="0" marL="0">
+                      <a:pPr marL="0" indent="0" algn="ctr">
                         <a:buNone/>
                       </a:pPr>
                       <a:r>
@@ -14218,7 +14133,7 @@
                       </a:endParaRPr>
                     </a:p>
                   </a:txBody>
-                  <a:tcPr marL="109728" marR="109728" marT="45720" marB="45720">
+                  <a:tcPr marL="109728" marR="109728">
                     <a:lnL w="6350" cap="flat" cmpd="sng" algn="ctr">
                       <a:solidFill>
                         <a:srgbClr val="C9CEDA"/>
@@ -14262,7 +14177,7 @@
                     <a:bodyPr/>
                     <a:lstStyle/>
                     <a:p>
-                      <a:pPr algn="ctr" indent="0" marL="0">
+                      <a:pPr marL="0" indent="0" algn="ctr">
                         <a:buNone/>
                       </a:pPr>
                       <a:r>
@@ -14283,7 +14198,7 @@
                       </a:endParaRPr>
                     </a:p>
                   </a:txBody>
-                  <a:tcPr marL="109728" marR="109728" marT="45720" marB="45720">
+                  <a:tcPr marL="109728" marR="109728">
                     <a:lnL w="6350" cap="flat" cmpd="sng" algn="ctr">
                       <a:solidFill>
                         <a:srgbClr val="C9CEDA"/>
@@ -14327,7 +14242,7 @@
                     <a:bodyPr/>
                     <a:lstStyle/>
                     <a:p>
-                      <a:pPr indent="0" marL="0">
+                      <a:pPr marL="0" indent="0">
                         <a:buNone/>
                       </a:pPr>
                       <a:r>
@@ -14348,7 +14263,7 @@
                       </a:endParaRPr>
                     </a:p>
                   </a:txBody>
-                  <a:tcPr marL="109728" marR="109728" marT="45720" marB="45720">
+                  <a:tcPr marL="109728" marR="109728">
                     <a:lnL w="6350" cap="flat" cmpd="sng" algn="ctr">
                       <a:solidFill>
                         <a:srgbClr val="C9CEDA"/>
@@ -14387,6 +14302,11 @@
                     </a:lnB>
                   </a:tcPr>
                 </a:tc>
+                <a:extLst>
+                  <a:ext uri="{0D108BD9-81ED-4DB2-BD59-A6C34878D82A}">
+                    <a16:rowId xmlns:a16="http://schemas.microsoft.com/office/drawing/2014/main" val="10005"/>
+                  </a:ext>
+                </a:extLst>
               </a:tr>
               <a:tr h="475488">
                 <a:tc>
@@ -14394,7 +14314,7 @@
                     <a:bodyPr/>
                     <a:lstStyle/>
                     <a:p>
-                      <a:pPr indent="0" marL="0">
+                      <a:pPr marL="0" indent="0">
                         <a:buNone/>
                       </a:pPr>
                       <a:r>
@@ -14415,7 +14335,7 @@
                       </a:endParaRPr>
                     </a:p>
                   </a:txBody>
-                  <a:tcPr marL="109728" marR="109728" marT="45720" marB="45720">
+                  <a:tcPr marL="109728" marR="109728">
                     <a:lnL w="6350" cap="flat" cmpd="sng" algn="ctr">
                       <a:solidFill>
                         <a:srgbClr val="C9CEDA"/>
@@ -14459,7 +14379,7 @@
                     <a:bodyPr/>
                     <a:lstStyle/>
                     <a:p>
-                      <a:pPr algn="ctr" indent="0" marL="0">
+                      <a:pPr marL="0" indent="0" algn="ctr">
                         <a:buNone/>
                       </a:pPr>
                       <a:r>
@@ -14480,7 +14400,7 @@
                       </a:endParaRPr>
                     </a:p>
                   </a:txBody>
-                  <a:tcPr marL="109728" marR="109728" marT="45720" marB="45720">
+                  <a:tcPr marL="109728" marR="109728">
                     <a:lnL w="6350" cap="flat" cmpd="sng" algn="ctr">
                       <a:solidFill>
                         <a:srgbClr val="C9CEDA"/>
@@ -14524,7 +14444,7 @@
                     <a:bodyPr/>
                     <a:lstStyle/>
                     <a:p>
-                      <a:pPr algn="ctr" indent="0" marL="0">
+                      <a:pPr marL="0" indent="0" algn="ctr">
                         <a:buNone/>
                       </a:pPr>
                       <a:r>
@@ -14545,7 +14465,7 @@
                       </a:endParaRPr>
                     </a:p>
                   </a:txBody>
-                  <a:tcPr marL="109728" marR="109728" marT="45720" marB="45720">
+                  <a:tcPr marL="109728" marR="109728">
                     <a:lnL w="6350" cap="flat" cmpd="sng" algn="ctr">
                       <a:solidFill>
                         <a:srgbClr val="C9CEDA"/>
@@ -14589,7 +14509,7 @@
                     <a:bodyPr/>
                     <a:lstStyle/>
                     <a:p>
-                      <a:pPr indent="0" marL="0">
+                      <a:pPr marL="0" indent="0">
                         <a:buNone/>
                       </a:pPr>
                       <a:endParaRPr lang="en-US" sz="1500" dirty="0">
@@ -14599,7 +14519,7 @@
                       </a:endParaRPr>
                     </a:p>
                   </a:txBody>
-                  <a:tcPr marL="109728" marR="109728" marT="45720" marB="45720">
+                  <a:tcPr marL="109728" marR="109728">
                     <a:lnL w="6350" cap="flat" cmpd="sng" algn="ctr">
                       <a:solidFill>
                         <a:srgbClr val="C9CEDA"/>
@@ -14638,6 +14558,11 @@
                     </a:lnB>
                   </a:tcPr>
                 </a:tc>
+                <a:extLst>
+                  <a:ext uri="{0D108BD9-81ED-4DB2-BD59-A6C34878D82A}">
+                    <a16:rowId xmlns:a16="http://schemas.microsoft.com/office/drawing/2014/main" val="10006"/>
+                  </a:ext>
+                </a:extLst>
               </a:tr>
             </a:tbl>
           </a:graphicData>
@@ -14716,7 +14641,7 @@
           <a:bodyPr wrap="square" lIns="0" tIns="0" rIns="0" bIns="0" rtlCol="0" anchor="ctr"/>
           <a:lstStyle/>
           <a:p>
-            <a:pPr algn="ctr" indent="0" marL="0">
+            <a:pPr marL="0" indent="0" algn="ctr">
               <a:buNone/>
             </a:pPr>
             <a:r>
@@ -14733,7 +14658,7 @@
       </p:sp>
       <p:sp>
         <p:nvSpPr>
-          <p:cNvPr id="7" name="Text 4"/>
+          <p:cNvPr id="3" name="Text 4"/>
           <p:cNvSpPr txBox="1"/>
           <p:nvPr/>
         </p:nvSpPr>
@@ -14752,7 +14677,7 @@
           <a:bodyPr wrap="square" lIns="0" tIns="0" rIns="0" bIns="0" rtlCol="0" anchor="t"/>
           <a:lstStyle/>
           <a:p>
-            <a:pPr indent="0" marL="0">
+            <a:pPr marL="0" indent="0">
               <a:buNone/>
             </a:pPr>
             <a:r>
@@ -14763,9 +14688,6 @@
               </a:rPr>
               <a:t>Decision: bge-m3. </a:t>
             </a:r>
-            <a:pPr indent="0" marL="0">
-              <a:buNone/>
-            </a:pPr>
             <a:r>
               <a:rPr lang="en-US" sz="1500" dirty="0">
                 <a:solidFill>
@@ -14798,7 +14720,7 @@
           </a:prstGeom>
           <a:extLst>
             <a:ext uri="{C572A759-6A51-4108-AA02-DFA0A04FC94B}">
-              <ma14:wrappingTextBoxFlag xmlns:ma14="http://schemas.microsoft.com/office/mac/drawingml/2011/main" val="0"/>
+              <ma14:wrappingTextBoxFlag xmlns:ma14="http://schemas.microsoft.com/office/mac/drawingml/2011/main" xmlns="" val="0"/>
             </a:ext>
           </a:extLst>
         </p:spPr>
@@ -14816,7 +14738,7 @@
           <a:p>
             <a:pPr algn="r"/>
             <a:fld id="{F7021451-1387-4CA6-816F-3879F97B5CBC}" type="slidenum">
-              <a:rPr b="0" lang="en-US"/>
+              <a:rPr lang="en-US" b="0"/>
               <a:t>6</a:t>
             </a:fld>
             <a:endParaRPr lang="en-US"/>
@@ -14851,9 +14773,11 @@
       <p:sp>
         <p:nvSpPr>
           <p:cNvPr id="2" name="Text 1"/>
-          <p:cNvSpPr/>
+          <p:cNvSpPr>
+            <a:spLocks noGrp="1"/>
+          </p:cNvSpPr>
           <p:nvPr>
-            <p:ph idx="101" type="title" hasCustomPrompt="1"/>
+            <p:ph type="title" idx="101" hasCustomPrompt="1"/>
           </p:nvPr>
         </p:nvSpPr>
         <p:spPr>
@@ -14871,7 +14795,7 @@
           <a:bodyPr wrap="square" lIns="0" tIns="0" rIns="0" bIns="0" rtlCol="0" anchor="ctr"/>
           <a:lstStyle/>
           <a:p>
-            <a:pPr algn="l" indent="0" marL="0">
+            <a:pPr marL="0" indent="0" algn="l">
               <a:buNone/>
             </a:pPr>
             <a:r>
@@ -14888,7 +14812,7 @@
       </p:sp>
       <p:graphicFrame>
         <p:nvGraphicFramePr>
-          <p:cNvPr id="3" name="retrieval-chart" descr=""/>
+          <p:cNvPr id="3" name="retrieval-chart"/>
           <p:cNvGraphicFramePr/>
           <p:nvPr/>
         </p:nvGraphicFramePr>
@@ -14896,9 +14820,9 @@
           <a:off x="548640" y="1234440"/>
           <a:ext cx="6949440" cy="4983480"/>
         </p:xfrm>
-        <a:graphic xmlns:a="http://schemas.openxmlformats.org/drawingml/2006/main">
+        <a:graphic>
           <a:graphicData uri="http://schemas.openxmlformats.org/drawingml/2006/chart">
-            <c:chart xmlns:c="http://schemas.openxmlformats.org/drawingml/2006/chart" r:id="rId1"/>
+            <c:chart xmlns:c="http://schemas.openxmlformats.org/drawingml/2006/chart" xmlns:r="http://schemas.openxmlformats.org/officeDocument/2006/relationships" r:id="rId3"/>
           </a:graphicData>
         </a:graphic>
       </p:graphicFrame>
@@ -14948,7 +14872,7 @@
           <a:bodyPr wrap="square" lIns="0" tIns="0" rIns="0" bIns="0" rtlCol="0" anchor="ctr"/>
           <a:lstStyle/>
           <a:p>
-            <a:pPr algn="ctr" indent="0" marL="0">
+            <a:pPr marL="0" indent="0" algn="ctr">
               <a:buNone/>
             </a:pPr>
             <a:r>
@@ -14984,7 +14908,7 @@
           <a:bodyPr wrap="square" lIns="0" tIns="0" rIns="0" bIns="0" rtlCol="0" anchor="t"/>
           <a:lstStyle/>
           <a:p>
-            <a:pPr indent="0" marL="0">
+            <a:pPr marL="0" indent="0">
               <a:buNone/>
             </a:pPr>
             <a:r>
@@ -15020,7 +14944,7 @@
           <a:bodyPr wrap="square" lIns="0" tIns="0" rIns="0" bIns="0" rtlCol="0" anchor="t"/>
           <a:lstStyle/>
           <a:p>
-            <a:pPr indent="0" marL="0">
+            <a:pPr marL="0" indent="0">
               <a:buNone/>
             </a:pPr>
             <a:r>
@@ -15081,7 +15005,7 @@
           <a:bodyPr wrap="square" lIns="0" tIns="0" rIns="0" bIns="0" rtlCol="0" anchor="ctr"/>
           <a:lstStyle/>
           <a:p>
-            <a:pPr algn="ctr" indent="0" marL="0">
+            <a:pPr marL="0" indent="0" algn="ctr">
               <a:buNone/>
             </a:pPr>
             <a:r>
@@ -15117,7 +15041,7 @@
           <a:bodyPr wrap="square" lIns="0" tIns="0" rIns="0" bIns="0" rtlCol="0" anchor="t"/>
           <a:lstStyle/>
           <a:p>
-            <a:pPr indent="0" marL="0">
+            <a:pPr marL="0" indent="0">
               <a:buNone/>
             </a:pPr>
             <a:r>
@@ -15153,7 +15077,7 @@
           <a:bodyPr wrap="square" lIns="0" tIns="0" rIns="0" bIns="0" rtlCol="0" anchor="t"/>
           <a:lstStyle/>
           <a:p>
-            <a:pPr indent="0" marL="0">
+            <a:pPr marL="0" indent="0">
               <a:buNone/>
             </a:pPr>
             <a:r>
@@ -15214,7 +15138,7 @@
           <a:bodyPr wrap="square" lIns="0" tIns="0" rIns="0" bIns="0" rtlCol="0" anchor="ctr"/>
           <a:lstStyle/>
           <a:p>
-            <a:pPr algn="ctr" indent="0" marL="0">
+            <a:pPr marL="0" indent="0" algn="ctr">
               <a:buNone/>
             </a:pPr>
             <a:r>
@@ -15250,7 +15174,7 @@
           <a:bodyPr wrap="square" lIns="0" tIns="0" rIns="0" bIns="0" rtlCol="0" anchor="t"/>
           <a:lstStyle/>
           <a:p>
-            <a:pPr indent="0" marL="0">
+            <a:pPr marL="0" indent="0">
               <a:buNone/>
             </a:pPr>
             <a:r>
@@ -15286,7 +15210,7 @@
           <a:bodyPr wrap="square" lIns="0" tIns="0" rIns="0" bIns="0" rtlCol="0" anchor="t"/>
           <a:lstStyle/>
           <a:p>
-            <a:pPr indent="0" marL="0">
+            <a:pPr marL="0" indent="0">
               <a:buNone/>
             </a:pPr>
             <a:r>
@@ -15347,7 +15271,7 @@
           <a:bodyPr wrap="square" lIns="0" tIns="0" rIns="0" bIns="0" rtlCol="0" anchor="ctr"/>
           <a:lstStyle/>
           <a:p>
-            <a:pPr algn="ctr" indent="0" marL="0">
+            <a:pPr marL="0" indent="0" algn="ctr">
               <a:buNone/>
             </a:pPr>
             <a:r>
@@ -15383,7 +15307,7 @@
           <a:bodyPr wrap="square" lIns="0" tIns="0" rIns="0" bIns="0" rtlCol="0" anchor="t"/>
           <a:lstStyle/>
           <a:p>
-            <a:pPr indent="0" marL="0">
+            <a:pPr marL="0" indent="0">
               <a:buNone/>
             </a:pPr>
             <a:r>
@@ -15419,7 +15343,7 @@
           <a:bodyPr wrap="square" lIns="0" tIns="0" rIns="0" bIns="0" rtlCol="0" anchor="t"/>
           <a:lstStyle/>
           <a:p>
-            <a:pPr indent="0" marL="0">
+            <a:pPr marL="0" indent="0">
               <a:buNone/>
             </a:pPr>
             <a:r>
@@ -15454,7 +15378,7 @@
           </a:prstGeom>
           <a:extLst>
             <a:ext uri="{C572A759-6A51-4108-AA02-DFA0A04FC94B}">
-              <ma14:wrappingTextBoxFlag xmlns:ma14="http://schemas.microsoft.com/office/mac/drawingml/2011/main" val="0"/>
+              <ma14:wrappingTextBoxFlag xmlns:ma14="http://schemas.microsoft.com/office/mac/drawingml/2011/main" xmlns="" val="0"/>
             </a:ext>
           </a:extLst>
         </p:spPr>
@@ -15472,7 +15396,7 @@
           <a:p>
             <a:pPr algn="r"/>
             <a:fld id="{F7021451-1387-4CA6-816F-3879F97B5CBC}" type="slidenum">
-              <a:rPr b="0" lang="en-US"/>
+              <a:rPr lang="en-US" b="0"/>
               <a:t>7</a:t>
             </a:fld>
             <a:endParaRPr lang="en-US"/>
@@ -15507,9 +15431,11 @@
       <p:sp>
         <p:nvSpPr>
           <p:cNvPr id="2" name="Text 1"/>
-          <p:cNvSpPr/>
+          <p:cNvSpPr>
+            <a:spLocks noGrp="1"/>
+          </p:cNvSpPr>
           <p:nvPr>
-            <p:ph idx="101" type="title" hasCustomPrompt="1"/>
+            <p:ph type="title" idx="101" hasCustomPrompt="1"/>
           </p:nvPr>
         </p:nvSpPr>
         <p:spPr>
@@ -15527,7 +15453,7 @@
           <a:bodyPr wrap="square" lIns="0" tIns="0" rIns="0" bIns="0" rtlCol="0" anchor="ctr"/>
           <a:lstStyle/>
           <a:p>
-            <a:pPr algn="l" indent="0" marL="0">
+            <a:pPr marL="0" indent="0" algn="l">
               <a:buNone/>
             </a:pPr>
             <a:r>
@@ -15588,7 +15514,7 @@
           <a:bodyPr wrap="square" lIns="0" tIns="0" rIns="0" bIns="0" rtlCol="0" anchor="ctr"/>
           <a:lstStyle/>
           <a:p>
-            <a:pPr algn="ctr" indent="0" marL="0">
+            <a:pPr marL="0" indent="0" algn="ctr">
               <a:buNone/>
             </a:pPr>
             <a:r>
@@ -15624,7 +15550,7 @@
           <a:bodyPr wrap="square" lIns="0" tIns="0" rIns="0" bIns="0" rtlCol="0" anchor="t"/>
           <a:lstStyle/>
           <a:p>
-            <a:pPr indent="0" marL="0">
+            <a:pPr marL="0" indent="0">
               <a:buNone/>
             </a:pPr>
             <a:r>
@@ -15660,7 +15586,7 @@
           <a:bodyPr wrap="square" lIns="0" tIns="0" rIns="0" bIns="0" rtlCol="0" anchor="t"/>
           <a:lstStyle/>
           <a:p>
-            <a:pPr indent="0" marL="0">
+            <a:pPr marL="0" indent="0">
               <a:buNone/>
             </a:pPr>
             <a:r>
@@ -15721,7 +15647,7 @@
           <a:bodyPr wrap="square" lIns="0" tIns="0" rIns="0" bIns="0" rtlCol="0" anchor="ctr"/>
           <a:lstStyle/>
           <a:p>
-            <a:pPr algn="ctr" indent="0" marL="0">
+            <a:pPr marL="0" indent="0" algn="ctr">
               <a:buNone/>
             </a:pPr>
             <a:r>
@@ -15757,7 +15683,7 @@
           <a:bodyPr wrap="square" lIns="0" tIns="0" rIns="0" bIns="0" rtlCol="0" anchor="t"/>
           <a:lstStyle/>
           <a:p>
-            <a:pPr indent="0" marL="0">
+            <a:pPr marL="0" indent="0">
               <a:buNone/>
             </a:pPr>
             <a:r>
@@ -15793,7 +15719,7 @@
           <a:bodyPr wrap="square" lIns="0" tIns="0" rIns="0" bIns="0" rtlCol="0" anchor="t"/>
           <a:lstStyle/>
           <a:p>
-            <a:pPr indent="0" marL="0">
+            <a:pPr marL="0" indent="0">
               <a:buNone/>
             </a:pPr>
             <a:r>
@@ -15854,7 +15780,7 @@
           <a:bodyPr wrap="square" lIns="0" tIns="0" rIns="0" bIns="0" rtlCol="0" anchor="ctr"/>
           <a:lstStyle/>
           <a:p>
-            <a:pPr algn="ctr" indent="0" marL="0">
+            <a:pPr marL="0" indent="0" algn="ctr">
               <a:buNone/>
             </a:pPr>
             <a:r>
@@ -15890,7 +15816,7 @@
           <a:bodyPr wrap="square" lIns="0" tIns="0" rIns="0" bIns="0" rtlCol="0" anchor="t"/>
           <a:lstStyle/>
           <a:p>
-            <a:pPr indent="0" marL="0">
+            <a:pPr marL="0" indent="0">
               <a:buNone/>
             </a:pPr>
             <a:r>
@@ -15926,7 +15852,7 @@
           <a:bodyPr wrap="square" lIns="0" tIns="0" rIns="0" bIns="0" rtlCol="0" anchor="t"/>
           <a:lstStyle/>
           <a:p>
-            <a:pPr indent="0" marL="0">
+            <a:pPr marL="0" indent="0">
               <a:buNone/>
             </a:pPr>
             <a:r>
@@ -15987,7 +15913,7 @@
           <a:bodyPr wrap="square" lIns="0" tIns="0" rIns="0" bIns="0" rtlCol="0" anchor="ctr"/>
           <a:lstStyle/>
           <a:p>
-            <a:pPr algn="ctr" indent="0" marL="0">
+            <a:pPr marL="0" indent="0" algn="ctr">
               <a:buNone/>
             </a:pPr>
             <a:r>
@@ -16023,7 +15949,7 @@
           <a:bodyPr wrap="square" lIns="0" tIns="0" rIns="0" bIns="0" rtlCol="0" anchor="t"/>
           <a:lstStyle/>
           <a:p>
-            <a:pPr indent="0" marL="0">
+            <a:pPr marL="0" indent="0">
               <a:buNone/>
             </a:pPr>
             <a:r>
@@ -16059,7 +15985,7 @@
           <a:bodyPr wrap="square" lIns="0" tIns="0" rIns="0" bIns="0" rtlCol="0" anchor="t"/>
           <a:lstStyle/>
           <a:p>
-            <a:pPr indent="0" marL="0">
+            <a:pPr marL="0" indent="0">
               <a:buNone/>
             </a:pPr>
             <a:r>
@@ -16122,7 +16048,7 @@
           <a:bodyPr wrap="square" lIns="0" tIns="0" rIns="0" bIns="0" rtlCol="0" anchor="t"/>
           <a:lstStyle/>
           <a:p>
-            <a:pPr indent="0" marL="0">
+            <a:pPr marL="0" indent="0">
               <a:buNone/>
             </a:pPr>
             <a:r>
@@ -16158,7 +16084,7 @@
           <a:bodyPr wrap="square" lIns="0" tIns="0" rIns="0" bIns="0" rtlCol="0" anchor="t"/>
           <a:lstStyle/>
           <a:p>
-            <a:pPr indent="0" marL="0">
+            <a:pPr marL="0" indent="0">
               <a:spcAft>
                 <a:spcPts val="800"/>
               </a:spcAft>
@@ -16178,7 +16104,7 @@
             <a:endParaRPr lang="en-US" sz="1300" dirty="0"/>
           </a:p>
           <a:p>
-            <a:pPr indent="0" marL="0">
+            <a:pPr marL="0" indent="0">
               <a:spcAft>
                 <a:spcPts val="800"/>
               </a:spcAft>
@@ -16198,7 +16124,7 @@
             <a:endParaRPr lang="en-US" sz="1300" dirty="0"/>
           </a:p>
           <a:p>
-            <a:pPr indent="0" marL="0">
+            <a:pPr marL="0" indent="0">
               <a:spcAft>
                 <a:spcPts val="800"/>
               </a:spcAft>
@@ -16218,7 +16144,7 @@
             <a:endParaRPr lang="en-US" sz="1300" dirty="0"/>
           </a:p>
           <a:p>
-            <a:pPr indent="0" marL="0">
+            <a:pPr marL="0" indent="0">
               <a:spcAft>
                 <a:spcPts val="800"/>
               </a:spcAft>
@@ -16238,7 +16164,7 @@
             <a:endParaRPr lang="en-US" sz="1300" dirty="0"/>
           </a:p>
           <a:p>
-            <a:pPr indent="0" marL="0">
+            <a:pPr marL="0" indent="0">
               <a:spcAft>
                 <a:spcPts val="800"/>
               </a:spcAft>
@@ -16280,7 +16206,7 @@
           <a:bodyPr wrap="square" lIns="0" tIns="0" rIns="0" bIns="0" rtlCol="0" anchor="t"/>
           <a:lstStyle/>
           <a:p>
-            <a:pPr indent="0" marL="0">
+            <a:pPr marL="0" indent="0">
               <a:buNone/>
             </a:pPr>
             <a:r>
@@ -16315,7 +16241,7 @@
           </a:prstGeom>
           <a:extLst>
             <a:ext uri="{C572A759-6A51-4108-AA02-DFA0A04FC94B}">
-              <ma14:wrappingTextBoxFlag xmlns:ma14="http://schemas.microsoft.com/office/mac/drawingml/2011/main" val="0"/>
+              <ma14:wrappingTextBoxFlag xmlns:ma14="http://schemas.microsoft.com/office/mac/drawingml/2011/main" xmlns="" val="0"/>
             </a:ext>
           </a:extLst>
         </p:spPr>
@@ -16333,7 +16259,7 @@
           <a:p>
             <a:pPr algn="r"/>
             <a:fld id="{F7021451-1387-4CA6-816F-3879F97B5CBC}" type="slidenum">
-              <a:rPr b="0" lang="en-US"/>
+              <a:rPr lang="en-US" b="0"/>
               <a:t>8</a:t>
             </a:fld>
             <a:endParaRPr lang="en-US"/>
@@ -16368,9 +16294,11 @@
       <p:sp>
         <p:nvSpPr>
           <p:cNvPr id="2" name="Text 1"/>
-          <p:cNvSpPr/>
+          <p:cNvSpPr>
+            <a:spLocks noGrp="1"/>
+          </p:cNvSpPr>
           <p:nvPr>
-            <p:ph idx="101" type="title" hasCustomPrompt="1"/>
+            <p:ph type="title" idx="101" hasCustomPrompt="1"/>
           </p:nvPr>
         </p:nvSpPr>
         <p:spPr>
@@ -16388,7 +16316,7 @@
           <a:bodyPr wrap="square" lIns="0" tIns="0" rIns="0" bIns="0" rtlCol="0" anchor="ctr"/>
           <a:lstStyle/>
           <a:p>
-            <a:pPr algn="l" indent="0" marL="0">
+            <a:pPr marL="0" indent="0" algn="l">
               <a:buNone/>
             </a:pPr>
             <a:r>
@@ -16451,7 +16379,7 @@
           <a:bodyPr wrap="square" lIns="0" tIns="0" rIns="0" bIns="0" rtlCol="0" anchor="t"/>
           <a:lstStyle/>
           <a:p>
-            <a:pPr indent="0" marL="0">
+            <a:pPr marL="0" indent="0">
               <a:buNone/>
             </a:pPr>
             <a:r>
@@ -16490,7 +16418,7 @@
           <a:bodyPr wrap="square" lIns="0" tIns="0" rIns="0" bIns="0" rtlCol="0" anchor="t"/>
           <a:lstStyle/>
           <a:p>
-            <a:pPr indent="0" marL="0">
+            <a:pPr marL="0" indent="0">
               <a:buNone/>
             </a:pPr>
             <a:r>
@@ -16553,7 +16481,7 @@
           <a:bodyPr wrap="square" lIns="0" tIns="0" rIns="0" bIns="0" rtlCol="0" anchor="t"/>
           <a:lstStyle/>
           <a:p>
-            <a:pPr indent="0" marL="0">
+            <a:pPr marL="0" indent="0">
               <a:buNone/>
             </a:pPr>
             <a:r>
@@ -16592,7 +16520,7 @@
           <a:bodyPr wrap="square" lIns="0" tIns="0" rIns="0" bIns="0" rtlCol="0" anchor="t"/>
           <a:lstStyle/>
           <a:p>
-            <a:pPr indent="0" marL="0">
+            <a:pPr marL="0" indent="0">
               <a:buNone/>
             </a:pPr>
             <a:r>
@@ -16655,7 +16583,7 @@
           <a:bodyPr wrap="square" lIns="0" tIns="0" rIns="0" bIns="0" rtlCol="0" anchor="t"/>
           <a:lstStyle/>
           <a:p>
-            <a:pPr indent="0" marL="0">
+            <a:pPr marL="0" indent="0">
               <a:buNone/>
             </a:pPr>
             <a:r>
@@ -16694,7 +16622,7 @@
           <a:bodyPr wrap="square" lIns="0" tIns="0" rIns="0" bIns="0" rtlCol="0" anchor="t"/>
           <a:lstStyle/>
           <a:p>
-            <a:pPr indent="0" marL="0">
+            <a:pPr marL="0" indent="0">
               <a:buNone/>
             </a:pPr>
             <a:r>
@@ -16757,7 +16685,7 @@
           <a:bodyPr wrap="square" lIns="0" tIns="0" rIns="0" bIns="0" rtlCol="0" anchor="t"/>
           <a:lstStyle/>
           <a:p>
-            <a:pPr indent="0" marL="0">
+            <a:pPr marL="0" indent="0">
               <a:buNone/>
             </a:pPr>
             <a:r>
@@ -16796,7 +16724,7 @@
           <a:bodyPr wrap="square" lIns="0" tIns="0" rIns="0" bIns="0" rtlCol="0" anchor="t"/>
           <a:lstStyle/>
           <a:p>
-            <a:pPr indent="0" marL="0">
+            <a:pPr marL="0" indent="0">
               <a:buNone/>
             </a:pPr>
             <a:r>
@@ -16832,7 +16760,7 @@
           <a:bodyPr wrap="square" lIns="0" tIns="0" rIns="0" bIns="0" rtlCol="0" anchor="t"/>
           <a:lstStyle/>
           <a:p>
-            <a:pPr indent="0" marL="0">
+            <a:pPr marL="0" indent="0">
               <a:buNone/>
             </a:pPr>
             <a:r>
@@ -16895,7 +16823,7 @@
           <a:bodyPr wrap="square" lIns="0" tIns="0" rIns="0" bIns="0" rtlCol="0" anchor="t"/>
           <a:lstStyle/>
           <a:p>
-            <a:pPr indent="0" marL="0">
+            <a:pPr marL="0" indent="0">
               <a:buNone/>
             </a:pPr>
             <a:r>
@@ -16909,7 +16837,7 @@
             <a:endParaRPr lang="en-US" sz="1600" dirty="0"/>
           </a:p>
           <a:p>
-            <a:pPr indent="0" marL="0">
+            <a:pPr marL="0" indent="0">
               <a:buNone/>
             </a:pPr>
             <a:r>
@@ -16972,7 +16900,7 @@
           <a:bodyPr wrap="square" lIns="0" tIns="0" rIns="0" bIns="0" rtlCol="0" anchor="t"/>
           <a:lstStyle/>
           <a:p>
-            <a:pPr indent="0" marL="0">
+            <a:pPr marL="0" indent="0">
               <a:buNone/>
             </a:pPr>
             <a:r>
@@ -16986,7 +16914,7 @@
             <a:endParaRPr lang="en-US" sz="1600" dirty="0"/>
           </a:p>
           <a:p>
-            <a:pPr indent="0" marL="0">
+            <a:pPr marL="0" indent="0">
               <a:buNone/>
             </a:pPr>
             <a:r>
@@ -17049,7 +16977,7 @@
           <a:bodyPr wrap="square" lIns="0" tIns="0" rIns="0" bIns="0" rtlCol="0" anchor="t"/>
           <a:lstStyle/>
           <a:p>
-            <a:pPr indent="0" marL="0">
+            <a:pPr marL="0" indent="0">
               <a:buNone/>
             </a:pPr>
             <a:r>
@@ -17063,7 +16991,7 @@
             <a:endParaRPr lang="en-US" sz="1600" dirty="0"/>
           </a:p>
           <a:p>
-            <a:pPr indent="0" marL="0">
+            <a:pPr marL="0" indent="0">
               <a:buNone/>
             </a:pPr>
             <a:r>
@@ -17098,7 +17026,7 @@
           </a:prstGeom>
           <a:extLst>
             <a:ext uri="{C572A759-6A51-4108-AA02-DFA0A04FC94B}">
-              <ma14:wrappingTextBoxFlag xmlns:ma14="http://schemas.microsoft.com/office/mac/drawingml/2011/main" val="0"/>
+              <ma14:wrappingTextBoxFlag xmlns:ma14="http://schemas.microsoft.com/office/mac/drawingml/2011/main" xmlns="" val="0"/>
             </a:ext>
           </a:extLst>
         </p:spPr>
@@ -17116,7 +17044,7 @@
           <a:p>
             <a:pPr algn="r"/>
             <a:fld id="{F7021451-1387-4CA6-816F-3879F97B5CBC}" type="slidenum">
-              <a:rPr b="0" lang="en-US"/>
+              <a:rPr lang="en-US" b="0"/>
               <a:t>9</a:t>
             </a:fld>
             <a:endParaRPr lang="en-US"/>
@@ -17424,4 +17352,299 @@
     </a:ext>
   </a:extLst>
 </a:theme>
+</file>
+
+<file path=ppt/theme/theme2.xml><?xml version="1.0" encoding="utf-8"?>
+<a:theme xmlns:a="http://schemas.openxmlformats.org/drawingml/2006/main" name="Office Theme">
+  <a:themeElements>
+    <a:clrScheme name="Office">
+      <a:dk1>
+        <a:sysClr val="windowText" lastClr="000000"/>
+      </a:dk1>
+      <a:lt1>
+        <a:sysClr val="window" lastClr="FFFFFF"/>
+      </a:lt1>
+      <a:dk2>
+        <a:srgbClr val="44546A"/>
+      </a:dk2>
+      <a:lt2>
+        <a:srgbClr val="E7E6E6"/>
+      </a:lt2>
+      <a:accent1>
+        <a:srgbClr val="4472C4"/>
+      </a:accent1>
+      <a:accent2>
+        <a:srgbClr val="ED7D31"/>
+      </a:accent2>
+      <a:accent3>
+        <a:srgbClr val="A5A5A5"/>
+      </a:accent3>
+      <a:accent4>
+        <a:srgbClr val="FFC000"/>
+      </a:accent4>
+      <a:accent5>
+        <a:srgbClr val="5B9BD5"/>
+      </a:accent5>
+      <a:accent6>
+        <a:srgbClr val="70AD47"/>
+      </a:accent6>
+      <a:hlink>
+        <a:srgbClr val="0563C1"/>
+      </a:hlink>
+      <a:folHlink>
+        <a:srgbClr val="954F72"/>
+      </a:folHlink>
+    </a:clrScheme>
+    <a:fontScheme name="Office">
+      <a:majorFont>
+        <a:latin typeface="Calibri Light" panose="020F0302020204030204"/>
+        <a:ea typeface=""/>
+        <a:cs typeface=""/>
+        <a:font script="Jpan" typeface="游ゴシック Light"/>
+        <a:font script="Hang" typeface="맑은 고딕"/>
+        <a:font script="Hans" typeface="等线 Light"/>
+        <a:font script="Hant" typeface="新細明體"/>
+        <a:font script="Arab" typeface="Times New Roman"/>
+        <a:font script="Hebr" typeface="Times New Roman"/>
+        <a:font script="Thai" typeface="Angsana New"/>
+        <a:font script="Ethi" typeface="Nyala"/>
+        <a:font script="Beng" typeface="Vrinda"/>
+        <a:font script="Gujr" typeface="Shruti"/>
+        <a:font script="Khmr" typeface="MoolBoran"/>
+        <a:font script="Knda" typeface="Tunga"/>
+        <a:font script="Guru" typeface="Raavi"/>
+        <a:font script="Cans" typeface="Euphemia"/>
+        <a:font script="Cher" typeface="Plantagenet Cherokee"/>
+        <a:font script="Yiii" typeface="Microsoft Yi Baiti"/>
+        <a:font script="Tibt" typeface="Microsoft Himalaya"/>
+        <a:font script="Thaa" typeface="MV Boli"/>
+        <a:font script="Deva" typeface="Mangal"/>
+        <a:font script="Telu" typeface="Gautami"/>
+        <a:font script="Taml" typeface="Latha"/>
+        <a:font script="Syrc" typeface="Estrangelo Edessa"/>
+        <a:font script="Orya" typeface="Kalinga"/>
+        <a:font script="Mlym" typeface="Kartika"/>
+        <a:font script="Laoo" typeface="DokChampa"/>
+        <a:font script="Sinh" typeface="Iskoola Pota"/>
+        <a:font script="Mong" typeface="Mongolian Baiti"/>
+        <a:font script="Viet" typeface="Times New Roman"/>
+        <a:font script="Uigh" typeface="Microsoft Uighur"/>
+        <a:font script="Geor" typeface="Sylfaen"/>
+        <a:font script="Armn" typeface="Arial"/>
+        <a:font script="Bugi" typeface="Leelawadee UI"/>
+        <a:font script="Bopo" typeface="Microsoft JhengHei"/>
+        <a:font script="Java" typeface="Javanese Text"/>
+        <a:font script="Lisu" typeface="Segoe UI"/>
+        <a:font script="Mymr" typeface="Myanmar Text"/>
+        <a:font script="Nkoo" typeface="Ebrima"/>
+        <a:font script="Olck" typeface="Nirmala UI"/>
+        <a:font script="Osma" typeface="Ebrima"/>
+        <a:font script="Phag" typeface="Phagspa"/>
+        <a:font script="Syrn" typeface="Estrangelo Edessa"/>
+        <a:font script="Syrj" typeface="Estrangelo Edessa"/>
+        <a:font script="Syre" typeface="Estrangelo Edessa"/>
+        <a:font script="Sora" typeface="Nirmala UI"/>
+        <a:font script="Tale" typeface="Microsoft Tai Le"/>
+        <a:font script="Talu" typeface="Microsoft New Tai Lue"/>
+        <a:font script="Tfng" typeface="Ebrima"/>
+      </a:majorFont>
+      <a:minorFont>
+        <a:latin typeface="Calibri" panose="020F0502020204030204"/>
+        <a:ea typeface=""/>
+        <a:cs typeface=""/>
+        <a:font script="Jpan" typeface="游ゴシック"/>
+        <a:font script="Hang" typeface="맑은 고딕"/>
+        <a:font script="Hans" typeface="等线"/>
+        <a:font script="Hant" typeface="新細明體"/>
+        <a:font script="Arab" typeface="Arial"/>
+        <a:font script="Hebr" typeface="Arial"/>
+        <a:font script="Thai" typeface="Cordia New"/>
+        <a:font script="Ethi" typeface="Nyala"/>
+        <a:font script="Beng" typeface="Vrinda"/>
+        <a:font script="Gujr" typeface="Shruti"/>
+        <a:font script="Khmr" typeface="DaunPenh"/>
+        <a:font script="Knda" typeface="Tunga"/>
+        <a:font script="Guru" typeface="Raavi"/>
+        <a:font script="Cans" typeface="Euphemia"/>
+        <a:font script="Cher" typeface="Plantagenet Cherokee"/>
+        <a:font script="Yiii" typeface="Microsoft Yi Baiti"/>
+        <a:font script="Tibt" typeface="Microsoft Himalaya"/>
+        <a:font script="Thaa" typeface="MV Boli"/>
+        <a:font script="Deva" typeface="Mangal"/>
+        <a:font script="Telu" typeface="Gautami"/>
+        <a:font script="Taml" typeface="Latha"/>
+        <a:font script="Syrc" typeface="Estrangelo Edessa"/>
+        <a:font script="Orya" typeface="Kalinga"/>
+        <a:font script="Mlym" typeface="Kartika"/>
+        <a:font script="Laoo" typeface="DokChampa"/>
+        <a:font script="Sinh" typeface="Iskoola Pota"/>
+        <a:font script="Mong" typeface="Mongolian Baiti"/>
+        <a:font script="Viet" typeface="Arial"/>
+        <a:font script="Uigh" typeface="Microsoft Uighur"/>
+        <a:font script="Geor" typeface="Sylfaen"/>
+        <a:font script="Armn" typeface="Arial"/>
+        <a:font script="Bugi" typeface="Leelawadee UI"/>
+        <a:font script="Bopo" typeface="Microsoft JhengHei"/>
+        <a:font script="Java" typeface="Javanese Text"/>
+        <a:font script="Lisu" typeface="Segoe UI"/>
+        <a:font script="Mymr" typeface="Myanmar Text"/>
+        <a:font script="Nkoo" typeface="Ebrima"/>
+        <a:font script="Olck" typeface="Nirmala UI"/>
+        <a:font script="Osma" typeface="Ebrima"/>
+        <a:font script="Phag" typeface="Phagspa"/>
+        <a:font script="Syrn" typeface="Estrangelo Edessa"/>
+        <a:font script="Syrj" typeface="Estrangelo Edessa"/>
+        <a:font script="Syre" typeface="Estrangelo Edessa"/>
+        <a:font script="Sora" typeface="Nirmala UI"/>
+        <a:font script="Tale" typeface="Microsoft Tai Le"/>
+        <a:font script="Talu" typeface="Microsoft New Tai Lue"/>
+        <a:font script="Tfng" typeface="Ebrima"/>
+      </a:minorFont>
+    </a:fontScheme>
+    <a:fmtScheme name="Office">
+      <a:fillStyleLst>
+        <a:solidFill>
+          <a:schemeClr val="phClr"/>
+        </a:solidFill>
+        <a:gradFill rotWithShape="1">
+          <a:gsLst>
+            <a:gs pos="0">
+              <a:schemeClr val="phClr">
+                <a:lumMod val="110000"/>
+                <a:satMod val="105000"/>
+                <a:tint val="67000"/>
+              </a:schemeClr>
+            </a:gs>
+            <a:gs pos="50000">
+              <a:schemeClr val="phClr">
+                <a:lumMod val="105000"/>
+                <a:satMod val="103000"/>
+                <a:tint val="73000"/>
+              </a:schemeClr>
+            </a:gs>
+            <a:gs pos="100000">
+              <a:schemeClr val="phClr">
+                <a:lumMod val="105000"/>
+                <a:satMod val="109000"/>
+                <a:tint val="81000"/>
+              </a:schemeClr>
+            </a:gs>
+          </a:gsLst>
+          <a:lin ang="5400000" scaled="0"/>
+        </a:gradFill>
+        <a:gradFill rotWithShape="1">
+          <a:gsLst>
+            <a:gs pos="0">
+              <a:schemeClr val="phClr">
+                <a:satMod val="103000"/>
+                <a:lumMod val="102000"/>
+                <a:tint val="94000"/>
+              </a:schemeClr>
+            </a:gs>
+            <a:gs pos="50000">
+              <a:schemeClr val="phClr">
+                <a:satMod val="110000"/>
+                <a:lumMod val="100000"/>
+                <a:shade val="100000"/>
+              </a:schemeClr>
+            </a:gs>
+            <a:gs pos="100000">
+              <a:schemeClr val="phClr">
+                <a:lumMod val="99000"/>
+                <a:satMod val="120000"/>
+                <a:shade val="78000"/>
+              </a:schemeClr>
+            </a:gs>
+          </a:gsLst>
+          <a:lin ang="5400000" scaled="0"/>
+        </a:gradFill>
+      </a:fillStyleLst>
+      <a:lnStyleLst>
+        <a:ln w="6350" cap="flat" cmpd="sng" algn="ctr">
+          <a:solidFill>
+            <a:schemeClr val="phClr"/>
+          </a:solidFill>
+          <a:prstDash val="solid"/>
+          <a:miter lim="800000"/>
+        </a:ln>
+        <a:ln w="12700" cap="flat" cmpd="sng" algn="ctr">
+          <a:solidFill>
+            <a:schemeClr val="phClr"/>
+          </a:solidFill>
+          <a:prstDash val="solid"/>
+          <a:miter lim="800000"/>
+        </a:ln>
+        <a:ln w="19050" cap="flat" cmpd="sng" algn="ctr">
+          <a:solidFill>
+            <a:schemeClr val="phClr"/>
+          </a:solidFill>
+          <a:prstDash val="solid"/>
+          <a:miter lim="800000"/>
+        </a:ln>
+      </a:lnStyleLst>
+      <a:effectStyleLst>
+        <a:effectStyle>
+          <a:effectLst/>
+        </a:effectStyle>
+        <a:effectStyle>
+          <a:effectLst/>
+        </a:effectStyle>
+        <a:effectStyle>
+          <a:effectLst>
+            <a:outerShdw blurRad="57150" dist="19050" dir="5400000" algn="ctr" rotWithShape="0">
+              <a:srgbClr val="000000">
+                <a:alpha val="63000"/>
+              </a:srgbClr>
+            </a:outerShdw>
+          </a:effectLst>
+        </a:effectStyle>
+      </a:effectStyleLst>
+      <a:bgFillStyleLst>
+        <a:solidFill>
+          <a:schemeClr val="phClr"/>
+        </a:solidFill>
+        <a:solidFill>
+          <a:schemeClr val="phClr">
+            <a:tint val="95000"/>
+            <a:satMod val="170000"/>
+          </a:schemeClr>
+        </a:solidFill>
+        <a:gradFill rotWithShape="1">
+          <a:gsLst>
+            <a:gs pos="0">
+              <a:schemeClr val="phClr">
+                <a:tint val="93000"/>
+                <a:satMod val="150000"/>
+                <a:shade val="98000"/>
+                <a:lumMod val="102000"/>
+              </a:schemeClr>
+            </a:gs>
+            <a:gs pos="50000">
+              <a:schemeClr val="phClr">
+                <a:tint val="98000"/>
+                <a:satMod val="130000"/>
+                <a:shade val="90000"/>
+                <a:lumMod val="103000"/>
+              </a:schemeClr>
+            </a:gs>
+            <a:gs pos="100000">
+              <a:schemeClr val="phClr">
+                <a:shade val="63000"/>
+                <a:satMod val="120000"/>
+              </a:schemeClr>
+            </a:gs>
+          </a:gsLst>
+          <a:lin ang="5400000" scaled="0"/>
+        </a:gradFill>
+      </a:bgFillStyleLst>
+    </a:fmtScheme>
+  </a:themeElements>
+  <a:objectDefaults/>
+  <a:extraClrSchemeLst/>
+  <a:extLst>
+    <a:ext uri="{05A4C25C-085E-4340-85A3-A5531E510DB2}">
+      <thm15:themeFamily xmlns:thm15="http://schemas.microsoft.com/office/thememl/2012/main" name="Office Theme" id="{62F939B6-93AF-4DB8-9C6B-D6C7DFDC589F}" vid="{4A3C46E8-61CC-4603-A589-7422A47A8E4A}"/>
+    </a:ext>
+  </a:extLst>
+</a:theme>
 </file>